--- a/schools-presentations/A Lykeiou/A5 - Computer Networks and Internet/Α.5.M2 Έλεγχος Λειτουργίας Δικτύου - Μέρος 2.pptx
+++ b/schools-presentations/A Lykeiou/A5 - Computer Networks and Internet/Α.5.M2 Έλεγχος Λειτουργίας Δικτύου - Μέρος 2.pptx
@@ -124,77 +124,15 @@
 </p:presentation>
 </file>
 
-<file path=ppt/revisionInfo.xml><?xml version="1.0" encoding="utf-8"?>
-<p1510:revInfo xmlns:a="http://schemas.openxmlformats.org/drawingml/2006/main" xmlns:r="http://schemas.openxmlformats.org/officeDocument/2006/relationships" xmlns:p1510="http://schemas.microsoft.com/office/powerpoint/2015/10/main">
-  <p1510:revLst>
-    <p1510:client id="{48906E57-F3CE-4D7E-A3AE-C8DEB14263BE}" v="3" dt="2026-10-10T07:56:40.280"/>
-    <p1510:client id="{C0115CBF-127E-4FA7-80FE-C76B68A1C7E2}" v="8" dt="2026-10-10T07:12:05.183"/>
-  </p1510:revLst>
-</p1510:revInfo>
-</file>
-
 <file path=ppt/changesInfos/changesInfo1.xml><?xml version="1.0" encoding="utf-8"?>
 <pc:chgInfo xmlns:a="http://schemas.openxmlformats.org/drawingml/2006/main" xmlns:r="http://schemas.openxmlformats.org/officeDocument/2006/relationships" xmlns:ac="http://schemas.microsoft.com/office/drawing/2013/main/command" xmlns:pc="http://schemas.microsoft.com/office/powerpoint/2013/main/command">
   <pc:docChgLst>
     <pc:chgData name="Άριστος Αρέστη" userId="813aa191-2d4c-464f-9d05-0a7e494d859f" providerId="ADAL" clId="{49C7B61D-1ACF-4AFF-A04E-A3B433E32474}"/>
     <pc:docChg chg="custSel addSld delSld modSld sldOrd">
-      <pc:chgData name="Άριστος Αρέστη" userId="813aa191-2d4c-464f-9d05-0a7e494d859f" providerId="ADAL" clId="{49C7B61D-1ACF-4AFF-A04E-A3B433E32474}" dt="2026-10-10T07:56:49.361" v="957" actId="47"/>
+      <pc:chgData name="Άριστος Αρέστη" userId="813aa191-2d4c-464f-9d05-0a7e494d859f" providerId="ADAL" clId="{49C7B61D-1ACF-4AFF-A04E-A3B433E32474}" dt="2026-10-12T05:47:15.702" v="959" actId="20577"/>
       <pc:docMkLst>
         <pc:docMk/>
       </pc:docMkLst>
-      <pc:sldChg chg="addSp modSp del mod">
-        <pc:chgData name="Άριστος Αρέστη" userId="813aa191-2d4c-464f-9d05-0a7e494d859f" providerId="ADAL" clId="{49C7B61D-1ACF-4AFF-A04E-A3B433E32474}" dt="2026-10-10T07:28:02.038" v="646" actId="47"/>
-        <pc:sldMkLst>
-          <pc:docMk/>
-          <pc:sldMk cId="1858723173" sldId="257"/>
-        </pc:sldMkLst>
-        <pc:spChg chg="mod">
-          <ac:chgData name="Άριστος Αρέστη" userId="813aa191-2d4c-464f-9d05-0a7e494d859f" providerId="ADAL" clId="{49C7B61D-1ACF-4AFF-A04E-A3B433E32474}" dt="2026-10-10T07:08:18.455" v="580" actId="20577"/>
-          <ac:spMkLst>
-            <pc:docMk/>
-            <pc:sldMk cId="1858723173" sldId="257"/>
-            <ac:spMk id="7" creationId="{578FFDC7-9C35-42E4-853C-5F53B710184B}"/>
-          </ac:spMkLst>
-        </pc:spChg>
-        <pc:spChg chg="mod">
-          <ac:chgData name="Άριστος Αρέστη" userId="813aa191-2d4c-464f-9d05-0a7e494d859f" providerId="ADAL" clId="{49C7B61D-1ACF-4AFF-A04E-A3B433E32474}" dt="2026-10-10T07:08:29.586" v="584" actId="6549"/>
-          <ac:spMkLst>
-            <pc:docMk/>
-            <pc:sldMk cId="1858723173" sldId="257"/>
-            <ac:spMk id="11" creationId="{0A7E670E-D690-49A2-9511-0692F4390AF7}"/>
-          </ac:spMkLst>
-        </pc:spChg>
-        <pc:picChg chg="add mod">
-          <ac:chgData name="Άριστος Αρέστη" userId="813aa191-2d4c-464f-9d05-0a7e494d859f" providerId="ADAL" clId="{49C7B61D-1ACF-4AFF-A04E-A3B433E32474}" dt="2026-10-10T07:27:11.342" v="642" actId="1076"/>
-          <ac:picMkLst>
-            <pc:docMk/>
-            <pc:sldMk cId="1858723173" sldId="257"/>
-            <ac:picMk id="12" creationId="{767724B9-F465-21E4-01F7-F5B6AB977D97}"/>
-          </ac:picMkLst>
-        </pc:picChg>
-        <pc:picChg chg="mod">
-          <ac:chgData name="Άριστος Αρέστη" userId="813aa191-2d4c-464f-9d05-0a7e494d859f" providerId="ADAL" clId="{49C7B61D-1ACF-4AFF-A04E-A3B433E32474}" dt="2026-10-10T07:08:08.862" v="576" actId="1076"/>
-          <ac:picMkLst>
-            <pc:docMk/>
-            <pc:sldMk cId="1858723173" sldId="257"/>
-            <ac:picMk id="23" creationId="{00000000-0000-0000-0000-000000000000}"/>
-          </ac:picMkLst>
-        </pc:picChg>
-      </pc:sldChg>
-      <pc:sldChg chg="del">
-        <pc:chgData name="Άριστος Αρέστη" userId="813aa191-2d4c-464f-9d05-0a7e494d859f" providerId="ADAL" clId="{49C7B61D-1ACF-4AFF-A04E-A3B433E32474}" dt="2026-10-10T07:28:15.576" v="648" actId="47"/>
-        <pc:sldMkLst>
-          <pc:docMk/>
-          <pc:sldMk cId="1459875993" sldId="258"/>
-        </pc:sldMkLst>
-      </pc:sldChg>
-      <pc:sldChg chg="del">
-        <pc:chgData name="Άριστος Αρέστη" userId="813aa191-2d4c-464f-9d05-0a7e494d859f" providerId="ADAL" clId="{49C7B61D-1ACF-4AFF-A04E-A3B433E32474}" dt="2026-10-10T07:56:49.361" v="957" actId="47"/>
-        <pc:sldMkLst>
-          <pc:docMk/>
-          <pc:sldMk cId="2570149264" sldId="259"/>
-        </pc:sldMkLst>
-      </pc:sldChg>
       <pc:sldChg chg="modSp mod">
         <pc:chgData name="Άριστος Αρέστη" userId="813aa191-2d4c-464f-9d05-0a7e494d859f" providerId="ADAL" clId="{49C7B61D-1ACF-4AFF-A04E-A3B433E32474}" dt="2026-10-10T07:30:46.840" v="784" actId="20577"/>
         <pc:sldMkLst>
@@ -218,13 +156,6 @@
           </ac:spMkLst>
         </pc:spChg>
       </pc:sldChg>
-      <pc:sldChg chg="addSp delSp modSp del mod">
-        <pc:chgData name="Άριστος Αρέστη" userId="813aa191-2d4c-464f-9d05-0a7e494d859f" providerId="ADAL" clId="{49C7B61D-1ACF-4AFF-A04E-A3B433E32474}" dt="2026-10-10T07:11:30.036" v="639" actId="47"/>
-        <pc:sldMkLst>
-          <pc:docMk/>
-          <pc:sldMk cId="1459875993" sldId="261"/>
-        </pc:sldMkLst>
-      </pc:sldChg>
       <pc:sldChg chg="modSp mod">
         <pc:chgData name="Άριστος Αρέστη" userId="813aa191-2d4c-464f-9d05-0a7e494d859f" providerId="ADAL" clId="{49C7B61D-1ACF-4AFF-A04E-A3B433E32474}" dt="2026-10-10T07:38:01.448" v="955" actId="6549"/>
         <pc:sldMkLst>
@@ -239,76 +170,6 @@
             <ac:spMk id="9" creationId="{1D521794-BBE8-4028-AD5D-36201AB06AD3}"/>
           </ac:spMkLst>
         </pc:spChg>
-      </pc:sldChg>
-      <pc:sldChg chg="addSp delSp modSp add del mod ord">
-        <pc:chgData name="Άριστος Αρέστη" userId="813aa191-2d4c-464f-9d05-0a7e494d859f" providerId="ADAL" clId="{49C7B61D-1ACF-4AFF-A04E-A3B433E32474}" dt="2026-10-10T07:27:32.359" v="643" actId="47"/>
-        <pc:sldMkLst>
-          <pc:docMk/>
-          <pc:sldMk cId="3275809581" sldId="264"/>
-        </pc:sldMkLst>
-        <pc:spChg chg="mod">
-          <ac:chgData name="Άριστος Αρέστη" userId="813aa191-2d4c-464f-9d05-0a7e494d859f" providerId="ADAL" clId="{49C7B61D-1ACF-4AFF-A04E-A3B433E32474}" dt="2026-10-10T06:29:24.964" v="433" actId="20577"/>
-          <ac:spMkLst>
-            <pc:docMk/>
-            <pc:sldMk cId="3275809581" sldId="264"/>
-            <ac:spMk id="4" creationId="{92FD612A-8ED7-25CA-EBD6-B6FC3F8ADC2D}"/>
-          </ac:spMkLst>
-        </pc:spChg>
-        <pc:spChg chg="mod">
-          <ac:chgData name="Άριστος Αρέστη" userId="813aa191-2d4c-464f-9d05-0a7e494d859f" providerId="ADAL" clId="{49C7B61D-1ACF-4AFF-A04E-A3B433E32474}" dt="2026-10-10T06:29:10.649" v="429" actId="14100"/>
-          <ac:spMkLst>
-            <pc:docMk/>
-            <pc:sldMk cId="3275809581" sldId="264"/>
-            <ac:spMk id="10" creationId="{5CC52013-73E9-3F57-D8BA-2AF2E5152631}"/>
-          </ac:spMkLst>
-        </pc:spChg>
-        <pc:picChg chg="add mod">
-          <ac:chgData name="Άριστος Αρέστη" userId="813aa191-2d4c-464f-9d05-0a7e494d859f" providerId="ADAL" clId="{49C7B61D-1ACF-4AFF-A04E-A3B433E32474}" dt="2026-10-10T06:29:22.529" v="432" actId="14100"/>
-          <ac:picMkLst>
-            <pc:docMk/>
-            <pc:sldMk cId="3275809581" sldId="264"/>
-            <ac:picMk id="13" creationId="{AB175D34-6CC2-63D8-EA2E-5075CAA27D20}"/>
-          </ac:picMkLst>
-        </pc:picChg>
-      </pc:sldChg>
-      <pc:sldChg chg="addSp delSp modSp new del mod">
-        <pc:chgData name="Άριστος Αρέστη" userId="813aa191-2d4c-464f-9d05-0a7e494d859f" providerId="ADAL" clId="{49C7B61D-1ACF-4AFF-A04E-A3B433E32474}" dt="2026-10-10T07:28:06.201" v="647" actId="47"/>
-        <pc:sldMkLst>
-          <pc:docMk/>
-          <pc:sldMk cId="2371128756" sldId="265"/>
-        </pc:sldMkLst>
-        <pc:spChg chg="mod">
-          <ac:chgData name="Άριστος Αρέστη" userId="813aa191-2d4c-464f-9d05-0a7e494d859f" providerId="ADAL" clId="{49C7B61D-1ACF-4AFF-A04E-A3B433E32474}" dt="2026-10-10T06:14:53.899" v="409" actId="20577"/>
-          <ac:spMkLst>
-            <pc:docMk/>
-            <pc:sldMk cId="2371128756" sldId="265"/>
-            <ac:spMk id="2" creationId="{B8301AB5-A52B-F4C1-4CA3-DB53B985BAA4}"/>
-          </ac:spMkLst>
-        </pc:spChg>
-        <pc:spChg chg="del">
-          <ac:chgData name="Άριστος Αρέστη" userId="813aa191-2d4c-464f-9d05-0a7e494d859f" providerId="ADAL" clId="{49C7B61D-1ACF-4AFF-A04E-A3B433E32474}" dt="2026-10-10T06:16:27.921" v="410" actId="22"/>
-          <ac:spMkLst>
-            <pc:docMk/>
-            <pc:sldMk cId="2371128756" sldId="265"/>
-            <ac:spMk id="3" creationId="{6BE7AB01-E144-8439-5F54-0EB5FED3DD64}"/>
-          </ac:spMkLst>
-        </pc:spChg>
-        <pc:picChg chg="add mod ord">
-          <ac:chgData name="Άριστος Αρέστη" userId="813aa191-2d4c-464f-9d05-0a7e494d859f" providerId="ADAL" clId="{49C7B61D-1ACF-4AFF-A04E-A3B433E32474}" dt="2026-10-10T06:20:55.924" v="423" actId="1076"/>
-          <ac:picMkLst>
-            <pc:docMk/>
-            <pc:sldMk cId="2371128756" sldId="265"/>
-            <ac:picMk id="6" creationId="{B0B66274-48AF-A60B-0B1E-D47448EE7529}"/>
-          </ac:picMkLst>
-        </pc:picChg>
-        <pc:picChg chg="add mod">
-          <ac:chgData name="Άριστος Αρέστη" userId="813aa191-2d4c-464f-9d05-0a7e494d859f" providerId="ADAL" clId="{49C7B61D-1ACF-4AFF-A04E-A3B433E32474}" dt="2026-10-10T06:20:59.698" v="424" actId="14100"/>
-          <ac:picMkLst>
-            <pc:docMk/>
-            <pc:sldMk cId="2371128756" sldId="265"/>
-            <ac:picMk id="8" creationId="{45FD5805-2FB2-0810-78A0-36E90B0AEF7B}"/>
-          </ac:picMkLst>
-        </pc:picChg>
       </pc:sldChg>
       <pc:sldChg chg="modSp add mod ord setBg">
         <pc:chgData name="Άριστος Αρέστη" userId="813aa191-2d4c-464f-9d05-0a7e494d859f" providerId="ADAL" clId="{49C7B61D-1ACF-4AFF-A04E-A3B433E32474}" dt="2026-10-10T06:47:22.090" v="531" actId="14100"/>
@@ -334,27 +195,19 @@
         </pc:spChg>
       </pc:sldChg>
       <pc:sldChg chg="addSp delSp modSp add mod">
-        <pc:chgData name="Άριστος Αρέστη" userId="813aa191-2d4c-464f-9d05-0a7e494d859f" providerId="ADAL" clId="{49C7B61D-1ACF-4AFF-A04E-A3B433E32474}" dt="2026-10-10T07:09:51.392" v="627" actId="20577"/>
+        <pc:chgData name="Άριστος Αρέστη" userId="813aa191-2d4c-464f-9d05-0a7e494d859f" providerId="ADAL" clId="{49C7B61D-1ACF-4AFF-A04E-A3B433E32474}" dt="2026-10-12T05:47:15.702" v="959" actId="20577"/>
         <pc:sldMkLst>
           <pc:docMk/>
           <pc:sldMk cId="1589394006" sldId="267"/>
         </pc:sldMkLst>
         <pc:spChg chg="mod">
-          <ac:chgData name="Άριστος Αρέστη" userId="813aa191-2d4c-464f-9d05-0a7e494d859f" providerId="ADAL" clId="{49C7B61D-1ACF-4AFF-A04E-A3B433E32474}" dt="2026-10-10T07:09:51.392" v="627" actId="20577"/>
+          <ac:chgData name="Άριστος Αρέστη" userId="813aa191-2d4c-464f-9d05-0a7e494d859f" providerId="ADAL" clId="{49C7B61D-1ACF-4AFF-A04E-A3B433E32474}" dt="2026-10-12T05:47:15.702" v="959" actId="20577"/>
           <ac:spMkLst>
             <pc:docMk/>
             <pc:sldMk cId="1589394006" sldId="267"/>
             <ac:spMk id="2" creationId="{32C863D9-1989-4443-A424-8213A05F31BB}"/>
           </ac:spMkLst>
         </pc:spChg>
-        <pc:graphicFrameChg chg="del">
-          <ac:chgData name="Άριστος Αρέστη" userId="813aa191-2d4c-464f-9d05-0a7e494d859f" providerId="ADAL" clId="{49C7B61D-1ACF-4AFF-A04E-A3B433E32474}" dt="2026-10-10T06:56:52.204" v="551" actId="478"/>
-          <ac:graphicFrameMkLst>
-            <pc:docMk/>
-            <pc:sldMk cId="1589394006" sldId="267"/>
-            <ac:graphicFrameMk id="7" creationId="{E9AFAE1B-7BE9-4809-B8F9-5EE05EFE5C81}"/>
-          </ac:graphicFrameMkLst>
-        </pc:graphicFrameChg>
         <pc:picChg chg="add mod">
           <ac:chgData name="Άριστος Αρέστη" userId="813aa191-2d4c-464f-9d05-0a7e494d859f" providerId="ADAL" clId="{49C7B61D-1ACF-4AFF-A04E-A3B433E32474}" dt="2026-10-10T06:57:06.265" v="556" actId="1076"/>
           <ac:picMkLst>
@@ -378,22 +231,6 @@
             <ac:spMk id="2" creationId="{62A92CD4-88DD-4F68-B449-EA9821C3EFD3}"/>
           </ac:spMkLst>
         </pc:spChg>
-        <pc:spChg chg="add del mod">
-          <ac:chgData name="Άριστος Αρέστη" userId="813aa191-2d4c-464f-9d05-0a7e494d859f" providerId="ADAL" clId="{49C7B61D-1ACF-4AFF-A04E-A3B433E32474}" dt="2026-10-10T07:10:05.232" v="629" actId="478"/>
-          <ac:spMkLst>
-            <pc:docMk/>
-            <pc:sldMk cId="3085501264" sldId="268"/>
-            <ac:spMk id="5" creationId="{45D29009-3C05-E76D-0553-91919ECD2D2E}"/>
-          </ac:spMkLst>
-        </pc:spChg>
-        <pc:spChg chg="add del mod">
-          <ac:chgData name="Άριστος Αρέστη" userId="813aa191-2d4c-464f-9d05-0a7e494d859f" providerId="ADAL" clId="{49C7B61D-1ACF-4AFF-A04E-A3B433E32474}" dt="2026-10-10T07:10:16.134" v="635"/>
-          <ac:spMkLst>
-            <pc:docMk/>
-            <pc:sldMk cId="3085501264" sldId="268"/>
-            <ac:spMk id="6" creationId="{49540229-3F6C-FF69-E57C-983FBA2EA9D7}"/>
-          </ac:spMkLst>
-        </pc:spChg>
         <pc:spChg chg="mod">
           <ac:chgData name="Άριστος Αρέστη" userId="813aa191-2d4c-464f-9d05-0a7e494d859f" providerId="ADAL" clId="{49C7B61D-1ACF-4AFF-A04E-A3B433E32474}" dt="2026-10-10T06:59:57.971" v="567" actId="1076"/>
           <ac:spMkLst>
@@ -402,22 +239,6 @@
             <ac:spMk id="42" creationId="{987EA34E-D5DF-4859-A266-65AFDBB4C497}"/>
           </ac:spMkLst>
         </pc:spChg>
-        <pc:spChg chg="del mod">
-          <ac:chgData name="Άριστος Αρέστη" userId="813aa191-2d4c-464f-9d05-0a7e494d859f" providerId="ADAL" clId="{49C7B61D-1ACF-4AFF-A04E-A3B433E32474}" dt="2026-10-10T06:59:45.383" v="564" actId="478"/>
-          <ac:spMkLst>
-            <pc:docMk/>
-            <pc:sldMk cId="3085501264" sldId="268"/>
-            <ac:spMk id="44" creationId="{C260B3F9-68C1-4FE6-8E0D-8E2F3E6650C7}"/>
-          </ac:spMkLst>
-        </pc:spChg>
-        <pc:graphicFrameChg chg="del">
-          <ac:chgData name="Άριστος Αρέστη" userId="813aa191-2d4c-464f-9d05-0a7e494d859f" providerId="ADAL" clId="{49C7B61D-1ACF-4AFF-A04E-A3B433E32474}" dt="2026-10-10T06:59:00.487" v="557" actId="478"/>
-          <ac:graphicFrameMkLst>
-            <pc:docMk/>
-            <pc:sldMk cId="3085501264" sldId="268"/>
-            <ac:graphicFrameMk id="43" creationId="{53077A41-9CD3-4187-B66C-2DB066600F6A}"/>
-          </ac:graphicFrameMkLst>
-        </pc:graphicFrameChg>
         <pc:picChg chg="add mod">
           <ac:chgData name="Άριστος Αρέστη" userId="813aa191-2d4c-464f-9d05-0a7e494d859f" providerId="ADAL" clId="{49C7B61D-1ACF-4AFF-A04E-A3B433E32474}" dt="2026-10-10T07:00:00.485" v="568" actId="1076"/>
           <ac:picMkLst>
@@ -457,14 +278,6 @@
             <ac:spMk id="7" creationId="{58D10C96-8AEC-4960-AB57-7B52199C482B}"/>
           </ac:spMkLst>
         </pc:spChg>
-        <pc:graphicFrameChg chg="del">
-          <ac:chgData name="Άριστος Αρέστη" userId="813aa191-2d4c-464f-9d05-0a7e494d859f" providerId="ADAL" clId="{49C7B61D-1ACF-4AFF-A04E-A3B433E32474}" dt="2026-10-10T07:02:45.213" v="570" actId="478"/>
-          <ac:graphicFrameMkLst>
-            <pc:docMk/>
-            <pc:sldMk cId="3703779373" sldId="269"/>
-            <ac:graphicFrameMk id="8" creationId="{5CA9C7E4-796D-4037-83BB-7CEB82B88D0A}"/>
-          </ac:graphicFrameMkLst>
-        </pc:graphicFrameChg>
         <pc:picChg chg="add mod">
           <ac:chgData name="Άριστος Αρέστη" userId="813aa191-2d4c-464f-9d05-0a7e494d859f" providerId="ADAL" clId="{49C7B61D-1ACF-4AFF-A04E-A3B433E32474}" dt="2026-10-10T07:02:58.032" v="573" actId="14100"/>
           <ac:picMkLst>
@@ -488,22 +301,6 @@
             <ac:spMk id="2" creationId="{B86133BA-58A2-8811-3723-2649854FB39A}"/>
           </ac:spMkLst>
         </pc:spChg>
-        <pc:spChg chg="del mod">
-          <ac:chgData name="Άριστος Αρέστη" userId="813aa191-2d4c-464f-9d05-0a7e494d859f" providerId="ADAL" clId="{49C7B61D-1ACF-4AFF-A04E-A3B433E32474}" dt="2026-10-10T07:36:21.537" v="938" actId="478"/>
-          <ac:spMkLst>
-            <pc:docMk/>
-            <pc:sldMk cId="3099506725" sldId="270"/>
-            <ac:spMk id="5" creationId="{48C33B1F-4093-1410-AAC4-97954790DD8D}"/>
-          </ac:spMkLst>
-        </pc:spChg>
-        <pc:spChg chg="del mod">
-          <ac:chgData name="Άριστος Αρέστη" userId="813aa191-2d4c-464f-9d05-0a7e494d859f" providerId="ADAL" clId="{49C7B61D-1ACF-4AFF-A04E-A3B433E32474}" dt="2026-10-10T07:35:29.915" v="935" actId="478"/>
-          <ac:spMkLst>
-            <pc:docMk/>
-            <pc:sldMk cId="3099506725" sldId="270"/>
-            <ac:spMk id="6" creationId="{4E4FED79-4EA1-1A51-AC8F-7A092060BC92}"/>
-          </ac:spMkLst>
-        </pc:spChg>
         <pc:spChg chg="mod">
           <ac:chgData name="Άριστος Αρέστη" userId="813aa191-2d4c-464f-9d05-0a7e494d859f" providerId="ADAL" clId="{49C7B61D-1ACF-4AFF-A04E-A3B433E32474}" dt="2026-10-10T07:36:35.417" v="947" actId="20577"/>
           <ac:spMkLst>
@@ -520,21 +317,6 @@
             <ac:picMk id="7" creationId="{5C83EB7C-0C5D-E2BE-7BC8-6EFD27C574B1}"/>
           </ac:picMkLst>
         </pc:picChg>
-        <pc:picChg chg="del">
-          <ac:chgData name="Άριστος Αρέστη" userId="813aa191-2d4c-464f-9d05-0a7e494d859f" providerId="ADAL" clId="{49C7B61D-1ACF-4AFF-A04E-A3B433E32474}" dt="2026-10-10T07:32:31.596" v="809" actId="478"/>
-          <ac:picMkLst>
-            <pc:docMk/>
-            <pc:sldMk cId="3099506725" sldId="270"/>
-            <ac:picMk id="9" creationId="{F2931A02-07A6-D8B6-B72E-6010E1AD63C7}"/>
-          </ac:picMkLst>
-        </pc:picChg>
-      </pc:sldChg>
-      <pc:sldChg chg="add del">
-        <pc:chgData name="Άριστος Αρέστη" userId="813aa191-2d4c-464f-9d05-0a7e494d859f" providerId="ADAL" clId="{49C7B61D-1ACF-4AFF-A04E-A3B433E32474}" dt="2026-10-10T07:27:38.293" v="644" actId="47"/>
-        <pc:sldMkLst>
-          <pc:docMk/>
-          <pc:sldMk cId="3754846957" sldId="270"/>
-        </pc:sldMkLst>
       </pc:sldChg>
       <pc:sldChg chg="add">
         <pc:chgData name="Άριστος Αρέστη" userId="813aa191-2d4c-464f-9d05-0a7e494d859f" providerId="ADAL" clId="{49C7B61D-1ACF-4AFF-A04E-A3B433E32474}" dt="2026-10-10T07:56:40.278" v="956"/>
@@ -2519,7 +2301,7 @@
           <a:lstStyle/>
           <a:p>
             <a:fld id="{0E1AB97B-D0C7-4CCB-8568-F47C13D538D5}" type="datetimeFigureOut">
-              <a:t>10-Oct-26</a:t>
+              <a:t>12-Oct-26</a:t>
             </a:fld>
             <a:endParaRPr/>
           </a:p>
@@ -2793,7 +2575,7 @@
           <a:lstStyle/>
           <a:p>
             <a:fld id="{0E1AB97B-D0C7-4CCB-8568-F47C13D538D5}" type="datetimeFigureOut">
-              <a:t>10-Oct-26</a:t>
+              <a:t>12-Oct-26</a:t>
             </a:fld>
             <a:endParaRPr/>
           </a:p>
@@ -3137,7 +2919,7 @@
           <a:lstStyle/>
           <a:p>
             <a:fld id="{0E1AB97B-D0C7-4CCB-8568-F47C13D538D5}" type="datetimeFigureOut">
-              <a:t>10-Oct-26</a:t>
+              <a:t>12-Oct-26</a:t>
             </a:fld>
             <a:endParaRPr/>
           </a:p>
@@ -3515,7 +3297,7 @@
           <a:lstStyle/>
           <a:p>
             <a:fld id="{0E1AB97B-D0C7-4CCB-8568-F47C13D538D5}" type="datetimeFigureOut">
-              <a:t>10-Oct-26</a:t>
+              <a:t>12-Oct-26</a:t>
             </a:fld>
             <a:endParaRPr/>
           </a:p>
@@ -3859,7 +3641,7 @@
           <a:lstStyle/>
           <a:p>
             <a:fld id="{0E1AB97B-D0C7-4CCB-8568-F47C13D538D5}" type="datetimeFigureOut">
-              <a:t>10-Oct-26</a:t>
+              <a:t>12-Oct-26</a:t>
             </a:fld>
             <a:endParaRPr/>
           </a:p>
@@ -4304,7 +4086,7 @@
           <a:lstStyle/>
           <a:p>
             <a:fld id="{0E1AB97B-D0C7-4CCB-8568-F47C13D538D5}" type="datetimeFigureOut">
-              <a:t>10-Oct-26</a:t>
+              <a:t>12-Oct-26</a:t>
             </a:fld>
             <a:endParaRPr/>
           </a:p>
@@ -4499,7 +4281,7 @@
           <a:lstStyle/>
           <a:p>
             <a:fld id="{0E1AB97B-D0C7-4CCB-8568-F47C13D538D5}" type="datetimeFigureOut">
-              <a:t>10-Oct-26</a:t>
+              <a:t>12-Oct-26</a:t>
             </a:fld>
             <a:endParaRPr/>
           </a:p>
@@ -4704,7 +4486,7 @@
           <a:lstStyle/>
           <a:p>
             <a:fld id="{0E1AB97B-D0C7-4CCB-8568-F47C13D538D5}" type="datetimeFigureOut">
-              <a:t>10-Oct-26</a:t>
+              <a:t>12-Oct-26</a:t>
             </a:fld>
             <a:endParaRPr/>
           </a:p>
@@ -4899,7 +4681,7 @@
           <a:lstStyle/>
           <a:p>
             <a:fld id="{0E1AB97B-D0C7-4CCB-8568-F47C13D538D5}" type="datetimeFigureOut">
-              <a:t>10-Oct-26</a:t>
+              <a:t>12-Oct-26</a:t>
             </a:fld>
             <a:endParaRPr/>
           </a:p>
@@ -5169,7 +4951,7 @@
           <a:lstStyle/>
           <a:p>
             <a:fld id="{0E1AB97B-D0C7-4CCB-8568-F47C13D538D5}" type="datetimeFigureOut">
-              <a:t>10-Oct-26</a:t>
+              <a:t>12-Oct-26</a:t>
             </a:fld>
             <a:endParaRPr/>
           </a:p>
@@ -5436,7 +5218,7 @@
           <a:lstStyle/>
           <a:p>
             <a:fld id="{0E1AB97B-D0C7-4CCB-8568-F47C13D538D5}" type="datetimeFigureOut">
-              <a:t>10-Oct-26</a:t>
+              <a:t>12-Oct-26</a:t>
             </a:fld>
             <a:endParaRPr/>
           </a:p>
@@ -5860,7 +5642,7 @@
           <a:lstStyle/>
           <a:p>
             <a:fld id="{0E1AB97B-D0C7-4CCB-8568-F47C13D538D5}" type="datetimeFigureOut">
-              <a:t>10-Oct-26</a:t>
+              <a:t>12-Oct-26</a:t>
             </a:fld>
             <a:endParaRPr/>
           </a:p>
@@ -5998,7 +5780,7 @@
           <a:lstStyle/>
           <a:p>
             <a:fld id="{0E1AB97B-D0C7-4CCB-8568-F47C13D538D5}" type="datetimeFigureOut">
-              <a:t>10-Oct-26</a:t>
+              <a:t>12-Oct-26</a:t>
             </a:fld>
             <a:endParaRPr/>
           </a:p>
@@ -6104,7 +5886,7 @@
           <a:lstStyle/>
           <a:p>
             <a:fld id="{0E1AB97B-D0C7-4CCB-8568-F47C13D538D5}" type="datetimeFigureOut">
-              <a:t>10-Oct-26</a:t>
+              <a:t>12-Oct-26</a:t>
             </a:fld>
             <a:endParaRPr/>
           </a:p>
@@ -6392,7 +6174,7 @@
           <a:lstStyle/>
           <a:p>
             <a:fld id="{0E1AB97B-D0C7-4CCB-8568-F47C13D538D5}" type="datetimeFigureOut">
-              <a:t>10-Oct-26</a:t>
+              <a:t>12-Oct-26</a:t>
             </a:fld>
             <a:endParaRPr/>
           </a:p>
@@ -6735,7 +6517,7 @@
           <a:lstStyle/>
           <a:p>
             <a:fld id="{0E1AB97B-D0C7-4CCB-8568-F47C13D538D5}" type="datetimeFigureOut">
-              <a:t>10-Oct-26</a:t>
+              <a:t>12-Oct-26</a:t>
             </a:fld>
             <a:endParaRPr/>
           </a:p>
@@ -7579,7 +7361,7 @@
           </a:lstStyle>
           <a:p>
             <a:fld id="{0E1AB97B-D0C7-4CCB-8568-F47C13D538D5}" type="datetimeFigureOut">
-              <a:t>10-Oct-26</a:t>
+              <a:t>12-Oct-26</a:t>
             </a:fld>
             <a:endParaRPr/>
           </a:p>
@@ -12698,7 +12480,7 @@
                   <a:srgbClr val="5FCBEF"/>
                 </a:solidFill>
               </a:rPr>
-              <a:t>I</a:t>
+              <a:t>i</a:t>
             </a:r>
             <a:r>
               <a:rPr sz="3450" dirty="0" err="1">

--- a/schools-presentations/A Lykeiou/A5 - Computer Networks and Internet/Α.5.M2 Έλεγχος Λειτουργίας Δικτύου - Μέρος 2.pptx
+++ b/schools-presentations/A Lykeiou/A5 - Computer Networks and Internet/Α.5.M2 Έλεγχος Λειτουργίας Δικτύου - Μέρος 2.pptx
@@ -5,19 +5,20 @@
     <p:sldMasterId id="2147483648" r:id="rId1"/>
   </p:sldMasterIdLst>
   <p:notesMasterIdLst>
-    <p:notesMasterId r:id="rId12"/>
+    <p:notesMasterId r:id="rId13"/>
   </p:notesMasterIdLst>
   <p:sldIdLst>
     <p:sldId id="256" r:id="rId2"/>
     <p:sldId id="266" r:id="rId3"/>
-    <p:sldId id="271" r:id="rId4"/>
-    <p:sldId id="260" r:id="rId5"/>
-    <p:sldId id="267" r:id="rId6"/>
-    <p:sldId id="270" r:id="rId7"/>
-    <p:sldId id="268" r:id="rId8"/>
-    <p:sldId id="269" r:id="rId9"/>
-    <p:sldId id="262" r:id="rId10"/>
-    <p:sldId id="263" r:id="rId11"/>
+    <p:sldId id="272" r:id="rId4"/>
+    <p:sldId id="271" r:id="rId5"/>
+    <p:sldId id="260" r:id="rId6"/>
+    <p:sldId id="267" r:id="rId7"/>
+    <p:sldId id="270" r:id="rId8"/>
+    <p:sldId id="268" r:id="rId9"/>
+    <p:sldId id="269" r:id="rId10"/>
+    <p:sldId id="262" r:id="rId11"/>
+    <p:sldId id="263" r:id="rId12"/>
   </p:sldIdLst>
   <p:sldSz cx="12192000" cy="6858000"/>
   <p:notesSz cx="6858000" cy="9144000"/>
@@ -124,21 +125,37 @@
 </p:presentation>
 </file>
 
+<file path=ppt/revisionInfo.xml><?xml version="1.0" encoding="utf-8"?>
+<p1510:revInfo xmlns:a="http://schemas.openxmlformats.org/drawingml/2006/main" xmlns:r="http://schemas.openxmlformats.org/officeDocument/2006/relationships" xmlns:p1510="http://schemas.microsoft.com/office/powerpoint/2015/10/main">
+  <p1510:revLst>
+    <p1510:client id="{48906E57-F3CE-4D7E-A3AE-C8DEB14263BE}" v="4" dt="2026-10-14T18:47:55.586"/>
+  </p1510:revLst>
+</p1510:revInfo>
+</file>
+
 <file path=ppt/changesInfos/changesInfo1.xml><?xml version="1.0" encoding="utf-8"?>
 <pc:chgInfo xmlns:a="http://schemas.openxmlformats.org/drawingml/2006/main" xmlns:r="http://schemas.openxmlformats.org/officeDocument/2006/relationships" xmlns:ac="http://schemas.microsoft.com/office/drawing/2013/main/command" xmlns:pc="http://schemas.microsoft.com/office/powerpoint/2013/main/command">
   <pc:docChgLst>
     <pc:chgData name="Άριστος Αρέστη" userId="813aa191-2d4c-464f-9d05-0a7e494d859f" providerId="ADAL" clId="{49C7B61D-1ACF-4AFF-A04E-A3B433E32474}"/>
-    <pc:docChg chg="custSel addSld delSld modSld sldOrd">
-      <pc:chgData name="Άριστος Αρέστη" userId="813aa191-2d4c-464f-9d05-0a7e494d859f" providerId="ADAL" clId="{49C7B61D-1ACF-4AFF-A04E-A3B433E32474}" dt="2026-10-12T05:47:15.702" v="959" actId="20577"/>
+    <pc:docChg chg="undo custSel addSld delSld modSld sldOrd">
+      <pc:chgData name="Άριστος Αρέστη" userId="813aa191-2d4c-464f-9d05-0a7e494d859f" providerId="ADAL" clId="{49C7B61D-1ACF-4AFF-A04E-A3B433E32474}" dt="2026-10-14T18:48:14.338" v="983" actId="1076"/>
       <pc:docMkLst>
         <pc:docMk/>
       </pc:docMkLst>
-      <pc:sldChg chg="modSp mod">
-        <pc:chgData name="Άριστος Αρέστη" userId="813aa191-2d4c-464f-9d05-0a7e494d859f" providerId="ADAL" clId="{49C7B61D-1ACF-4AFF-A04E-A3B433E32474}" dt="2026-10-10T07:30:46.840" v="784" actId="20577"/>
+      <pc:sldChg chg="modSp add del mod">
+        <pc:chgData name="Άριστος Αρέστη" userId="813aa191-2d4c-464f-9d05-0a7e494d859f" providerId="ADAL" clId="{49C7B61D-1ACF-4AFF-A04E-A3B433E32474}" dt="2026-10-14T18:47:08.783" v="979" actId="47"/>
         <pc:sldMkLst>
           <pc:docMk/>
           <pc:sldMk cId="643881412" sldId="260"/>
         </pc:sldMkLst>
+        <pc:spChg chg="mod">
+          <ac:chgData name="Άριστος Αρέστη" userId="813aa191-2d4c-464f-9d05-0a7e494d859f" providerId="ADAL" clId="{49C7B61D-1ACF-4AFF-A04E-A3B433E32474}" dt="2026-10-14T18:41:43.630" v="970" actId="1076"/>
+          <ac:spMkLst>
+            <pc:docMk/>
+            <pc:sldMk cId="643881412" sldId="260"/>
+            <ac:spMk id="5" creationId="{1ADE6AB2-31D4-43F8-8CB3-B978A6B51094}"/>
+          </ac:spMkLst>
+        </pc:spChg>
         <pc:spChg chg="mod">
           <ac:chgData name="Άριστος Αρέστη" userId="813aa191-2d4c-464f-9d05-0a7e494d859f" providerId="ADAL" clId="{49C7B61D-1ACF-4AFF-A04E-A3B433E32474}" dt="2026-10-10T07:29:50.636" v="671" actId="20577"/>
           <ac:spMkLst>
@@ -153,6 +170,37 @@
             <pc:docMk/>
             <pc:sldMk cId="643881412" sldId="260"/>
             <ac:spMk id="10" creationId="{73831D10-FA81-4630-80A2-DF54065724DA}"/>
+          </ac:spMkLst>
+        </pc:spChg>
+        <pc:spChg chg="mod">
+          <ac:chgData name="Άριστος Αρέστη" userId="813aa191-2d4c-464f-9d05-0a7e494d859f" providerId="ADAL" clId="{49C7B61D-1ACF-4AFF-A04E-A3B433E32474}" dt="2026-10-14T18:41:49.625" v="971" actId="1076"/>
+          <ac:spMkLst>
+            <pc:docMk/>
+            <pc:sldMk cId="643881412" sldId="260"/>
+            <ac:spMk id="11" creationId="{FAD8B63B-9463-4F1E-9E70-0E1A7E576AB6}"/>
+          </ac:spMkLst>
+        </pc:spChg>
+        <pc:spChg chg="mod">
+          <ac:chgData name="Άριστος Αρέστη" userId="813aa191-2d4c-464f-9d05-0a7e494d859f" providerId="ADAL" clId="{49C7B61D-1ACF-4AFF-A04E-A3B433E32474}" dt="2026-10-14T18:41:53.086" v="972" actId="1076"/>
+          <ac:spMkLst>
+            <pc:docMk/>
+            <pc:sldMk cId="643881412" sldId="260"/>
+            <ac:spMk id="12" creationId="{B97222AA-170A-45DB-8311-5BF958D4B3D9}"/>
+          </ac:spMkLst>
+        </pc:spChg>
+      </pc:sldChg>
+      <pc:sldChg chg="modSp mod">
+        <pc:chgData name="Άριστος Αρέστη" userId="813aa191-2d4c-464f-9d05-0a7e494d859f" providerId="ADAL" clId="{49C7B61D-1ACF-4AFF-A04E-A3B433E32474}" dt="2026-10-14T06:58:30.736" v="969" actId="20577"/>
+        <pc:sldMkLst>
+          <pc:docMk/>
+          <pc:sldMk cId="3786659628" sldId="262"/>
+        </pc:sldMkLst>
+        <pc:spChg chg="mod">
+          <ac:chgData name="Άριστος Αρέστη" userId="813aa191-2d4c-464f-9d05-0a7e494d859f" providerId="ADAL" clId="{49C7B61D-1ACF-4AFF-A04E-A3B433E32474}" dt="2026-10-14T06:58:30.736" v="969" actId="20577"/>
+          <ac:spMkLst>
+            <pc:docMk/>
+            <pc:sldMk cId="3786659628" sldId="262"/>
+            <ac:spMk id="10" creationId="{F247D9E9-005F-4FAD-BF67-666F30485EE6}"/>
           </ac:spMkLst>
         </pc:spChg>
       </pc:sldChg>
@@ -218,7 +266,7 @@
         </pc:picChg>
       </pc:sldChg>
       <pc:sldChg chg="addSp delSp modSp add mod setBg">
-        <pc:chgData name="Άριστος Αρέστη" userId="813aa191-2d4c-464f-9d05-0a7e494d859f" providerId="ADAL" clId="{49C7B61D-1ACF-4AFF-A04E-A3B433E32474}" dt="2026-10-10T07:10:16.134" v="635"/>
+        <pc:chgData name="Άριστος Αρέστη" userId="813aa191-2d4c-464f-9d05-0a7e494d859f" providerId="ADAL" clId="{49C7B61D-1ACF-4AFF-A04E-A3B433E32474}" dt="2026-10-14T18:48:14.338" v="983" actId="1076"/>
         <pc:sldMkLst>
           <pc:docMk/>
           <pc:sldMk cId="3085501264" sldId="268"/>
@@ -232,7 +280,15 @@
           </ac:spMkLst>
         </pc:spChg>
         <pc:spChg chg="mod">
-          <ac:chgData name="Άριστος Αρέστη" userId="813aa191-2d4c-464f-9d05-0a7e494d859f" providerId="ADAL" clId="{49C7B61D-1ACF-4AFF-A04E-A3B433E32474}" dt="2026-10-10T06:59:57.971" v="567" actId="1076"/>
+          <ac:chgData name="Άριστος Αρέστη" userId="813aa191-2d4c-464f-9d05-0a7e494d859f" providerId="ADAL" clId="{49C7B61D-1ACF-4AFF-A04E-A3B433E32474}" dt="2026-10-14T18:47:55.586" v="981"/>
+          <ac:spMkLst>
+            <pc:docMk/>
+            <pc:sldMk cId="3085501264" sldId="268"/>
+            <ac:spMk id="41" creationId="{B3330E2F-CDED-4A34-B64B-E96705ACE567}"/>
+          </ac:spMkLst>
+        </pc:spChg>
+        <pc:spChg chg="mod">
+          <ac:chgData name="Άριστος Αρέστη" userId="813aa191-2d4c-464f-9d05-0a7e494d859f" providerId="ADAL" clId="{49C7B61D-1ACF-4AFF-A04E-A3B433E32474}" dt="2026-10-14T18:48:14.338" v="983" actId="1076"/>
           <ac:spMkLst>
             <pc:docMk/>
             <pc:sldMk cId="3085501264" sldId="268"/>
@@ -240,7 +296,7 @@
           </ac:spMkLst>
         </pc:spChg>
         <pc:picChg chg="add mod">
-          <ac:chgData name="Άριστος Αρέστη" userId="813aa191-2d4c-464f-9d05-0a7e494d859f" providerId="ADAL" clId="{49C7B61D-1ACF-4AFF-A04E-A3B433E32474}" dt="2026-10-10T07:00:00.485" v="568" actId="1076"/>
+          <ac:chgData name="Άριστος Αρέστη" userId="813aa191-2d4c-464f-9d05-0a7e494d859f" providerId="ADAL" clId="{49C7B61D-1ACF-4AFF-A04E-A3B433E32474}" dt="2026-10-14T18:48:04.273" v="982" actId="14100"/>
           <ac:picMkLst>
             <pc:docMk/>
             <pc:sldMk cId="3085501264" sldId="268"/>
@@ -325,6 +381,37 @@
           <pc:sldMk cId="2191906609" sldId="271"/>
         </pc:sldMkLst>
       </pc:sldChg>
+      <pc:sldChg chg="addSp modSp new mod modAnim">
+        <pc:chgData name="Άριστος Αρέστη" userId="813aa191-2d4c-464f-9d05-0a7e494d859f" providerId="ADAL" clId="{49C7B61D-1ACF-4AFF-A04E-A3B433E32474}" dt="2026-10-14T18:43:33.864" v="977" actId="1076"/>
+        <pc:sldMkLst>
+          <pc:docMk/>
+          <pc:sldMk cId="1831915996" sldId="272"/>
+        </pc:sldMkLst>
+        <pc:spChg chg="mod">
+          <ac:chgData name="Άριστος Αρέστη" userId="813aa191-2d4c-464f-9d05-0a7e494d859f" providerId="ADAL" clId="{49C7B61D-1ACF-4AFF-A04E-A3B433E32474}" dt="2026-10-14T18:43:03.050" v="973" actId="20577"/>
+          <ac:spMkLst>
+            <pc:docMk/>
+            <pc:sldMk cId="1831915996" sldId="272"/>
+            <ac:spMk id="2" creationId="{F1C80C27-6CEF-EE3A-991A-0FC47EB87BB6}"/>
+          </ac:spMkLst>
+        </pc:spChg>
+        <pc:graphicFrameChg chg="add mod">
+          <ac:chgData name="Άριστος Αρέστη" userId="813aa191-2d4c-464f-9d05-0a7e494d859f" providerId="ADAL" clId="{49C7B61D-1ACF-4AFF-A04E-A3B433E32474}" dt="2026-10-14T18:43:28.073" v="975" actId="1076"/>
+          <ac:graphicFrameMkLst>
+            <pc:docMk/>
+            <pc:sldMk cId="1831915996" sldId="272"/>
+            <ac:graphicFrameMk id="4" creationId="{3BFF0AB0-FAC4-7E9F-5452-8E2822BA1360}"/>
+          </ac:graphicFrameMkLst>
+        </pc:graphicFrameChg>
+        <pc:picChg chg="add mod">
+          <ac:chgData name="Άριστος Αρέστη" userId="813aa191-2d4c-464f-9d05-0a7e494d859f" providerId="ADAL" clId="{49C7B61D-1ACF-4AFF-A04E-A3B433E32474}" dt="2026-10-14T18:43:33.864" v="977" actId="1076"/>
+          <ac:picMkLst>
+            <pc:docMk/>
+            <pc:sldMk cId="1831915996" sldId="272"/>
+            <ac:picMk id="3" creationId="{5E81F412-9C4C-4464-A133-B6659ACA4154}"/>
+          </ac:picMkLst>
+        </pc:picChg>
+      </pc:sldChg>
     </pc:docChg>
   </pc:docChgLst>
 </pc:chgInfo>
@@ -2301,7 +2388,7 @@
           <a:lstStyle/>
           <a:p>
             <a:fld id="{0E1AB97B-D0C7-4CCB-8568-F47C13D538D5}" type="datetimeFigureOut">
-              <a:t>12-Oct-26</a:t>
+              <a:t>14-Oct-26</a:t>
             </a:fld>
             <a:endParaRPr/>
           </a:p>
@@ -2575,7 +2662,7 @@
           <a:lstStyle/>
           <a:p>
             <a:fld id="{0E1AB97B-D0C7-4CCB-8568-F47C13D538D5}" type="datetimeFigureOut">
-              <a:t>12-Oct-26</a:t>
+              <a:t>14-Oct-26</a:t>
             </a:fld>
             <a:endParaRPr/>
           </a:p>
@@ -2919,7 +3006,7 @@
           <a:lstStyle/>
           <a:p>
             <a:fld id="{0E1AB97B-D0C7-4CCB-8568-F47C13D538D5}" type="datetimeFigureOut">
-              <a:t>12-Oct-26</a:t>
+              <a:t>14-Oct-26</a:t>
             </a:fld>
             <a:endParaRPr/>
           </a:p>
@@ -3297,7 +3384,7 @@
           <a:lstStyle/>
           <a:p>
             <a:fld id="{0E1AB97B-D0C7-4CCB-8568-F47C13D538D5}" type="datetimeFigureOut">
-              <a:t>12-Oct-26</a:t>
+              <a:t>14-Oct-26</a:t>
             </a:fld>
             <a:endParaRPr/>
           </a:p>
@@ -3641,7 +3728,7 @@
           <a:lstStyle/>
           <a:p>
             <a:fld id="{0E1AB97B-D0C7-4CCB-8568-F47C13D538D5}" type="datetimeFigureOut">
-              <a:t>12-Oct-26</a:t>
+              <a:t>14-Oct-26</a:t>
             </a:fld>
             <a:endParaRPr/>
           </a:p>
@@ -4086,7 +4173,7 @@
           <a:lstStyle/>
           <a:p>
             <a:fld id="{0E1AB97B-D0C7-4CCB-8568-F47C13D538D5}" type="datetimeFigureOut">
-              <a:t>12-Oct-26</a:t>
+              <a:t>14-Oct-26</a:t>
             </a:fld>
             <a:endParaRPr/>
           </a:p>
@@ -4281,7 +4368,7 @@
           <a:lstStyle/>
           <a:p>
             <a:fld id="{0E1AB97B-D0C7-4CCB-8568-F47C13D538D5}" type="datetimeFigureOut">
-              <a:t>12-Oct-26</a:t>
+              <a:t>14-Oct-26</a:t>
             </a:fld>
             <a:endParaRPr/>
           </a:p>
@@ -4486,7 +4573,7 @@
           <a:lstStyle/>
           <a:p>
             <a:fld id="{0E1AB97B-D0C7-4CCB-8568-F47C13D538D5}" type="datetimeFigureOut">
-              <a:t>12-Oct-26</a:t>
+              <a:t>14-Oct-26</a:t>
             </a:fld>
             <a:endParaRPr/>
           </a:p>
@@ -4681,7 +4768,7 @@
           <a:lstStyle/>
           <a:p>
             <a:fld id="{0E1AB97B-D0C7-4CCB-8568-F47C13D538D5}" type="datetimeFigureOut">
-              <a:t>12-Oct-26</a:t>
+              <a:t>14-Oct-26</a:t>
             </a:fld>
             <a:endParaRPr/>
           </a:p>
@@ -4951,7 +5038,7 @@
           <a:lstStyle/>
           <a:p>
             <a:fld id="{0E1AB97B-D0C7-4CCB-8568-F47C13D538D5}" type="datetimeFigureOut">
-              <a:t>12-Oct-26</a:t>
+              <a:t>14-Oct-26</a:t>
             </a:fld>
             <a:endParaRPr/>
           </a:p>
@@ -5218,7 +5305,7 @@
           <a:lstStyle/>
           <a:p>
             <a:fld id="{0E1AB97B-D0C7-4CCB-8568-F47C13D538D5}" type="datetimeFigureOut">
-              <a:t>12-Oct-26</a:t>
+              <a:t>14-Oct-26</a:t>
             </a:fld>
             <a:endParaRPr/>
           </a:p>
@@ -5642,7 +5729,7 @@
           <a:lstStyle/>
           <a:p>
             <a:fld id="{0E1AB97B-D0C7-4CCB-8568-F47C13D538D5}" type="datetimeFigureOut">
-              <a:t>12-Oct-26</a:t>
+              <a:t>14-Oct-26</a:t>
             </a:fld>
             <a:endParaRPr/>
           </a:p>
@@ -5780,7 +5867,7 @@
           <a:lstStyle/>
           <a:p>
             <a:fld id="{0E1AB97B-D0C7-4CCB-8568-F47C13D538D5}" type="datetimeFigureOut">
-              <a:t>12-Oct-26</a:t>
+              <a:t>14-Oct-26</a:t>
             </a:fld>
             <a:endParaRPr/>
           </a:p>
@@ -5886,7 +5973,7 @@
           <a:lstStyle/>
           <a:p>
             <a:fld id="{0E1AB97B-D0C7-4CCB-8568-F47C13D538D5}" type="datetimeFigureOut">
-              <a:t>12-Oct-26</a:t>
+              <a:t>14-Oct-26</a:t>
             </a:fld>
             <a:endParaRPr/>
           </a:p>
@@ -6174,7 +6261,7 @@
           <a:lstStyle/>
           <a:p>
             <a:fld id="{0E1AB97B-D0C7-4CCB-8568-F47C13D538D5}" type="datetimeFigureOut">
-              <a:t>12-Oct-26</a:t>
+              <a:t>14-Oct-26</a:t>
             </a:fld>
             <a:endParaRPr/>
           </a:p>
@@ -6517,7 +6604,7 @@
           <a:lstStyle/>
           <a:p>
             <a:fld id="{0E1AB97B-D0C7-4CCB-8568-F47C13D538D5}" type="datetimeFigureOut">
-              <a:t>12-Oct-26</a:t>
+              <a:t>14-Oct-26</a:t>
             </a:fld>
             <a:endParaRPr/>
           </a:p>
@@ -7361,7 +7448,7 @@
           </a:lstStyle>
           <a:p>
             <a:fld id="{0E1AB97B-D0C7-4CCB-8568-F47C13D538D5}" type="datetimeFigureOut">
-              <a:t>12-Oct-26</a:t>
+              <a:t>14-Oct-26</a:t>
             </a:fld>
             <a:endParaRPr/>
           </a:p>
@@ -8303,6 +8390,714 @@
 </file>
 
 <file path=ppt/slides/slide10.xml><?xml version="1.0" encoding="utf-8"?>
+<p:sld xmlns:a="http://schemas.openxmlformats.org/drawingml/2006/main" xmlns:r="http://schemas.openxmlformats.org/officeDocument/2006/relationships" xmlns:p="http://schemas.openxmlformats.org/presentationml/2006/main">
+  <p:cSld>
+    <p:spTree>
+      <p:nvGrpSpPr>
+        <p:cNvPr id="1" name=""/>
+        <p:cNvGrpSpPr/>
+        <p:nvPr/>
+      </p:nvGrpSpPr>
+      <p:grpSpPr>
+        <a:xfrm>
+          <a:off x="0" y="0"/>
+          <a:ext cx="0" cy="0"/>
+          <a:chOff x="0" y="0"/>
+          <a:chExt cx="0" cy="0"/>
+        </a:xfrm>
+      </p:grpSpPr>
+      <p:sp>
+        <p:nvSpPr>
+          <p:cNvPr id="2" name="Title 1">
+            <a:extLst>
+              <a:ext uri="{FF2B5EF4-FFF2-40B4-BE49-F238E27FC236}">
+                <a16:creationId xmlns:a16="http://schemas.microsoft.com/office/drawing/2014/main" id="{B66EAA72-EC7F-4ECD-B4EF-D54E871C6881}"/>
+              </a:ext>
+            </a:extLst>
+          </p:cNvPr>
+          <p:cNvSpPr>
+            <a:spLocks noGrp="1"/>
+          </p:cNvSpPr>
+          <p:nvPr>
+            <p:ph type="title"/>
+          </p:nvPr>
+        </p:nvSpPr>
+        <p:spPr>
+          <a:xfrm>
+            <a:off x="677332" y="609600"/>
+            <a:ext cx="5825735" cy="1320800"/>
+          </a:xfrm>
+        </p:spPr>
+        <p:txBody>
+          <a:bodyPr vert="horz" lIns="91440" tIns="45720" rIns="91440" bIns="45720" anchor="t">
+            <a:normAutofit/>
+          </a:bodyPr>
+          <a:lstStyle/>
+          <a:p>
+            <a:r>
+              <a:t>Έλεγχος προβλημάτων</a:t>
+            </a:r>
+          </a:p>
+        </p:txBody>
+      </p:sp>
+      <p:sp>
+        <p:nvSpPr>
+          <p:cNvPr id="4" name="Content Placeholder 2">
+            <a:extLst>
+              <a:ext uri="{FF2B5EF4-FFF2-40B4-BE49-F238E27FC236}">
+                <a16:creationId xmlns:a16="http://schemas.microsoft.com/office/drawing/2014/main" id="{EB3F7303-CEA4-CFC4-5052-5C4AC627408E}"/>
+              </a:ext>
+            </a:extLst>
+          </p:cNvPr>
+          <p:cNvSpPr>
+            <a:spLocks noGrp="1"/>
+          </p:cNvSpPr>
+          <p:nvPr>
+            <p:ph idx="1"/>
+          </p:nvPr>
+        </p:nvSpPr>
+        <p:spPr>
+          <a:xfrm>
+            <a:off x="677333" y="2160589"/>
+            <a:ext cx="6716071" cy="3880772"/>
+          </a:xfrm>
+        </p:spPr>
+        <p:txBody>
+          <a:bodyPr>
+            <a:normAutofit/>
+          </a:bodyPr>
+          <a:lstStyle/>
+          <a:p>
+            <a:endParaRPr/>
+          </a:p>
+        </p:txBody>
+      </p:sp>
+      <p:sp>
+        <p:nvSpPr>
+          <p:cNvPr id="5" name="Clean content area">
+            <a:extLst>
+              <a:ext uri="{FF2B5EF4-FFF2-40B4-BE49-F238E27FC236}">
+                <a16:creationId xmlns:a16="http://schemas.microsoft.com/office/drawing/2014/main" id="{73383F08-623A-462D-A230-968EFDB9DA69}"/>
+              </a:ext>
+            </a:extLst>
+          </p:cNvPr>
+          <p:cNvSpPr>
+            <a:spLocks noGrp="1"/>
+          </p:cNvSpPr>
+          <p:nvPr/>
+        </p:nvSpPr>
+        <p:spPr>
+          <a:xfrm>
+            <a:off x="590550" y="1352550"/>
+            <a:ext cx="11049000" cy="5000625"/>
+          </a:xfrm>
+          <a:prstGeom prst="rect">
+            <a:avLst/>
+          </a:prstGeom>
+          <a:solidFill>
+            <a:srgbClr val="FFFFFF"/>
+          </a:solidFill>
+          <a:ln w="0">
+            <a:noFill/>
+          </a:ln>
+        </p:spPr>
+        <p:txBody>
+          <a:bodyPr/>
+          <a:lstStyle/>
+          <a:p>
+            <a:endParaRPr lang="en-GB"/>
+          </a:p>
+        </p:txBody>
+      </p:sp>
+      <p:sp>
+        <p:nvSpPr>
+          <p:cNvPr id="6" name="Section reference">
+            <a:extLst>
+              <a:ext uri="{FF2B5EF4-FFF2-40B4-BE49-F238E27FC236}">
+                <a16:creationId xmlns:a16="http://schemas.microsoft.com/office/drawing/2014/main" id="{97D7BDD8-9508-4066-A397-B979ED88C1FF}"/>
+              </a:ext>
+            </a:extLst>
+          </p:cNvPr>
+          <p:cNvSpPr>
+            <a:spLocks noGrp="1"/>
+          </p:cNvSpPr>
+          <p:nvPr/>
+        </p:nvSpPr>
+        <p:spPr>
+          <a:xfrm>
+            <a:off x="781050" y="1466850"/>
+            <a:ext cx="4953000" cy="266700"/>
+          </a:xfrm>
+          <a:prstGeom prst="rect">
+            <a:avLst/>
+          </a:prstGeom>
+          <a:noFill/>
+          <a:ln w="0">
+            <a:noFill/>
+          </a:ln>
+        </p:spPr>
+        <p:txBody>
+          <a:bodyPr>
+            <a:noAutofit/>
+          </a:bodyPr>
+          <a:lstStyle/>
+          <a:p>
+            <a:pPr>
+              <a:defRPr sz="1275" b="1">
+                <a:solidFill>
+                  <a:srgbClr val="168EAD"/>
+                </a:solidFill>
+                <a:latin typeface="Trebuchet MS"/>
+                <a:ea typeface="Trebuchet MS"/>
+                <a:cs typeface="Trebuchet MS"/>
+              </a:defRPr>
+            </a:pPr>
+            <a:r>
+              <a:rPr sz="1275" b="1">
+                <a:solidFill>
+                  <a:srgbClr val="168EAD"/>
+                </a:solidFill>
+                <a:latin typeface="Trebuchet MS"/>
+                <a:ea typeface="Trebuchet MS"/>
+                <a:cs typeface="Trebuchet MS"/>
+              </a:rPr>
+              <a:t>A.5.M2 | Θεωρία</a:t>
+            </a:r>
+          </a:p>
+        </p:txBody>
+      </p:sp>
+      <p:sp>
+        <p:nvSpPr>
+          <p:cNvPr id="7" name="Block heading 1">
+            <a:extLst>
+              <a:ext uri="{FF2B5EF4-FFF2-40B4-BE49-F238E27FC236}">
+                <a16:creationId xmlns:a16="http://schemas.microsoft.com/office/drawing/2014/main" id="{F1736C36-5F43-4C65-BFB2-FE2C8E1539B0}"/>
+              </a:ext>
+            </a:extLst>
+          </p:cNvPr>
+          <p:cNvSpPr>
+            <a:spLocks noGrp="1"/>
+          </p:cNvSpPr>
+          <p:nvPr/>
+        </p:nvSpPr>
+        <p:spPr>
+          <a:xfrm>
+            <a:off x="781050" y="1857375"/>
+            <a:ext cx="4762500" cy="285750"/>
+          </a:xfrm>
+          <a:prstGeom prst="rect">
+            <a:avLst/>
+          </a:prstGeom>
+          <a:noFill/>
+          <a:ln w="0">
+            <a:noFill/>
+          </a:ln>
+        </p:spPr>
+        <p:txBody>
+          <a:bodyPr>
+            <a:noAutofit/>
+          </a:bodyPr>
+          <a:lstStyle/>
+          <a:p>
+            <a:pPr>
+              <a:defRPr sz="1575" b="1">
+                <a:solidFill>
+                  <a:srgbClr val="18A7CC"/>
+                </a:solidFill>
+                <a:latin typeface="Trebuchet MS"/>
+                <a:ea typeface="Trebuchet MS"/>
+                <a:cs typeface="Trebuchet MS"/>
+              </a:defRPr>
+            </a:pPr>
+            <a:r>
+              <a:rPr sz="1575" b="1">
+                <a:solidFill>
+                  <a:srgbClr val="18A7CC"/>
+                </a:solidFill>
+                <a:latin typeface="Trebuchet MS"/>
+                <a:ea typeface="Trebuchet MS"/>
+                <a:cs typeface="Trebuchet MS"/>
+              </a:rPr>
+              <a:t>Φυσική σύνδεση</a:t>
+            </a:r>
+          </a:p>
+        </p:txBody>
+      </p:sp>
+      <p:sp>
+        <p:nvSpPr>
+          <p:cNvPr id="8" name="Block body 1">
+            <a:extLst>
+              <a:ext uri="{FF2B5EF4-FFF2-40B4-BE49-F238E27FC236}">
+                <a16:creationId xmlns:a16="http://schemas.microsoft.com/office/drawing/2014/main" id="{0160AFBB-5761-4B19-83D2-D7D792715BDC}"/>
+              </a:ext>
+            </a:extLst>
+          </p:cNvPr>
+          <p:cNvSpPr>
+            <a:spLocks noGrp="1"/>
+          </p:cNvSpPr>
+          <p:nvPr/>
+        </p:nvSpPr>
+        <p:spPr>
+          <a:xfrm>
+            <a:off x="781050" y="2171700"/>
+            <a:ext cx="4762500" cy="981075"/>
+          </a:xfrm>
+          <a:prstGeom prst="rect">
+            <a:avLst/>
+          </a:prstGeom>
+          <a:noFill/>
+          <a:ln w="0">
+            <a:noFill/>
+          </a:ln>
+        </p:spPr>
+        <p:txBody>
+          <a:bodyPr>
+            <a:noAutofit/>
+          </a:bodyPr>
+          <a:lstStyle/>
+          <a:p>
+            <a:pPr>
+              <a:defRPr sz="1650" b="0">
+                <a:solidFill>
+                  <a:srgbClr val="333333"/>
+                </a:solidFill>
+                <a:latin typeface="Trebuchet MS"/>
+                <a:ea typeface="Trebuchet MS"/>
+                <a:cs typeface="Trebuchet MS"/>
+              </a:defRPr>
+            </a:pPr>
+            <a:r>
+              <a:rPr sz="1650" b="0" dirty="0" err="1">
+                <a:solidFill>
+                  <a:srgbClr val="333333"/>
+                </a:solidFill>
+                <a:latin typeface="Trebuchet MS"/>
+                <a:ea typeface="Trebuchet MS"/>
+                <a:cs typeface="Trebuchet MS"/>
+              </a:rPr>
+              <a:t>Ελέγχουμε</a:t>
+            </a:r>
+            <a:r>
+              <a:rPr sz="1650" b="0" dirty="0">
+                <a:solidFill>
+                  <a:srgbClr val="333333"/>
+                </a:solidFill>
+                <a:latin typeface="Trebuchet MS"/>
+                <a:ea typeface="Trebuchet MS"/>
+                <a:cs typeface="Trebuchet MS"/>
+              </a:rPr>
+              <a:t> κα</a:t>
+            </a:r>
+            <a:r>
+              <a:rPr sz="1650" b="0" dirty="0" err="1">
+                <a:solidFill>
+                  <a:srgbClr val="333333"/>
+                </a:solidFill>
+                <a:latin typeface="Trebuchet MS"/>
+                <a:ea typeface="Trebuchet MS"/>
+                <a:cs typeface="Trebuchet MS"/>
+              </a:rPr>
+              <a:t>λώδι</a:t>
+            </a:r>
+            <a:r>
+              <a:rPr sz="1650" b="0" dirty="0">
+                <a:solidFill>
+                  <a:srgbClr val="333333"/>
+                </a:solidFill>
+                <a:latin typeface="Trebuchet MS"/>
+                <a:ea typeface="Trebuchet MS"/>
+                <a:cs typeface="Trebuchet MS"/>
+              </a:rPr>
+              <a:t>α, θύρες, φωτεινές ενδείξεις και ασύρματη σύνδεση.</a:t>
+            </a:r>
+          </a:p>
+        </p:txBody>
+      </p:sp>
+      <p:sp>
+        <p:nvSpPr>
+          <p:cNvPr id="9" name="Block heading 2">
+            <a:extLst>
+              <a:ext uri="{FF2B5EF4-FFF2-40B4-BE49-F238E27FC236}">
+                <a16:creationId xmlns:a16="http://schemas.microsoft.com/office/drawing/2014/main" id="{9B4086BE-70E4-4A1F-82CE-DB4DA9B4A135}"/>
+              </a:ext>
+            </a:extLst>
+          </p:cNvPr>
+          <p:cNvSpPr>
+            <a:spLocks noGrp="1"/>
+          </p:cNvSpPr>
+          <p:nvPr/>
+        </p:nvSpPr>
+        <p:spPr>
+          <a:xfrm>
+            <a:off x="781050" y="3190875"/>
+            <a:ext cx="4762500" cy="285750"/>
+          </a:xfrm>
+          <a:prstGeom prst="rect">
+            <a:avLst/>
+          </a:prstGeom>
+          <a:noFill/>
+          <a:ln w="0">
+            <a:noFill/>
+          </a:ln>
+        </p:spPr>
+        <p:txBody>
+          <a:bodyPr>
+            <a:noAutofit/>
+          </a:bodyPr>
+          <a:lstStyle/>
+          <a:p>
+            <a:pPr>
+              <a:defRPr sz="1575" b="1">
+                <a:solidFill>
+                  <a:srgbClr val="18A7CC"/>
+                </a:solidFill>
+                <a:latin typeface="Trebuchet MS"/>
+                <a:ea typeface="Trebuchet MS"/>
+                <a:cs typeface="Trebuchet MS"/>
+              </a:defRPr>
+            </a:pPr>
+            <a:r>
+              <a:rPr sz="1575" b="1">
+                <a:solidFill>
+                  <a:srgbClr val="18A7CC"/>
+                </a:solidFill>
+                <a:latin typeface="Trebuchet MS"/>
+                <a:ea typeface="Trebuchet MS"/>
+                <a:cs typeface="Trebuchet MS"/>
+              </a:rPr>
+              <a:t>Ρυθμίσεις</a:t>
+            </a:r>
+          </a:p>
+        </p:txBody>
+      </p:sp>
+      <p:sp>
+        <p:nvSpPr>
+          <p:cNvPr id="10" name="Block body 2">
+            <a:extLst>
+              <a:ext uri="{FF2B5EF4-FFF2-40B4-BE49-F238E27FC236}">
+                <a16:creationId xmlns:a16="http://schemas.microsoft.com/office/drawing/2014/main" id="{F247D9E9-005F-4FAD-BF67-666F30485EE6}"/>
+              </a:ext>
+            </a:extLst>
+          </p:cNvPr>
+          <p:cNvSpPr>
+            <a:spLocks noGrp="1"/>
+          </p:cNvSpPr>
+          <p:nvPr/>
+        </p:nvSpPr>
+        <p:spPr>
+          <a:xfrm>
+            <a:off x="781050" y="3505200"/>
+            <a:ext cx="4762500" cy="981075"/>
+          </a:xfrm>
+          <a:prstGeom prst="rect">
+            <a:avLst/>
+          </a:prstGeom>
+          <a:noFill/>
+          <a:ln w="0">
+            <a:noFill/>
+          </a:ln>
+        </p:spPr>
+        <p:txBody>
+          <a:bodyPr>
+            <a:noAutofit/>
+          </a:bodyPr>
+          <a:lstStyle/>
+          <a:p>
+            <a:pPr>
+              <a:defRPr sz="1650" b="0">
+                <a:solidFill>
+                  <a:srgbClr val="333333"/>
+                </a:solidFill>
+                <a:latin typeface="Trebuchet MS"/>
+                <a:ea typeface="Trebuchet MS"/>
+                <a:cs typeface="Trebuchet MS"/>
+              </a:defRPr>
+            </a:pPr>
+            <a:r>
+              <a:rPr sz="1650" b="0" dirty="0" err="1">
+                <a:solidFill>
+                  <a:srgbClr val="333333"/>
+                </a:solidFill>
+                <a:latin typeface="Trebuchet MS"/>
+                <a:ea typeface="Trebuchet MS"/>
+                <a:cs typeface="Trebuchet MS"/>
+              </a:rPr>
+              <a:t>Ελέγχουμε</a:t>
+            </a:r>
+            <a:r>
+              <a:rPr sz="1650" b="0" dirty="0">
+                <a:solidFill>
+                  <a:srgbClr val="333333"/>
+                </a:solidFill>
+                <a:latin typeface="Trebuchet MS"/>
+                <a:ea typeface="Trebuchet MS"/>
+                <a:cs typeface="Trebuchet MS"/>
+              </a:rPr>
+              <a:t> </a:t>
+            </a:r>
+            <a:r>
+              <a:rPr sz="1650" b="0" dirty="0" err="1">
+                <a:solidFill>
+                  <a:srgbClr val="333333"/>
+                </a:solidFill>
+                <a:latin typeface="Trebuchet MS"/>
+                <a:ea typeface="Trebuchet MS"/>
+                <a:cs typeface="Trebuchet MS"/>
+              </a:rPr>
+              <a:t>την</a:t>
+            </a:r>
+            <a:r>
+              <a:rPr sz="1650" b="0" dirty="0">
+                <a:solidFill>
+                  <a:srgbClr val="333333"/>
+                </a:solidFill>
+                <a:latin typeface="Trebuchet MS"/>
+                <a:ea typeface="Trebuchet MS"/>
+                <a:cs typeface="Trebuchet MS"/>
+              </a:rPr>
+              <a:t> IP Address, </a:t>
+            </a:r>
+            <a:r>
+              <a:rPr sz="1650" b="0" dirty="0" err="1">
+                <a:solidFill>
+                  <a:srgbClr val="333333"/>
+                </a:solidFill>
+                <a:latin typeface="Trebuchet MS"/>
+                <a:ea typeface="Trebuchet MS"/>
+                <a:cs typeface="Trebuchet MS"/>
+              </a:rPr>
+              <a:t>τη</a:t>
+            </a:r>
+            <a:r>
+              <a:rPr sz="1650" b="0" dirty="0">
+                <a:solidFill>
+                  <a:srgbClr val="333333"/>
+                </a:solidFill>
+                <a:latin typeface="Trebuchet MS"/>
+                <a:ea typeface="Trebuchet MS"/>
+                <a:cs typeface="Trebuchet MS"/>
+              </a:rPr>
+              <a:t> </a:t>
+            </a:r>
+            <a:r>
+              <a:rPr lang="en-US" sz="1650" b="0" dirty="0">
+                <a:solidFill>
+                  <a:srgbClr val="333333"/>
+                </a:solidFill>
+                <a:latin typeface="Trebuchet MS"/>
+                <a:ea typeface="Trebuchet MS"/>
+                <a:cs typeface="Trebuchet MS"/>
+              </a:rPr>
+              <a:t>subnet </a:t>
+            </a:r>
+            <a:r>
+              <a:rPr sz="1650" b="0" dirty="0" err="1">
+                <a:solidFill>
+                  <a:srgbClr val="333333"/>
+                </a:solidFill>
+                <a:latin typeface="Trebuchet MS"/>
+                <a:ea typeface="Trebuchet MS"/>
+                <a:cs typeface="Trebuchet MS"/>
+              </a:rPr>
+              <a:t>μάσκ</a:t>
+            </a:r>
+            <a:r>
+              <a:rPr sz="1650" b="0" dirty="0">
+                <a:solidFill>
+                  <a:srgbClr val="333333"/>
+                </a:solidFill>
+                <a:latin typeface="Trebuchet MS"/>
+                <a:ea typeface="Trebuchet MS"/>
+                <a:cs typeface="Trebuchet MS"/>
+              </a:rPr>
+              <a:t>α και το Default Gateway.</a:t>
+            </a:r>
+          </a:p>
+        </p:txBody>
+      </p:sp>
+      <p:sp>
+        <p:nvSpPr>
+          <p:cNvPr id="11" name="Block heading 3">
+            <a:extLst>
+              <a:ext uri="{FF2B5EF4-FFF2-40B4-BE49-F238E27FC236}">
+                <a16:creationId xmlns:a16="http://schemas.microsoft.com/office/drawing/2014/main" id="{DF305F1F-5AC1-4283-98E0-31602520785C}"/>
+              </a:ext>
+            </a:extLst>
+          </p:cNvPr>
+          <p:cNvSpPr>
+            <a:spLocks noGrp="1"/>
+          </p:cNvSpPr>
+          <p:nvPr/>
+        </p:nvSpPr>
+        <p:spPr>
+          <a:xfrm>
+            <a:off x="781050" y="4524375"/>
+            <a:ext cx="4762500" cy="285750"/>
+          </a:xfrm>
+          <a:prstGeom prst="rect">
+            <a:avLst/>
+          </a:prstGeom>
+          <a:noFill/>
+          <a:ln w="0">
+            <a:noFill/>
+          </a:ln>
+        </p:spPr>
+        <p:txBody>
+          <a:bodyPr>
+            <a:noAutofit/>
+          </a:bodyPr>
+          <a:lstStyle/>
+          <a:p>
+            <a:pPr>
+              <a:defRPr sz="1575" b="1">
+                <a:solidFill>
+                  <a:srgbClr val="18A7CC"/>
+                </a:solidFill>
+                <a:latin typeface="Trebuchet MS"/>
+                <a:ea typeface="Trebuchet MS"/>
+                <a:cs typeface="Trebuchet MS"/>
+              </a:defRPr>
+            </a:pPr>
+            <a:r>
+              <a:rPr sz="1575" b="1">
+                <a:solidFill>
+                  <a:srgbClr val="18A7CC"/>
+                </a:solidFill>
+                <a:latin typeface="Trebuchet MS"/>
+                <a:ea typeface="Trebuchet MS"/>
+                <a:cs typeface="Trebuchet MS"/>
+              </a:rPr>
+              <a:t>Δοκιμές</a:t>
+            </a:r>
+          </a:p>
+        </p:txBody>
+      </p:sp>
+      <p:sp>
+        <p:nvSpPr>
+          <p:cNvPr id="12" name="Block body 3">
+            <a:extLst>
+              <a:ext uri="{FF2B5EF4-FFF2-40B4-BE49-F238E27FC236}">
+                <a16:creationId xmlns:a16="http://schemas.microsoft.com/office/drawing/2014/main" id="{FF732DCC-CCBB-4D4B-9717-9FF19AD766E4}"/>
+              </a:ext>
+            </a:extLst>
+          </p:cNvPr>
+          <p:cNvSpPr>
+            <a:spLocks noGrp="1"/>
+          </p:cNvSpPr>
+          <p:nvPr/>
+        </p:nvSpPr>
+        <p:spPr>
+          <a:xfrm>
+            <a:off x="781050" y="4838700"/>
+            <a:ext cx="4762500" cy="981075"/>
+          </a:xfrm>
+          <a:prstGeom prst="rect">
+            <a:avLst/>
+          </a:prstGeom>
+          <a:noFill/>
+          <a:ln w="0">
+            <a:noFill/>
+          </a:ln>
+        </p:spPr>
+        <p:txBody>
+          <a:bodyPr>
+            <a:noAutofit/>
+          </a:bodyPr>
+          <a:lstStyle/>
+          <a:p>
+            <a:pPr>
+              <a:defRPr sz="1650" b="0">
+                <a:solidFill>
+                  <a:srgbClr val="333333"/>
+                </a:solidFill>
+                <a:latin typeface="Trebuchet MS"/>
+                <a:ea typeface="Trebuchet MS"/>
+                <a:cs typeface="Trebuchet MS"/>
+              </a:defRPr>
+            </a:pPr>
+            <a:r>
+              <a:rPr sz="1650" b="0" dirty="0" err="1">
+                <a:solidFill>
+                  <a:srgbClr val="333333"/>
+                </a:solidFill>
+                <a:latin typeface="Trebuchet MS"/>
+                <a:ea typeface="Trebuchet MS"/>
+                <a:cs typeface="Trebuchet MS"/>
+              </a:rPr>
+              <a:t>Δοκιμάζουμε</a:t>
+            </a:r>
+            <a:r>
+              <a:rPr sz="1650" b="0" dirty="0">
+                <a:solidFill>
+                  <a:srgbClr val="333333"/>
+                </a:solidFill>
+                <a:latin typeface="Trebuchet MS"/>
+                <a:ea typeface="Trebuchet MS"/>
+                <a:cs typeface="Trebuchet MS"/>
+              </a:rPr>
+              <a:t> επ</a:t>
+            </a:r>
+            <a:r>
+              <a:rPr sz="1650" b="0" dirty="0" err="1">
+                <a:solidFill>
+                  <a:srgbClr val="333333"/>
+                </a:solidFill>
+                <a:latin typeface="Trebuchet MS"/>
+                <a:ea typeface="Trebuchet MS"/>
+                <a:cs typeface="Trebuchet MS"/>
+              </a:rPr>
+              <a:t>ικοινωνί</a:t>
+            </a:r>
+            <a:r>
+              <a:rPr sz="1650" b="0" dirty="0">
+                <a:solidFill>
+                  <a:srgbClr val="333333"/>
+                </a:solidFill>
+                <a:latin typeface="Trebuchet MS"/>
+                <a:ea typeface="Trebuchet MS"/>
+                <a:cs typeface="Trebuchet MS"/>
+              </a:rPr>
+              <a:t>α πρώτα με τον router και έπειτα με απομακρυσμένο προορισμό.</a:t>
+            </a:r>
+          </a:p>
+        </p:txBody>
+      </p:sp>
+      <p:pic>
+        <p:nvPicPr>
+          <p:cNvPr id="24" name="Picture 23"/>
+          <p:cNvPicPr>
+            <a:picLocks noChangeAspect="1"/>
+          </p:cNvPicPr>
+          <p:nvPr/>
+        </p:nvPicPr>
+        <p:blipFill>
+          <a:blip r:embed="rId3"/>
+          <a:stretch/>
+        </p:blipFill>
+        <p:spPr>
+          <a:xfrm>
+            <a:off x="5953125" y="2553451"/>
+            <a:ext cx="4905375" cy="2513099"/>
+          </a:xfrm>
+          <a:prstGeom prst="rect">
+            <a:avLst/>
+          </a:prstGeom>
+        </p:spPr>
+      </p:pic>
+    </p:spTree>
+    <p:extLst>
+      <p:ext uri="{BB962C8B-B14F-4D97-AF65-F5344CB8AC3E}">
+        <p14:creationId xmlns:p14="http://schemas.microsoft.com/office/powerpoint/2010/main" val="3786659628"/>
+      </p:ext>
+    </p:extLst>
+  </p:cSld>
+  <p:clrMapOvr>
+    <a:masterClrMapping/>
+  </p:clrMapOvr>
+</p:sld>
+</file>
+
+<file path=ppt/slides/slide11.xml><?xml version="1.0" encoding="utf-8"?>
 <p:sld xmlns:a="http://schemas.openxmlformats.org/drawingml/2006/main" xmlns:r="http://schemas.openxmlformats.org/officeDocument/2006/relationships" xmlns:p="http://schemas.openxmlformats.org/presentationml/2006/main">
   <p:cSld>
     <p:spTree>
@@ -10977,7 +11772,7 @@
           <p:cNvPr id="2" name="Title 1">
             <a:extLst>
               <a:ext uri="{FF2B5EF4-FFF2-40B4-BE49-F238E27FC236}">
-                <a16:creationId xmlns:a16="http://schemas.microsoft.com/office/drawing/2014/main" id="{760CC5F6-A8B2-464D-A77D-97CB05567F67}"/>
+                <a16:creationId xmlns:a16="http://schemas.microsoft.com/office/drawing/2014/main" id="{F1C80C27-6CEF-EE3A-991A-0FC47EB87BB6}"/>
               </a:ext>
             </a:extLst>
           </p:cNvPr>
@@ -10988,712 +11783,275 @@
             <p:ph type="title"/>
           </p:nvPr>
         </p:nvSpPr>
+        <p:spPr/>
+        <p:txBody>
+          <a:bodyPr/>
+          <a:lstStyle/>
+          <a:p>
+            <a:r>
+              <a:rPr lang="en-GB" dirty="0"/>
+              <a:t>DNS Server</a:t>
+            </a:r>
+            <a:br>
+              <a:rPr lang="en-GB" dirty="0"/>
+            </a:br>
+            <a:endParaRPr lang="en-GB" dirty="0"/>
+          </a:p>
+        </p:txBody>
+      </p:sp>
+      <p:pic>
+        <p:nvPicPr>
+          <p:cNvPr id="3" name="Online Media 2" title="How DNS Works?">
+            <a:hlinkClick r:id="" action="ppaction://media"/>
+            <a:extLst>
+              <a:ext uri="{FF2B5EF4-FFF2-40B4-BE49-F238E27FC236}">
+                <a16:creationId xmlns:a16="http://schemas.microsoft.com/office/drawing/2014/main" id="{5E81F412-9C4C-4464-A133-B6659ACA4154}"/>
+              </a:ext>
+            </a:extLst>
+          </p:cNvPr>
+          <p:cNvPicPr>
+            <a:picLocks noRot="1" noChangeAspect="1"/>
+          </p:cNvPicPr>
+          <p:nvPr>
+            <a:videoFile r:link="rId1"/>
+          </p:nvPr>
+        </p:nvPicPr>
+        <p:blipFill>
+          <a:blip r:embed="rId3"/>
+          <a:stretch>
+            <a:fillRect/>
+          </a:stretch>
+        </p:blipFill>
         <p:spPr>
           <a:xfrm>
-            <a:off x="677323" y="609600"/>
-            <a:ext cx="5905500" cy="762000"/>
-          </a:xfrm>
-        </p:spPr>
-        <p:txBody>
-          <a:bodyPr vert="horz" lIns="91440" tIns="45720" rIns="91440" bIns="45720" anchor="t">
-            <a:normAutofit/>
-          </a:bodyPr>
-          <a:lstStyle/>
-          <a:p>
-            <a:r>
-              <a:t>DNS Server</a:t>
-            </a:r>
-          </a:p>
-        </p:txBody>
-      </p:sp>
-      <p:sp>
-        <p:nvSpPr>
-          <p:cNvPr id="7" name="Clean content 3">
-            <a:extLst>
-              <a:ext uri="{FF2B5EF4-FFF2-40B4-BE49-F238E27FC236}">
-                <a16:creationId xmlns:a16="http://schemas.microsoft.com/office/drawing/2014/main" id="{67CB5BBD-28F4-4BB4-B66B-2ADB50A53ABD}"/>
-              </a:ext>
-            </a:extLst>
-          </p:cNvPr>
-          <p:cNvSpPr>
-            <a:spLocks noGrp="1"/>
-          </p:cNvSpPr>
-          <p:nvPr/>
-        </p:nvSpPr>
-        <p:spPr>
-          <a:xfrm>
-            <a:off x="619125" y="1381125"/>
-            <a:ext cx="11001375" cy="4953000"/>
+            <a:off x="4184650" y="244475"/>
+            <a:ext cx="3822700" cy="6369050"/>
           </a:xfrm>
           <a:prstGeom prst="rect">
             <a:avLst/>
           </a:prstGeom>
-          <a:solidFill>
-            <a:srgbClr val="FFFFFF"/>
-          </a:solidFill>
-          <a:ln w="0">
-            <a:noFill/>
-          </a:ln>
-        </p:spPr>
-        <p:txBody>
-          <a:bodyPr/>
-          <a:lstStyle/>
-          <a:p>
-            <a:endParaRPr lang="en-US"/>
-          </a:p>
-        </p:txBody>
-      </p:sp>
-      <p:sp>
-        <p:nvSpPr>
-          <p:cNvPr id="8" name="Rectangle 7">
-            <a:extLst>
-              <a:ext uri="{FF2B5EF4-FFF2-40B4-BE49-F238E27FC236}">
-                <a16:creationId xmlns:a16="http://schemas.microsoft.com/office/drawing/2014/main" id="{712089EB-B18F-4A43-846E-6987B5F12BC3}"/>
-              </a:ext>
-            </a:extLst>
-          </p:cNvPr>
-          <p:cNvSpPr>
-            <a:spLocks noGrp="1"/>
-          </p:cNvSpPr>
-          <p:nvPr/>
-        </p:nvSpPr>
-        <p:spPr>
-          <a:xfrm>
-            <a:off x="781050" y="1485900"/>
-            <a:ext cx="10287000" cy="552450"/>
-          </a:xfrm>
-          <a:prstGeom prst="rect">
-            <a:avLst/>
-          </a:prstGeom>
-          <a:noFill/>
-          <a:ln w="0">
-            <a:noFill/>
-          </a:ln>
-        </p:spPr>
-        <p:txBody>
-          <a:bodyPr anchor="t"/>
-          <a:lstStyle>
-            <a:defPPr algn="l">
-              <a:defRPr sz="1800" b="0">
-                <a:solidFill>
-                  <a:srgbClr val="333333"/>
-                </a:solidFill>
-              </a:defRPr>
-            </a:defPPr>
-          </a:lstStyle>
-          <a:p>
-            <a:pPr algn="l">
-              <a:defRPr sz="1800" b="0">
-                <a:solidFill>
-                  <a:srgbClr val="333333"/>
-                </a:solidFill>
-              </a:defRPr>
-            </a:pPr>
-            <a:r>
-              <a:rPr sz="1800" b="0">
-                <a:solidFill>
-                  <a:srgbClr val="333333"/>
-                </a:solidFill>
-              </a:rPr>
-              <a:t>Ο DNS Server αντιστοιχίζει το όνομα μιας ιστοσελίδας με τη διεύθυνση IP του server της.</a:t>
-            </a:r>
-          </a:p>
-        </p:txBody>
-      </p:sp>
-      <p:sp>
-        <p:nvSpPr>
-          <p:cNvPr id="9" name="Rectangle: Rounded Corners 8">
-            <a:extLst>
-              <a:ext uri="{FF2B5EF4-FFF2-40B4-BE49-F238E27FC236}">
-                <a16:creationId xmlns:a16="http://schemas.microsoft.com/office/drawing/2014/main" id="{CF338F2D-351D-464A-AF6D-5EC183339EEA}"/>
-              </a:ext>
-            </a:extLst>
-          </p:cNvPr>
-          <p:cNvSpPr>
-            <a:spLocks noGrp="1"/>
-          </p:cNvSpPr>
-          <p:nvPr/>
-        </p:nvSpPr>
-        <p:spPr>
-          <a:xfrm>
-            <a:off x="781050" y="2524125"/>
-            <a:ext cx="2428875" cy="1666875"/>
-          </a:xfrm>
-          <a:prstGeom prst="roundRect">
-            <a:avLst>
-              <a:gd name="adj" fmla="val 6857"/>
-            </a:avLst>
-          </a:prstGeom>
-          <a:solidFill>
-            <a:srgbClr val="E8F7FC"/>
-          </a:solidFill>
-          <a:ln w="19050">
-            <a:solidFill>
-              <a:srgbClr val="5FCBEF"/>
-            </a:solidFill>
-            <a:prstDash val="solid"/>
-          </a:ln>
-        </p:spPr>
-        <p:txBody>
-          <a:bodyPr anchor="ctr"/>
-          <a:lstStyle>
-            <a:defPPr algn="ctr">
-              <a:defRPr sz="1800" b="1">
-                <a:solidFill>
-                  <a:srgbClr val="23566A"/>
-                </a:solidFill>
-              </a:defRPr>
-            </a:defPPr>
-          </a:lstStyle>
-          <a:p>
-            <a:pPr algn="ctr">
-              <a:defRPr sz="1800" b="1">
-                <a:solidFill>
-                  <a:srgbClr val="23566A"/>
-                </a:solidFill>
-              </a:defRPr>
-            </a:pPr>
-            <a:r>
-              <a:rPr sz="1800" b="1">
-                <a:solidFill>
-                  <a:srgbClr val="23566A"/>
-                </a:solidFill>
-              </a:rPr>
-              <a:t>Υπολογιστής</a:t>
-            </a:r>
-          </a:p>
-          <a:p>
-            <a:endParaRPr sz="1800" b="1">
-              <a:solidFill>
-                <a:srgbClr val="23566A"/>
-              </a:solidFill>
-            </a:endParaRPr>
-          </a:p>
-          <a:p>
-            <a:pPr algn="ctr">
-              <a:defRPr sz="1800" b="1">
-                <a:solidFill>
-                  <a:srgbClr val="23566A"/>
-                </a:solidFill>
-              </a:defRPr>
-            </a:pPr>
-            <a:r>
-              <a:rPr sz="1800" b="1">
-                <a:solidFill>
-                  <a:srgbClr val="23566A"/>
-                </a:solidFill>
-              </a:rPr>
-              <a:t>www.example.com</a:t>
-            </a:r>
-          </a:p>
-        </p:txBody>
-      </p:sp>
-      <p:sp>
-        <p:nvSpPr>
-          <p:cNvPr id="10" name="Rectangle: Rounded Corners 9">
-            <a:extLst>
-              <a:ext uri="{FF2B5EF4-FFF2-40B4-BE49-F238E27FC236}">
-                <a16:creationId xmlns:a16="http://schemas.microsoft.com/office/drawing/2014/main" id="{217BCEF3-EC97-4B41-A892-3BCA445353F2}"/>
-              </a:ext>
-            </a:extLst>
-          </p:cNvPr>
-          <p:cNvSpPr>
-            <a:spLocks noGrp="1"/>
-          </p:cNvSpPr>
-          <p:nvPr/>
-        </p:nvSpPr>
-        <p:spPr>
-          <a:xfrm>
-            <a:off x="4572000" y="2238375"/>
-            <a:ext cx="3143250" cy="2238375"/>
-          </a:xfrm>
-          <a:prstGeom prst="roundRect">
-            <a:avLst>
-              <a:gd name="adj" fmla="val 5106"/>
-            </a:avLst>
-          </a:prstGeom>
-          <a:solidFill>
-            <a:srgbClr val="2C83A5"/>
-          </a:solidFill>
-          <a:ln w="19050">
-            <a:solidFill>
-              <a:srgbClr val="1F617B"/>
-            </a:solidFill>
-            <a:prstDash val="solid"/>
-          </a:ln>
-        </p:spPr>
-        <p:txBody>
-          <a:bodyPr anchor="ctr"/>
-          <a:lstStyle>
-            <a:defPPr algn="ctr">
-              <a:defRPr sz="1650" b="1">
-                <a:solidFill>
-                  <a:srgbClr val="FFFFFF"/>
-                </a:solidFill>
-              </a:defRPr>
-            </a:defPPr>
-          </a:lstStyle>
-          <a:p>
-            <a:pPr algn="ctr">
-              <a:defRPr sz="1650" b="1">
-                <a:solidFill>
-                  <a:srgbClr val="FFFFFF"/>
-                </a:solidFill>
-              </a:defRPr>
-            </a:pPr>
-            <a:r>
-              <a:rPr sz="1650" b="1">
-                <a:solidFill>
-                  <a:srgbClr val="FFFFFF"/>
-                </a:solidFill>
-              </a:rPr>
-              <a:t>DNS Server</a:t>
-            </a:r>
-          </a:p>
-          <a:p>
-            <a:endParaRPr sz="1650" b="1">
-              <a:solidFill>
-                <a:srgbClr val="FFFFFF"/>
-              </a:solidFill>
-            </a:endParaRPr>
-          </a:p>
-          <a:p>
-            <a:pPr algn="ctr">
-              <a:defRPr sz="1650" b="1">
-                <a:solidFill>
-                  <a:srgbClr val="FFFFFF"/>
-                </a:solidFill>
-              </a:defRPr>
-            </a:pPr>
-            <a:r>
-              <a:rPr sz="1650" b="1">
-                <a:solidFill>
-                  <a:srgbClr val="FFFFFF"/>
-                </a:solidFill>
-              </a:rPr>
-              <a:t>Βρίσκει την αντιστοιχία:</a:t>
-            </a:r>
-          </a:p>
-          <a:p>
-            <a:pPr algn="ctr">
-              <a:defRPr sz="1650" b="1">
-                <a:solidFill>
-                  <a:srgbClr val="FFFFFF"/>
-                </a:solidFill>
-              </a:defRPr>
-            </a:pPr>
-            <a:r>
-              <a:rPr sz="1650" b="1">
-                <a:solidFill>
-                  <a:srgbClr val="FFFFFF"/>
-                </a:solidFill>
-              </a:rPr>
-              <a:t>www.example.com</a:t>
-            </a:r>
-          </a:p>
-          <a:p>
-            <a:pPr algn="ctr">
-              <a:defRPr sz="1650" b="1">
-                <a:solidFill>
-                  <a:srgbClr val="FFFFFF"/>
-                </a:solidFill>
-              </a:defRPr>
-            </a:pPr>
-            <a:r>
-              <a:rPr sz="1650" b="1">
-                <a:solidFill>
-                  <a:srgbClr val="FFFFFF"/>
-                </a:solidFill>
-              </a:rPr>
-              <a:t>93.184.216.34</a:t>
-            </a:r>
-          </a:p>
-        </p:txBody>
-      </p:sp>
-      <p:sp>
-        <p:nvSpPr>
-          <p:cNvPr id="11" name="Rectangle: Rounded Corners 10">
-            <a:extLst>
-              <a:ext uri="{FF2B5EF4-FFF2-40B4-BE49-F238E27FC236}">
-                <a16:creationId xmlns:a16="http://schemas.microsoft.com/office/drawing/2014/main" id="{EB029D57-69A8-4971-B835-37DA3295BD67}"/>
-              </a:ext>
-            </a:extLst>
-          </p:cNvPr>
-          <p:cNvSpPr>
-            <a:spLocks noGrp="1"/>
-          </p:cNvSpPr>
-          <p:nvPr/>
-        </p:nvSpPr>
-        <p:spPr>
-          <a:xfrm>
-            <a:off x="8810625" y="2524125"/>
-            <a:ext cx="2095500" cy="1666875"/>
-          </a:xfrm>
-          <a:prstGeom prst="roundRect">
-            <a:avLst>
-              <a:gd name="adj" fmla="val 6857"/>
-            </a:avLst>
-          </a:prstGeom>
-          <a:solidFill>
-            <a:srgbClr val="E6F4EA"/>
-          </a:solidFill>
-          <a:ln w="19050">
-            <a:solidFill>
-              <a:srgbClr val="4C9B63"/>
-            </a:solidFill>
-            <a:prstDash val="solid"/>
-          </a:ln>
-        </p:spPr>
-        <p:txBody>
-          <a:bodyPr anchor="ctr"/>
-          <a:lstStyle>
-            <a:defPPr algn="ctr">
-              <a:defRPr sz="1725" b="1">
-                <a:solidFill>
-                  <a:srgbClr val="26733D"/>
-                </a:solidFill>
-              </a:defRPr>
-            </a:defPPr>
-          </a:lstStyle>
-          <a:p>
-            <a:pPr algn="ctr">
-              <a:defRPr sz="1725" b="1">
-                <a:solidFill>
-                  <a:srgbClr val="26733D"/>
-                </a:solidFill>
-              </a:defRPr>
-            </a:pPr>
-            <a:r>
-              <a:rPr sz="1725" b="1">
-                <a:solidFill>
-                  <a:srgbClr val="26733D"/>
-                </a:solidFill>
-              </a:rPr>
-              <a:t>Web Server</a:t>
-            </a:r>
-          </a:p>
-          <a:p>
-            <a:endParaRPr sz="1725" b="1">
-              <a:solidFill>
-                <a:srgbClr val="26733D"/>
-              </a:solidFill>
-            </a:endParaRPr>
-          </a:p>
-          <a:p>
-            <a:pPr algn="ctr">
-              <a:defRPr sz="1725" b="1">
-                <a:solidFill>
-                  <a:srgbClr val="26733D"/>
-                </a:solidFill>
-              </a:defRPr>
-            </a:pPr>
-            <a:r>
-              <a:rPr sz="1725" b="1">
-                <a:solidFill>
-                  <a:srgbClr val="26733D"/>
-                </a:solidFill>
-              </a:rPr>
-              <a:t>93.184.216.34</a:t>
-            </a:r>
-          </a:p>
-        </p:txBody>
-      </p:sp>
-      <p:sp>
-        <p:nvSpPr>
-          <p:cNvPr id="12" name="Rectangle 11">
-            <a:extLst>
-              <a:ext uri="{FF2B5EF4-FFF2-40B4-BE49-F238E27FC236}">
-                <a16:creationId xmlns:a16="http://schemas.microsoft.com/office/drawing/2014/main" id="{E912AA52-8F12-4894-B309-6B12C5318276}"/>
-              </a:ext>
-            </a:extLst>
-          </p:cNvPr>
-          <p:cNvSpPr>
-            <a:spLocks noGrp="1"/>
-          </p:cNvSpPr>
-          <p:nvPr/>
-        </p:nvSpPr>
-        <p:spPr>
-          <a:xfrm>
-            <a:off x="3209925" y="2571750"/>
-            <a:ext cx="1381125" cy="590550"/>
-          </a:xfrm>
-          <a:prstGeom prst="rect">
-            <a:avLst/>
-          </a:prstGeom>
-          <a:noFill/>
-          <a:ln w="0">
-            <a:noFill/>
-          </a:ln>
-        </p:spPr>
-        <p:txBody>
-          <a:bodyPr anchor="ctr"/>
-          <a:lstStyle>
-            <a:defPPr algn="ctr">
-              <a:defRPr sz="1350" b="1">
-                <a:solidFill>
-                  <a:srgbClr val="23566A"/>
-                </a:solidFill>
-              </a:defRPr>
-            </a:defPPr>
-          </a:lstStyle>
-          <a:p>
-            <a:pPr algn="ctr">
-              <a:defRPr sz="1350" b="1">
-                <a:solidFill>
-                  <a:srgbClr val="23566A"/>
-                </a:solidFill>
-              </a:defRPr>
-            </a:pPr>
-            <a:r>
-              <a:rPr sz="1350" b="1">
-                <a:solidFill>
-                  <a:srgbClr val="23566A"/>
-                </a:solidFill>
-              </a:rPr>
-              <a:t>1. Ποια είναι η IP;  →</a:t>
-            </a:r>
-          </a:p>
-        </p:txBody>
-      </p:sp>
-      <p:sp>
-        <p:nvSpPr>
-          <p:cNvPr id="13" name="Rectangle 12">
-            <a:extLst>
-              <a:ext uri="{FF2B5EF4-FFF2-40B4-BE49-F238E27FC236}">
-                <a16:creationId xmlns:a16="http://schemas.microsoft.com/office/drawing/2014/main" id="{2A327259-ED6A-4E90-8B3A-0EB6E9DFFDE7}"/>
-              </a:ext>
-            </a:extLst>
-          </p:cNvPr>
-          <p:cNvSpPr>
-            <a:spLocks noGrp="1"/>
-          </p:cNvSpPr>
-          <p:nvPr/>
-        </p:nvSpPr>
-        <p:spPr>
-          <a:xfrm>
-            <a:off x="3209925" y="3381375"/>
-            <a:ext cx="1381125" cy="723900"/>
-          </a:xfrm>
-          <a:prstGeom prst="rect">
-            <a:avLst/>
-          </a:prstGeom>
-          <a:noFill/>
-          <a:ln w="0">
-            <a:noFill/>
-          </a:ln>
-        </p:spPr>
-        <p:txBody>
-          <a:bodyPr anchor="ctr"/>
-          <a:lstStyle>
-            <a:defPPr algn="ctr">
-              <a:defRPr sz="1275" b="1">
-                <a:solidFill>
-                  <a:srgbClr val="23566A"/>
-                </a:solidFill>
-              </a:defRPr>
-            </a:defPPr>
-          </a:lstStyle>
-          <a:p>
-            <a:pPr algn="ctr">
-              <a:defRPr sz="1275" b="1">
-                <a:solidFill>
-                  <a:srgbClr val="23566A"/>
-                </a:solidFill>
-              </a:defRPr>
-            </a:pPr>
-            <a:r>
-              <a:rPr sz="1275" b="1">
-                <a:solidFill>
-                  <a:srgbClr val="23566A"/>
-                </a:solidFill>
-              </a:rPr>
-              <a:t>←  2. Η IP είναι</a:t>
-            </a:r>
-          </a:p>
-          <a:p>
-            <a:pPr algn="ctr">
-              <a:defRPr sz="1275" b="1">
-                <a:solidFill>
-                  <a:srgbClr val="23566A"/>
-                </a:solidFill>
-              </a:defRPr>
-            </a:pPr>
-            <a:r>
-              <a:rPr sz="1275" b="1">
-                <a:solidFill>
-                  <a:srgbClr val="23566A"/>
-                </a:solidFill>
-              </a:rPr>
-              <a:t>93.184.216.34</a:t>
-            </a:r>
-          </a:p>
-        </p:txBody>
-      </p:sp>
-      <p:sp>
-        <p:nvSpPr>
-          <p:cNvPr id="14" name="Rectangle 13">
-            <a:extLst>
-              <a:ext uri="{FF2B5EF4-FFF2-40B4-BE49-F238E27FC236}">
-                <a16:creationId xmlns:a16="http://schemas.microsoft.com/office/drawing/2014/main" id="{F449FEEA-82BA-478F-BAC7-BBAD6E094570}"/>
-              </a:ext>
-            </a:extLst>
-          </p:cNvPr>
-          <p:cNvSpPr>
-            <a:spLocks noGrp="1"/>
-          </p:cNvSpPr>
-          <p:nvPr/>
-        </p:nvSpPr>
-        <p:spPr>
-          <a:xfrm>
-            <a:off x="7686675" y="2905125"/>
-            <a:ext cx="1143000" cy="838200"/>
-          </a:xfrm>
-          <a:prstGeom prst="rect">
-            <a:avLst/>
-          </a:prstGeom>
-          <a:noFill/>
-          <a:ln w="0">
-            <a:noFill/>
-          </a:ln>
-        </p:spPr>
-        <p:txBody>
-          <a:bodyPr anchor="ctr"/>
-          <a:lstStyle>
-            <a:defPPr algn="ctr">
-              <a:defRPr sz="1350" b="1">
-                <a:solidFill>
-                  <a:srgbClr val="26733D"/>
-                </a:solidFill>
-              </a:defRPr>
-            </a:defPPr>
-          </a:lstStyle>
-          <a:p>
-            <a:pPr algn="ctr">
-              <a:defRPr sz="1350" b="1">
-                <a:solidFill>
-                  <a:srgbClr val="26733D"/>
-                </a:solidFill>
-              </a:defRPr>
-            </a:pPr>
-            <a:r>
-              <a:rPr sz="1350" b="1">
-                <a:solidFill>
-                  <a:srgbClr val="26733D"/>
-                </a:solidFill>
-              </a:rPr>
-              <a:t>3. Σύνδεση</a:t>
-            </a:r>
-          </a:p>
-          <a:p>
-            <a:pPr algn="ctr">
-              <a:defRPr sz="1350" b="1">
-                <a:solidFill>
-                  <a:srgbClr val="26733D"/>
-                </a:solidFill>
-              </a:defRPr>
-            </a:pPr>
-            <a:r>
-              <a:rPr sz="1350" b="1">
-                <a:solidFill>
-                  <a:srgbClr val="26733D"/>
-                </a:solidFill>
-              </a:rPr>
-              <a:t>με την IP  →</a:t>
-            </a:r>
-          </a:p>
-        </p:txBody>
-      </p:sp>
-      <p:sp>
-        <p:nvSpPr>
-          <p:cNvPr id="15" name="Rectangle: Rounded Corners 14">
-            <a:extLst>
-              <a:ext uri="{FF2B5EF4-FFF2-40B4-BE49-F238E27FC236}">
-                <a16:creationId xmlns:a16="http://schemas.microsoft.com/office/drawing/2014/main" id="{D3CC7A9D-C4D2-4443-BD81-98D4436B6E60}"/>
-              </a:ext>
-            </a:extLst>
-          </p:cNvPr>
-          <p:cNvSpPr>
-            <a:spLocks noGrp="1"/>
-          </p:cNvSpPr>
-          <p:nvPr/>
-        </p:nvSpPr>
-        <p:spPr>
-          <a:xfrm>
-            <a:off x="781050" y="4953000"/>
-            <a:ext cx="10125075" cy="1000125"/>
-          </a:xfrm>
-          <a:prstGeom prst="roundRect">
-            <a:avLst>
-              <a:gd name="adj" fmla="val 9524"/>
-            </a:avLst>
-          </a:prstGeom>
-          <a:solidFill>
-            <a:srgbClr val="F3F4F6"/>
-          </a:solidFill>
-          <a:ln w="11906">
-            <a:solidFill>
-              <a:srgbClr val="B7DDEB"/>
-            </a:solidFill>
-            <a:prstDash val="solid"/>
-          </a:ln>
-        </p:spPr>
-        <p:txBody>
-          <a:bodyPr anchor="ctr"/>
-          <a:lstStyle>
-            <a:defPPr algn="ctr">
-              <a:defRPr sz="1650" b="1">
-                <a:solidFill>
-                  <a:srgbClr val="333333"/>
-                </a:solidFill>
-              </a:defRPr>
-            </a:defPPr>
-          </a:lstStyle>
-          <a:p>
-            <a:pPr algn="ctr">
-              <a:defRPr sz="1650" b="1">
-                <a:solidFill>
-                  <a:srgbClr val="333333"/>
-                </a:solidFill>
-              </a:defRPr>
-            </a:pPr>
-            <a:r>
-              <a:rPr sz="1650" b="1">
-                <a:solidFill>
-                  <a:srgbClr val="333333"/>
-                </a:solidFill>
-              </a:rPr>
-              <a:t>Απλοποιημένο παράδειγμα</a:t>
-            </a:r>
-          </a:p>
-          <a:p>
-            <a:pPr algn="ctr">
-              <a:defRPr sz="1650" b="1">
-                <a:solidFill>
-                  <a:srgbClr val="333333"/>
-                </a:solidFill>
-              </a:defRPr>
-            </a:pPr>
-            <a:r>
-              <a:rPr sz="1650" b="1">
-                <a:solidFill>
-                  <a:srgbClr val="333333"/>
-                </a:solidFill>
-              </a:rPr>
-              <a:t>Χωρίς DNS, ο χρήστης θα έπρεπε να θυμάται την IP Address κάθε ιστοσελίδας.</a:t>
-            </a:r>
-          </a:p>
-        </p:txBody>
-      </p:sp>
+        </p:spPr>
+      </p:pic>
+      <p:graphicFrame>
+        <p:nvGraphicFramePr>
+          <p:cNvPr id="4" name="Table 3">
+            <a:extLst>
+              <a:ext uri="{FF2B5EF4-FFF2-40B4-BE49-F238E27FC236}">
+                <a16:creationId xmlns:a16="http://schemas.microsoft.com/office/drawing/2014/main" id="{3BFF0AB0-FAC4-7E9F-5452-8E2822BA1360}"/>
+              </a:ext>
+            </a:extLst>
+          </p:cNvPr>
+          <p:cNvGraphicFramePr>
+            <a:graphicFrameLocks noGrp="1"/>
+          </p:cNvGraphicFramePr>
+          <p:nvPr>
+            <p:extLst>
+              <p:ext uri="{D42A27DB-BD31-4B8C-83A1-F6EECF244321}">
+                <p14:modId xmlns:p14="http://schemas.microsoft.com/office/powerpoint/2010/main" val="1040146450"/>
+              </p:ext>
+            </p:extLst>
+          </p:nvPr>
+        </p:nvGraphicFramePr>
+        <p:xfrm>
+          <a:off x="203200" y="6631305"/>
+          <a:ext cx="4152900" cy="182245"/>
+        </p:xfrm>
+        <a:graphic>
+          <a:graphicData uri="http://schemas.openxmlformats.org/drawingml/2006/table">
+            <a:tbl>
+              <a:tblPr>
+                <a:tableStyleId>{5C22544A-7EE6-4342-B048-85BDC9FD1C3A}</a:tableStyleId>
+              </a:tblPr>
+              <a:tblGrid>
+                <a:gridCol w="4152900">
+                  <a:extLst>
+                    <a:ext uri="{9D8B030D-6E8A-4147-A177-3AD203B41FA5}">
+                      <a16:colId xmlns:a16="http://schemas.microsoft.com/office/drawing/2014/main" val="558221169"/>
+                    </a:ext>
+                  </a:extLst>
+                </a:gridCol>
+              </a:tblGrid>
+              <a:tr h="182245">
+                <a:tc>
+                  <a:txBody>
+                    <a:bodyPr/>
+                    <a:lstStyle/>
+                    <a:p>
+                      <a:pPr algn="l" fontAlgn="b">
+                        <a:buNone/>
+                      </a:pPr>
+                      <a:r>
+                        <a:rPr lang="en-GB" sz="1100" u="none" strike="noStrike" dirty="0">
+                          <a:effectLst/>
+                        </a:rPr>
+                        <a:t>https://www.youtube.com/shorts/5ZCvW1XSX_E</a:t>
+                      </a:r>
+                      <a:endParaRPr lang="en-GB" sz="1100" b="0" i="0" u="none" strike="noStrike" dirty="0">
+                        <a:solidFill>
+                          <a:srgbClr val="000000"/>
+                        </a:solidFill>
+                        <a:effectLst/>
+                        <a:latin typeface="Calibri" panose="020F0502020204030204" pitchFamily="34" charset="0"/>
+                      </a:endParaRPr>
+                    </a:p>
+                  </a:txBody>
+                  <a:tcPr marL="0" marR="0" marT="0" marB="0" anchor="b"/>
+                </a:tc>
+                <a:extLst>
+                  <a:ext uri="{0D108BD9-81ED-4DB2-BD59-A6C34878D82A}">
+                    <a16:rowId xmlns:a16="http://schemas.microsoft.com/office/drawing/2014/main" val="1957299169"/>
+                  </a:ext>
+                </a:extLst>
+              </a:tr>
+            </a:tbl>
+          </a:graphicData>
+        </a:graphic>
+      </p:graphicFrame>
     </p:spTree>
     <p:extLst>
       <p:ext uri="{BB962C8B-B14F-4D97-AF65-F5344CB8AC3E}">
-        <p14:creationId xmlns:p14="http://schemas.microsoft.com/office/powerpoint/2010/main" val="2191906609"/>
+        <p14:creationId xmlns:p14="http://schemas.microsoft.com/office/powerpoint/2010/main" val="1831915996"/>
       </p:ext>
     </p:extLst>
   </p:cSld>
   <p:clrMapOvr>
     <a:masterClrMapping/>
   </p:clrMapOvr>
+  <p:timing>
+    <p:tnLst>
+      <p:par>
+        <p:cTn id="1" dur="indefinite" restart="never" nodeType="tmRoot">
+          <p:childTnLst>
+            <p:seq concurrent="1" nextAc="seek">
+              <p:cTn id="2" dur="indefinite" nodeType="mainSeq">
+                <p:childTnLst>
+                  <p:par>
+                    <p:cTn id="3" fill="hold">
+                      <p:stCondLst>
+                        <p:cond delay="indefinite"/>
+                      </p:stCondLst>
+                      <p:childTnLst>
+                        <p:par>
+                          <p:cTn id="4" fill="hold">
+                            <p:stCondLst>
+                              <p:cond delay="0"/>
+                            </p:stCondLst>
+                            <p:childTnLst>
+                              <p:par>
+                                <p:cTn id="5" presetID="1" presetClass="mediacall" presetSubtype="0" fill="hold" nodeType="clickEffect">
+                                  <p:stCondLst>
+                                    <p:cond delay="0"/>
+                                  </p:stCondLst>
+                                  <p:childTnLst>
+                                    <p:cmd type="call" cmd="playFrom(0.0)">
+                                      <p:cBhvr>
+                                        <p:cTn id="6" dur="1" fill="hold"/>
+                                        <p:tgtEl>
+                                          <p:spTgt spid="3"/>
+                                        </p:tgtEl>
+                                      </p:cBhvr>
+                                    </p:cmd>
+                                  </p:childTnLst>
+                                </p:cTn>
+                              </p:par>
+                            </p:childTnLst>
+                          </p:cTn>
+                        </p:par>
+                      </p:childTnLst>
+                    </p:cTn>
+                  </p:par>
+                </p:childTnLst>
+              </p:cTn>
+              <p:prevCondLst>
+                <p:cond evt="onPrev" delay="0">
+                  <p:tgtEl>
+                    <p:sldTgt/>
+                  </p:tgtEl>
+                </p:cond>
+              </p:prevCondLst>
+              <p:nextCondLst>
+                <p:cond evt="onNext" delay="0">
+                  <p:tgtEl>
+                    <p:sldTgt/>
+                  </p:tgtEl>
+                </p:cond>
+              </p:nextCondLst>
+            </p:seq>
+            <p:video>
+              <p:cMediaNode vol="80000">
+                <p:cTn id="7" fill="hold" display="0">
+                  <p:stCondLst>
+                    <p:cond delay="indefinite"/>
+                  </p:stCondLst>
+                </p:cTn>
+                <p:tgtEl>
+                  <p:spTgt spid="3"/>
+                </p:tgtEl>
+              </p:cMediaNode>
+            </p:video>
+            <p:seq concurrent="1" nextAc="seek">
+              <p:cTn id="8" restart="whenNotActive" fill="hold" evtFilter="cancelBubble" nodeType="interactiveSeq">
+                <p:stCondLst>
+                  <p:cond evt="onClick" delay="0">
+                    <p:tgtEl>
+                      <p:spTgt spid="3"/>
+                    </p:tgtEl>
+                  </p:cond>
+                </p:stCondLst>
+                <p:endSync evt="end" delay="0">
+                  <p:rtn val="all"/>
+                </p:endSync>
+                <p:childTnLst>
+                  <p:par>
+                    <p:cTn id="9" fill="hold">
+                      <p:stCondLst>
+                        <p:cond delay="0"/>
+                      </p:stCondLst>
+                      <p:childTnLst>
+                        <p:par>
+                          <p:cTn id="10" fill="hold">
+                            <p:stCondLst>
+                              <p:cond delay="0"/>
+                            </p:stCondLst>
+                            <p:childTnLst>
+                              <p:par>
+                                <p:cTn id="11" presetID="2" presetClass="mediacall" presetSubtype="0" fill="hold" nodeType="clickEffect">
+                                  <p:stCondLst>
+                                    <p:cond delay="0"/>
+                                  </p:stCondLst>
+                                  <p:childTnLst>
+                                    <p:cmd type="call" cmd="togglePause">
+                                      <p:cBhvr>
+                                        <p:cTn id="12" dur="1" fill="hold"/>
+                                        <p:tgtEl>
+                                          <p:spTgt spid="3"/>
+                                        </p:tgtEl>
+                                      </p:cBhvr>
+                                    </p:cmd>
+                                  </p:childTnLst>
+                                </p:cTn>
+                              </p:par>
+                            </p:childTnLst>
+                          </p:cTn>
+                        </p:par>
+                      </p:childTnLst>
+                    </p:cTn>
+                  </p:par>
+                </p:childTnLst>
+              </p:cTn>
+              <p:nextCondLst>
+                <p:cond evt="onClick" delay="0">
+                  <p:tgtEl>
+                    <p:spTgt spid="3"/>
+                  </p:tgtEl>
+                </p:cond>
+              </p:nextCondLst>
+            </p:seq>
+          </p:childTnLst>
+        </p:cTn>
+      </p:par>
+    </p:tnLst>
+  </p:timing>
 </p:sld>
 </file>
 
@@ -11732,8 +12090,8 @@
         </p:nvSpPr>
         <p:spPr>
           <a:xfrm>
-            <a:off x="677332" y="609600"/>
-            <a:ext cx="5825735" cy="1320800"/>
+            <a:off x="677323" y="609600"/>
+            <a:ext cx="5905500" cy="762000"/>
           </a:xfrm>
         </p:spPr>
         <p:txBody>
@@ -11743,61 +12101,30 @@
           <a:lstStyle/>
           <a:p>
             <a:r>
-              <a:t>Εντολές ελέγχου</a:t>
-            </a:r>
-          </a:p>
-        </p:txBody>
-      </p:sp>
-      <p:sp>
-        <p:nvSpPr>
-          <p:cNvPr id="4" name="Content Placeholder 2">
-            <a:extLst>
-              <a:ext uri="{FF2B5EF4-FFF2-40B4-BE49-F238E27FC236}">
-                <a16:creationId xmlns:a16="http://schemas.microsoft.com/office/drawing/2014/main" id="{EB3F7303-CEA4-CFC4-5052-5C4AC627408E}"/>
-              </a:ext>
-            </a:extLst>
-          </p:cNvPr>
-          <p:cNvSpPr>
-            <a:spLocks noGrp="1"/>
-          </p:cNvSpPr>
-          <p:nvPr>
-            <p:ph idx="1"/>
-          </p:nvPr>
+              <a:rPr dirty="0"/>
+              <a:t>DNS Server</a:t>
+            </a:r>
+          </a:p>
+        </p:txBody>
+      </p:sp>
+      <p:sp>
+        <p:nvSpPr>
+          <p:cNvPr id="7" name="Clean content 3">
+            <a:extLst>
+              <a:ext uri="{FF2B5EF4-FFF2-40B4-BE49-F238E27FC236}">
+                <a16:creationId xmlns:a16="http://schemas.microsoft.com/office/drawing/2014/main" id="{67CB5BBD-28F4-4BB4-B66B-2ADB50A53ABD}"/>
+              </a:ext>
+            </a:extLst>
+          </p:cNvPr>
+          <p:cNvSpPr>
+            <a:spLocks noGrp="1"/>
+          </p:cNvSpPr>
+          <p:nvPr/>
         </p:nvSpPr>
         <p:spPr>
           <a:xfrm>
-            <a:off x="677333" y="1563757"/>
-            <a:ext cx="5952067" cy="4477604"/>
-          </a:xfrm>
-        </p:spPr>
-        <p:txBody>
-          <a:bodyPr>
-            <a:normAutofit/>
-          </a:bodyPr>
-          <a:lstStyle/>
-          <a:p>
-            <a:endParaRPr sz="2800"/>
-          </a:p>
-        </p:txBody>
-      </p:sp>
-      <p:sp>
-        <p:nvSpPr>
-          <p:cNvPr id="5" name="Clean content area">
-            <a:extLst>
-              <a:ext uri="{FF2B5EF4-FFF2-40B4-BE49-F238E27FC236}">
-                <a16:creationId xmlns:a16="http://schemas.microsoft.com/office/drawing/2014/main" id="{1ADE6AB2-31D4-43F8-8CB3-B978A6B51094}"/>
-              </a:ext>
-            </a:extLst>
-          </p:cNvPr>
-          <p:cNvSpPr>
-            <a:spLocks noGrp="1"/>
-          </p:cNvSpPr>
-          <p:nvPr/>
-        </p:nvSpPr>
-        <p:spPr>
-          <a:xfrm>
-            <a:off x="590550" y="1352550"/>
-            <a:ext cx="11049000" cy="5000625"/>
+            <a:off x="619125" y="1381125"/>
+            <a:ext cx="11001375" cy="4953000"/>
           </a:xfrm>
           <a:prstGeom prst="rect">
             <a:avLst/>
@@ -11813,16 +12140,16 @@
           <a:bodyPr/>
           <a:lstStyle/>
           <a:p>
-            <a:endParaRPr lang="en-GB" dirty="0"/>
-          </a:p>
-        </p:txBody>
-      </p:sp>
-      <p:sp>
-        <p:nvSpPr>
-          <p:cNvPr id="6" name="Section reference">
-            <a:extLst>
-              <a:ext uri="{FF2B5EF4-FFF2-40B4-BE49-F238E27FC236}">
-                <a16:creationId xmlns:a16="http://schemas.microsoft.com/office/drawing/2014/main" id="{4A6DC372-EF3F-4BD2-A334-2CA08BBFF7D0}"/>
+            <a:endParaRPr lang="en-US"/>
+          </a:p>
+        </p:txBody>
+      </p:sp>
+      <p:sp>
+        <p:nvSpPr>
+          <p:cNvPr id="8" name="Rectangle 7">
+            <a:extLst>
+              <a:ext uri="{FF2B5EF4-FFF2-40B4-BE49-F238E27FC236}">
+                <a16:creationId xmlns:a16="http://schemas.microsoft.com/office/drawing/2014/main" id="{712089EB-B18F-4A43-846E-6987B5F12BC3}"/>
               </a:ext>
             </a:extLst>
           </p:cNvPr>
@@ -11833,8 +12160,8 @@
         </p:nvSpPr>
         <p:spPr>
           <a:xfrm>
-            <a:off x="781050" y="1466850"/>
-            <a:ext cx="4953000" cy="266700"/>
+            <a:off x="781050" y="1485900"/>
+            <a:ext cx="10287000" cy="552450"/>
           </a:xfrm>
           <a:prstGeom prst="rect">
             <a:avLst/>
@@ -11845,41 +12172,41 @@
           </a:ln>
         </p:spPr>
         <p:txBody>
-          <a:bodyPr>
-            <a:noAutofit/>
-          </a:bodyPr>
-          <a:lstStyle/>
-          <a:p>
-            <a:pPr>
-              <a:defRPr sz="1275" b="1">
-                <a:solidFill>
-                  <a:srgbClr val="168EAD"/>
-                </a:solidFill>
-                <a:latin typeface="Trebuchet MS"/>
-                <a:ea typeface="Trebuchet MS"/>
-                <a:cs typeface="Trebuchet MS"/>
+          <a:bodyPr anchor="t"/>
+          <a:lstStyle>
+            <a:defPPr algn="l">
+              <a:defRPr sz="1800" b="0">
+                <a:solidFill>
+                  <a:srgbClr val="333333"/>
+                </a:solidFill>
+              </a:defRPr>
+            </a:defPPr>
+          </a:lstStyle>
+          <a:p>
+            <a:pPr algn="l">
+              <a:defRPr sz="1800" b="0">
+                <a:solidFill>
+                  <a:srgbClr val="333333"/>
+                </a:solidFill>
               </a:defRPr>
             </a:pPr>
             <a:r>
-              <a:rPr sz="1275" b="1">
-                <a:solidFill>
-                  <a:srgbClr val="168EAD"/>
-                </a:solidFill>
-                <a:latin typeface="Trebuchet MS"/>
-                <a:ea typeface="Trebuchet MS"/>
-                <a:cs typeface="Trebuchet MS"/>
+              <a:rPr sz="1800" b="0">
+                <a:solidFill>
+                  <a:srgbClr val="333333"/>
+                </a:solidFill>
               </a:rPr>
-              <a:t>A.5.M2 | Θεωρία</a:t>
-            </a:r>
-          </a:p>
-        </p:txBody>
-      </p:sp>
-      <p:sp>
-        <p:nvSpPr>
-          <p:cNvPr id="7" name="Block heading 1">
-            <a:extLst>
-              <a:ext uri="{FF2B5EF4-FFF2-40B4-BE49-F238E27FC236}">
-                <a16:creationId xmlns:a16="http://schemas.microsoft.com/office/drawing/2014/main" id="{7C771E72-8C57-4BD4-A907-9EB09DBD5ECD}"/>
+              <a:t>Ο DNS Server αντιστοιχίζει το όνομα μιας ιστοσελίδας με τη διεύθυνση IP του server της.</a:t>
+            </a:r>
+          </a:p>
+        </p:txBody>
+      </p:sp>
+      <p:sp>
+        <p:nvSpPr>
+          <p:cNvPr id="9" name="Rectangle: Rounded Corners 8">
+            <a:extLst>
+              <a:ext uri="{FF2B5EF4-FFF2-40B4-BE49-F238E27FC236}">
+                <a16:creationId xmlns:a16="http://schemas.microsoft.com/office/drawing/2014/main" id="{CF338F2D-351D-464A-AF6D-5EC183339EEA}"/>
               </a:ext>
             </a:extLst>
           </p:cNvPr>
@@ -11890,8 +12217,306 @@
         </p:nvSpPr>
         <p:spPr>
           <a:xfrm>
-            <a:off x="781050" y="1857375"/>
-            <a:ext cx="4762500" cy="285750"/>
+            <a:off x="781050" y="2524125"/>
+            <a:ext cx="2428875" cy="1666875"/>
+          </a:xfrm>
+          <a:prstGeom prst="roundRect">
+            <a:avLst>
+              <a:gd name="adj" fmla="val 6857"/>
+            </a:avLst>
+          </a:prstGeom>
+          <a:solidFill>
+            <a:srgbClr val="E8F7FC"/>
+          </a:solidFill>
+          <a:ln w="19050">
+            <a:solidFill>
+              <a:srgbClr val="5FCBEF"/>
+            </a:solidFill>
+            <a:prstDash val="solid"/>
+          </a:ln>
+        </p:spPr>
+        <p:txBody>
+          <a:bodyPr anchor="ctr"/>
+          <a:lstStyle>
+            <a:defPPr algn="ctr">
+              <a:defRPr sz="1800" b="1">
+                <a:solidFill>
+                  <a:srgbClr val="23566A"/>
+                </a:solidFill>
+              </a:defRPr>
+            </a:defPPr>
+          </a:lstStyle>
+          <a:p>
+            <a:pPr algn="ctr">
+              <a:defRPr sz="1800" b="1">
+                <a:solidFill>
+                  <a:srgbClr val="23566A"/>
+                </a:solidFill>
+              </a:defRPr>
+            </a:pPr>
+            <a:r>
+              <a:rPr sz="1800" b="1">
+                <a:solidFill>
+                  <a:srgbClr val="23566A"/>
+                </a:solidFill>
+              </a:rPr>
+              <a:t>Υπολογιστής</a:t>
+            </a:r>
+          </a:p>
+          <a:p>
+            <a:endParaRPr sz="1800" b="1">
+              <a:solidFill>
+                <a:srgbClr val="23566A"/>
+              </a:solidFill>
+            </a:endParaRPr>
+          </a:p>
+          <a:p>
+            <a:pPr algn="ctr">
+              <a:defRPr sz="1800" b="1">
+                <a:solidFill>
+                  <a:srgbClr val="23566A"/>
+                </a:solidFill>
+              </a:defRPr>
+            </a:pPr>
+            <a:r>
+              <a:rPr sz="1800" b="1">
+                <a:solidFill>
+                  <a:srgbClr val="23566A"/>
+                </a:solidFill>
+              </a:rPr>
+              <a:t>www.example.com</a:t>
+            </a:r>
+          </a:p>
+        </p:txBody>
+      </p:sp>
+      <p:sp>
+        <p:nvSpPr>
+          <p:cNvPr id="10" name="Rectangle: Rounded Corners 9">
+            <a:extLst>
+              <a:ext uri="{FF2B5EF4-FFF2-40B4-BE49-F238E27FC236}">
+                <a16:creationId xmlns:a16="http://schemas.microsoft.com/office/drawing/2014/main" id="{217BCEF3-EC97-4B41-A892-3BCA445353F2}"/>
+              </a:ext>
+            </a:extLst>
+          </p:cNvPr>
+          <p:cNvSpPr>
+            <a:spLocks noGrp="1"/>
+          </p:cNvSpPr>
+          <p:nvPr/>
+        </p:nvSpPr>
+        <p:spPr>
+          <a:xfrm>
+            <a:off x="4572000" y="2238375"/>
+            <a:ext cx="3143250" cy="2238375"/>
+          </a:xfrm>
+          <a:prstGeom prst="roundRect">
+            <a:avLst>
+              <a:gd name="adj" fmla="val 5106"/>
+            </a:avLst>
+          </a:prstGeom>
+          <a:solidFill>
+            <a:srgbClr val="2C83A5"/>
+          </a:solidFill>
+          <a:ln w="19050">
+            <a:solidFill>
+              <a:srgbClr val="1F617B"/>
+            </a:solidFill>
+            <a:prstDash val="solid"/>
+          </a:ln>
+        </p:spPr>
+        <p:txBody>
+          <a:bodyPr anchor="ctr"/>
+          <a:lstStyle>
+            <a:defPPr algn="ctr">
+              <a:defRPr sz="1650" b="1">
+                <a:solidFill>
+                  <a:srgbClr val="FFFFFF"/>
+                </a:solidFill>
+              </a:defRPr>
+            </a:defPPr>
+          </a:lstStyle>
+          <a:p>
+            <a:pPr algn="ctr">
+              <a:defRPr sz="1650" b="1">
+                <a:solidFill>
+                  <a:srgbClr val="FFFFFF"/>
+                </a:solidFill>
+              </a:defRPr>
+            </a:pPr>
+            <a:r>
+              <a:rPr sz="1650" b="1">
+                <a:solidFill>
+                  <a:srgbClr val="FFFFFF"/>
+                </a:solidFill>
+              </a:rPr>
+              <a:t>DNS Server</a:t>
+            </a:r>
+          </a:p>
+          <a:p>
+            <a:endParaRPr sz="1650" b="1">
+              <a:solidFill>
+                <a:srgbClr val="FFFFFF"/>
+              </a:solidFill>
+            </a:endParaRPr>
+          </a:p>
+          <a:p>
+            <a:pPr algn="ctr">
+              <a:defRPr sz="1650" b="1">
+                <a:solidFill>
+                  <a:srgbClr val="FFFFFF"/>
+                </a:solidFill>
+              </a:defRPr>
+            </a:pPr>
+            <a:r>
+              <a:rPr sz="1650" b="1">
+                <a:solidFill>
+                  <a:srgbClr val="FFFFFF"/>
+                </a:solidFill>
+              </a:rPr>
+              <a:t>Βρίσκει την αντιστοιχία:</a:t>
+            </a:r>
+          </a:p>
+          <a:p>
+            <a:pPr algn="ctr">
+              <a:defRPr sz="1650" b="1">
+                <a:solidFill>
+                  <a:srgbClr val="FFFFFF"/>
+                </a:solidFill>
+              </a:defRPr>
+            </a:pPr>
+            <a:r>
+              <a:rPr sz="1650" b="1">
+                <a:solidFill>
+                  <a:srgbClr val="FFFFFF"/>
+                </a:solidFill>
+              </a:rPr>
+              <a:t>www.example.com</a:t>
+            </a:r>
+          </a:p>
+          <a:p>
+            <a:pPr algn="ctr">
+              <a:defRPr sz="1650" b="1">
+                <a:solidFill>
+                  <a:srgbClr val="FFFFFF"/>
+                </a:solidFill>
+              </a:defRPr>
+            </a:pPr>
+            <a:r>
+              <a:rPr sz="1650" b="1">
+                <a:solidFill>
+                  <a:srgbClr val="FFFFFF"/>
+                </a:solidFill>
+              </a:rPr>
+              <a:t>93.184.216.34</a:t>
+            </a:r>
+          </a:p>
+        </p:txBody>
+      </p:sp>
+      <p:sp>
+        <p:nvSpPr>
+          <p:cNvPr id="11" name="Rectangle: Rounded Corners 10">
+            <a:extLst>
+              <a:ext uri="{FF2B5EF4-FFF2-40B4-BE49-F238E27FC236}">
+                <a16:creationId xmlns:a16="http://schemas.microsoft.com/office/drawing/2014/main" id="{EB029D57-69A8-4971-B835-37DA3295BD67}"/>
+              </a:ext>
+            </a:extLst>
+          </p:cNvPr>
+          <p:cNvSpPr>
+            <a:spLocks noGrp="1"/>
+          </p:cNvSpPr>
+          <p:nvPr/>
+        </p:nvSpPr>
+        <p:spPr>
+          <a:xfrm>
+            <a:off x="8810625" y="2524125"/>
+            <a:ext cx="2095500" cy="1666875"/>
+          </a:xfrm>
+          <a:prstGeom prst="roundRect">
+            <a:avLst>
+              <a:gd name="adj" fmla="val 6857"/>
+            </a:avLst>
+          </a:prstGeom>
+          <a:solidFill>
+            <a:srgbClr val="E6F4EA"/>
+          </a:solidFill>
+          <a:ln w="19050">
+            <a:solidFill>
+              <a:srgbClr val="4C9B63"/>
+            </a:solidFill>
+            <a:prstDash val="solid"/>
+          </a:ln>
+        </p:spPr>
+        <p:txBody>
+          <a:bodyPr anchor="ctr"/>
+          <a:lstStyle>
+            <a:defPPr algn="ctr">
+              <a:defRPr sz="1725" b="1">
+                <a:solidFill>
+                  <a:srgbClr val="26733D"/>
+                </a:solidFill>
+              </a:defRPr>
+            </a:defPPr>
+          </a:lstStyle>
+          <a:p>
+            <a:pPr algn="ctr">
+              <a:defRPr sz="1725" b="1">
+                <a:solidFill>
+                  <a:srgbClr val="26733D"/>
+                </a:solidFill>
+              </a:defRPr>
+            </a:pPr>
+            <a:r>
+              <a:rPr sz="1725" b="1">
+                <a:solidFill>
+                  <a:srgbClr val="26733D"/>
+                </a:solidFill>
+              </a:rPr>
+              <a:t>Web Server</a:t>
+            </a:r>
+          </a:p>
+          <a:p>
+            <a:endParaRPr sz="1725" b="1">
+              <a:solidFill>
+                <a:srgbClr val="26733D"/>
+              </a:solidFill>
+            </a:endParaRPr>
+          </a:p>
+          <a:p>
+            <a:pPr algn="ctr">
+              <a:defRPr sz="1725" b="1">
+                <a:solidFill>
+                  <a:srgbClr val="26733D"/>
+                </a:solidFill>
+              </a:defRPr>
+            </a:pPr>
+            <a:r>
+              <a:rPr sz="1725" b="1">
+                <a:solidFill>
+                  <a:srgbClr val="26733D"/>
+                </a:solidFill>
+              </a:rPr>
+              <a:t>93.184.216.34</a:t>
+            </a:r>
+          </a:p>
+        </p:txBody>
+      </p:sp>
+      <p:sp>
+        <p:nvSpPr>
+          <p:cNvPr id="12" name="Rectangle 11">
+            <a:extLst>
+              <a:ext uri="{FF2B5EF4-FFF2-40B4-BE49-F238E27FC236}">
+                <a16:creationId xmlns:a16="http://schemas.microsoft.com/office/drawing/2014/main" id="{E912AA52-8F12-4894-B309-6B12C5318276}"/>
+              </a:ext>
+            </a:extLst>
+          </p:cNvPr>
+          <p:cNvSpPr>
+            <a:spLocks noGrp="1"/>
+          </p:cNvSpPr>
+          <p:nvPr/>
+        </p:nvSpPr>
+        <p:spPr>
+          <a:xfrm>
+            <a:off x="3209925" y="2571750"/>
+            <a:ext cx="1381125" cy="590550"/>
           </a:xfrm>
           <a:prstGeom prst="rect">
             <a:avLst/>
@@ -11902,41 +12527,41 @@
           </a:ln>
         </p:spPr>
         <p:txBody>
-          <a:bodyPr>
-            <a:noAutofit/>
-          </a:bodyPr>
-          <a:lstStyle/>
-          <a:p>
-            <a:pPr>
-              <a:defRPr sz="1575" b="1">
-                <a:solidFill>
-                  <a:srgbClr val="18A7CC"/>
-                </a:solidFill>
-                <a:latin typeface="Trebuchet MS"/>
-                <a:ea typeface="Trebuchet MS"/>
-                <a:cs typeface="Trebuchet MS"/>
+          <a:bodyPr anchor="ctr"/>
+          <a:lstStyle>
+            <a:defPPr algn="ctr">
+              <a:defRPr sz="1350" b="1">
+                <a:solidFill>
+                  <a:srgbClr val="23566A"/>
+                </a:solidFill>
+              </a:defRPr>
+            </a:defPPr>
+          </a:lstStyle>
+          <a:p>
+            <a:pPr algn="ctr">
+              <a:defRPr sz="1350" b="1">
+                <a:solidFill>
+                  <a:srgbClr val="23566A"/>
+                </a:solidFill>
               </a:defRPr>
             </a:pPr>
             <a:r>
-              <a:rPr sz="1575" b="1">
-                <a:solidFill>
-                  <a:srgbClr val="18A7CC"/>
-                </a:solidFill>
-                <a:latin typeface="Trebuchet MS"/>
-                <a:ea typeface="Trebuchet MS"/>
-                <a:cs typeface="Trebuchet MS"/>
+              <a:rPr sz="1350" b="1">
+                <a:solidFill>
+                  <a:srgbClr val="23566A"/>
+                </a:solidFill>
               </a:rPr>
-              <a:t>ipconfig</a:t>
-            </a:r>
-          </a:p>
-        </p:txBody>
-      </p:sp>
-      <p:sp>
-        <p:nvSpPr>
-          <p:cNvPr id="8" name="Block body 1">
-            <a:extLst>
-              <a:ext uri="{FF2B5EF4-FFF2-40B4-BE49-F238E27FC236}">
-                <a16:creationId xmlns:a16="http://schemas.microsoft.com/office/drawing/2014/main" id="{F6C81DD3-BB36-4F23-87B3-BA04996FEDA9}"/>
+              <a:t>1. Ποια είναι η IP;  →</a:t>
+            </a:r>
+          </a:p>
+        </p:txBody>
+      </p:sp>
+      <p:sp>
+        <p:nvSpPr>
+          <p:cNvPr id="13" name="Rectangle 12">
+            <a:extLst>
+              <a:ext uri="{FF2B5EF4-FFF2-40B4-BE49-F238E27FC236}">
+                <a16:creationId xmlns:a16="http://schemas.microsoft.com/office/drawing/2014/main" id="{2A327259-ED6A-4E90-8B3A-0EB6E9DFFDE7}"/>
               </a:ext>
             </a:extLst>
           </p:cNvPr>
@@ -11947,8 +12572,8 @@
         </p:nvSpPr>
         <p:spPr>
           <a:xfrm>
-            <a:off x="781050" y="2171700"/>
-            <a:ext cx="4762500" cy="647700"/>
+            <a:off x="3209925" y="3381375"/>
+            <a:ext cx="1381125" cy="723900"/>
           </a:xfrm>
           <a:prstGeom prst="rect">
             <a:avLst/>
@@ -11959,52 +12584,58 @@
           </a:ln>
         </p:spPr>
         <p:txBody>
-          <a:bodyPr>
-            <a:noAutofit/>
-          </a:bodyPr>
-          <a:lstStyle/>
-          <a:p>
-            <a:pPr>
-              <a:defRPr sz="1650" b="0">
-                <a:solidFill>
-                  <a:srgbClr val="333333"/>
-                </a:solidFill>
-                <a:latin typeface="Trebuchet MS"/>
-                <a:ea typeface="Trebuchet MS"/>
-                <a:cs typeface="Trebuchet MS"/>
+          <a:bodyPr anchor="ctr"/>
+          <a:lstStyle>
+            <a:defPPr algn="ctr">
+              <a:defRPr sz="1275" b="1">
+                <a:solidFill>
+                  <a:srgbClr val="23566A"/>
+                </a:solidFill>
+              </a:defRPr>
+            </a:defPPr>
+          </a:lstStyle>
+          <a:p>
+            <a:pPr algn="ctr">
+              <a:defRPr sz="1275" b="1">
+                <a:solidFill>
+                  <a:srgbClr val="23566A"/>
+                </a:solidFill>
               </a:defRPr>
             </a:pPr>
             <a:r>
-              <a:rPr sz="1650" b="0" dirty="0" err="1">
-                <a:solidFill>
-                  <a:srgbClr val="333333"/>
-                </a:solidFill>
-                <a:latin typeface="Trebuchet MS"/>
-                <a:ea typeface="Trebuchet MS"/>
-                <a:cs typeface="Trebuchet MS"/>
+              <a:rPr sz="1275" b="1">
+                <a:solidFill>
+                  <a:srgbClr val="23566A"/>
+                </a:solidFill>
               </a:rPr>
-              <a:t>Εμφ</a:t>
-            </a:r>
-            <a:r>
-              <a:rPr sz="1650" b="0" dirty="0">
-                <a:solidFill>
-                  <a:srgbClr val="333333"/>
-                </a:solidFill>
-                <a:latin typeface="Trebuchet MS"/>
-                <a:ea typeface="Trebuchet MS"/>
-                <a:cs typeface="Trebuchet MS"/>
+              <a:t>←  2. Η IP είναι</a:t>
+            </a:r>
+          </a:p>
+          <a:p>
+            <a:pPr algn="ctr">
+              <a:defRPr sz="1275" b="1">
+                <a:solidFill>
+                  <a:srgbClr val="23566A"/>
+                </a:solidFill>
+              </a:defRPr>
+            </a:pPr>
+            <a:r>
+              <a:rPr sz="1275" b="1">
+                <a:solidFill>
+                  <a:srgbClr val="23566A"/>
+                </a:solidFill>
               </a:rPr>
-              <a:t>ανίζει IP Address, Subnet Mask και Default Gateway.</a:t>
-            </a:r>
-          </a:p>
-        </p:txBody>
-      </p:sp>
-      <p:sp>
-        <p:nvSpPr>
-          <p:cNvPr id="9" name="Block heading 2">
-            <a:extLst>
-              <a:ext uri="{FF2B5EF4-FFF2-40B4-BE49-F238E27FC236}">
-                <a16:creationId xmlns:a16="http://schemas.microsoft.com/office/drawing/2014/main" id="{56CDC298-5F75-4F10-AEA0-2EE2E608B715}"/>
+              <a:t>93.184.216.34</a:t>
+            </a:r>
+          </a:p>
+        </p:txBody>
+      </p:sp>
+      <p:sp>
+        <p:nvSpPr>
+          <p:cNvPr id="14" name="Rectangle 13">
+            <a:extLst>
+              <a:ext uri="{FF2B5EF4-FFF2-40B4-BE49-F238E27FC236}">
+                <a16:creationId xmlns:a16="http://schemas.microsoft.com/office/drawing/2014/main" id="{F449FEEA-82BA-478F-BAC7-BBAD6E094570}"/>
               </a:ext>
             </a:extLst>
           </p:cNvPr>
@@ -12015,8 +12646,8 @@
         </p:nvSpPr>
         <p:spPr>
           <a:xfrm>
-            <a:off x="781050" y="2857500"/>
-            <a:ext cx="4762500" cy="285750"/>
+            <a:off x="7686675" y="2905125"/>
+            <a:ext cx="1143000" cy="838200"/>
           </a:xfrm>
           <a:prstGeom prst="rect">
             <a:avLst/>
@@ -12027,384 +12658,137 @@
           </a:ln>
         </p:spPr>
         <p:txBody>
-          <a:bodyPr>
-            <a:noAutofit/>
-          </a:bodyPr>
-          <a:lstStyle/>
-          <a:p>
-            <a:pPr>
-              <a:defRPr sz="1575" b="1">
-                <a:solidFill>
-                  <a:srgbClr val="18A7CC"/>
-                </a:solidFill>
-                <a:latin typeface="Trebuchet MS"/>
-                <a:ea typeface="Trebuchet MS"/>
-                <a:cs typeface="Trebuchet MS"/>
+          <a:bodyPr anchor="ctr"/>
+          <a:lstStyle>
+            <a:defPPr algn="ctr">
+              <a:defRPr sz="1350" b="1">
+                <a:solidFill>
+                  <a:srgbClr val="26733D"/>
+                </a:solidFill>
+              </a:defRPr>
+            </a:defPPr>
+          </a:lstStyle>
+          <a:p>
+            <a:pPr algn="ctr">
+              <a:defRPr sz="1350" b="1">
+                <a:solidFill>
+                  <a:srgbClr val="26733D"/>
+                </a:solidFill>
               </a:defRPr>
             </a:pPr>
             <a:r>
-              <a:rPr lang="en-US" sz="1575" b="1" dirty="0" err="1">
-                <a:solidFill>
-                  <a:srgbClr val="18A7CC"/>
-                </a:solidFill>
-                <a:latin typeface="Trebuchet MS"/>
-                <a:ea typeface="Trebuchet MS"/>
-                <a:cs typeface="Trebuchet MS"/>
+              <a:rPr sz="1350" b="1">
+                <a:solidFill>
+                  <a:srgbClr val="26733D"/>
+                </a:solidFill>
               </a:rPr>
-              <a:t>nslookup</a:t>
-            </a:r>
-            <a:endParaRPr sz="1575" b="1" dirty="0">
-              <a:solidFill>
-                <a:srgbClr val="18A7CC"/>
-              </a:solidFill>
-              <a:latin typeface="Trebuchet MS"/>
-              <a:ea typeface="Trebuchet MS"/>
-              <a:cs typeface="Trebuchet MS"/>
-            </a:endParaRPr>
-          </a:p>
-        </p:txBody>
-      </p:sp>
-      <p:sp>
-        <p:nvSpPr>
-          <p:cNvPr id="10" name="Block body 2">
-            <a:extLst>
-              <a:ext uri="{FF2B5EF4-FFF2-40B4-BE49-F238E27FC236}">
-                <a16:creationId xmlns:a16="http://schemas.microsoft.com/office/drawing/2014/main" id="{73831D10-FA81-4630-80A2-DF54065724DA}"/>
-              </a:ext>
-            </a:extLst>
-          </p:cNvPr>
-          <p:cNvSpPr>
-            <a:spLocks noGrp="1"/>
-          </p:cNvSpPr>
-          <p:nvPr/>
-        </p:nvSpPr>
-        <p:spPr>
-          <a:xfrm>
-            <a:off x="781050" y="3171825"/>
-            <a:ext cx="4762500" cy="647700"/>
-          </a:xfrm>
-          <a:prstGeom prst="rect">
-            <a:avLst/>
-          </a:prstGeom>
-          <a:noFill/>
-          <a:ln w="0">
-            <a:noFill/>
-          </a:ln>
-        </p:spPr>
-        <p:txBody>
-          <a:bodyPr>
-            <a:noAutofit/>
-          </a:bodyPr>
-          <a:lstStyle/>
-          <a:p>
-            <a:pPr>
-              <a:defRPr sz="1650" b="0">
-                <a:solidFill>
-                  <a:srgbClr val="333333"/>
-                </a:solidFill>
-                <a:latin typeface="Trebuchet MS"/>
-                <a:ea typeface="Trebuchet MS"/>
-                <a:cs typeface="Trebuchet MS"/>
+              <a:t>3. Σύνδεση</a:t>
+            </a:r>
+          </a:p>
+          <a:p>
+            <a:pPr algn="ctr">
+              <a:defRPr sz="1350" b="1">
+                <a:solidFill>
+                  <a:srgbClr val="26733D"/>
+                </a:solidFill>
               </a:defRPr>
             </a:pPr>
             <a:r>
-              <a:rPr lang="el-GR" sz="1650" dirty="0">
+              <a:rPr sz="1350" b="1">
+                <a:solidFill>
+                  <a:srgbClr val="26733D"/>
+                </a:solidFill>
+              </a:rPr>
+              <a:t>με την IP  →</a:t>
+            </a:r>
+          </a:p>
+        </p:txBody>
+      </p:sp>
+      <p:sp>
+        <p:nvSpPr>
+          <p:cNvPr id="15" name="Rectangle: Rounded Corners 14">
+            <a:extLst>
+              <a:ext uri="{FF2B5EF4-FFF2-40B4-BE49-F238E27FC236}">
+                <a16:creationId xmlns:a16="http://schemas.microsoft.com/office/drawing/2014/main" id="{D3CC7A9D-C4D2-4443-BD81-98D4436B6E60}"/>
+              </a:ext>
+            </a:extLst>
+          </p:cNvPr>
+          <p:cNvSpPr>
+            <a:spLocks noGrp="1"/>
+          </p:cNvSpPr>
+          <p:nvPr/>
+        </p:nvSpPr>
+        <p:spPr>
+          <a:xfrm>
+            <a:off x="781050" y="4953000"/>
+            <a:ext cx="10125075" cy="1000125"/>
+          </a:xfrm>
+          <a:prstGeom prst="roundRect">
+            <a:avLst>
+              <a:gd name="adj" fmla="val 9524"/>
+            </a:avLst>
+          </a:prstGeom>
+          <a:solidFill>
+            <a:srgbClr val="F3F4F6"/>
+          </a:solidFill>
+          <a:ln w="11906">
+            <a:solidFill>
+              <a:srgbClr val="B7DDEB"/>
+            </a:solidFill>
+            <a:prstDash val="solid"/>
+          </a:ln>
+        </p:spPr>
+        <p:txBody>
+          <a:bodyPr anchor="ctr"/>
+          <a:lstStyle>
+            <a:defPPr algn="ctr">
+              <a:defRPr sz="1650" b="1">
                 <a:solidFill>
                   <a:srgbClr val="333333"/>
                 </a:solidFill>
-                <a:latin typeface="Trebuchet MS"/>
-                <a:ea typeface="Trebuchet MS"/>
-                <a:cs typeface="Trebuchet MS"/>
-              </a:rPr>
-              <a:t>Ελέγχει τις ρυθμίσεις</a:t>
-            </a:r>
-            <a:r>
-              <a:rPr sz="1650" b="0" dirty="0">
+              </a:defRPr>
+            </a:defPPr>
+          </a:lstStyle>
+          <a:p>
+            <a:pPr algn="ctr">
+              <a:defRPr sz="1650" b="1">
                 <a:solidFill>
                   <a:srgbClr val="333333"/>
                 </a:solidFill>
-                <a:latin typeface="Trebuchet MS"/>
-                <a:ea typeface="Trebuchet MS"/>
-                <a:cs typeface="Trebuchet MS"/>
-              </a:rPr>
-              <a:t> DNS </a:t>
-            </a:r>
-            <a:r>
-              <a:rPr lang="el-GR" sz="1650" dirty="0">
-                <a:solidFill>
-                  <a:srgbClr val="333333"/>
-                </a:solidFill>
-                <a:latin typeface="Trebuchet MS"/>
-                <a:ea typeface="Trebuchet MS"/>
-                <a:cs typeface="Trebuchet MS"/>
-              </a:rPr>
-              <a:t>στον υπολογιστή μας</a:t>
-            </a:r>
-            <a:endParaRPr sz="1650" b="0" dirty="0">
-              <a:solidFill>
-                <a:srgbClr val="333333"/>
-              </a:solidFill>
-              <a:latin typeface="Trebuchet MS"/>
-              <a:ea typeface="Trebuchet MS"/>
-              <a:cs typeface="Trebuchet MS"/>
-            </a:endParaRPr>
-          </a:p>
-        </p:txBody>
-      </p:sp>
-      <p:sp>
-        <p:nvSpPr>
-          <p:cNvPr id="11" name="Block heading 3">
-            <a:extLst>
-              <a:ext uri="{FF2B5EF4-FFF2-40B4-BE49-F238E27FC236}">
-                <a16:creationId xmlns:a16="http://schemas.microsoft.com/office/drawing/2014/main" id="{FAD8B63B-9463-4F1E-9E70-0E1A7E576AB6}"/>
-              </a:ext>
-            </a:extLst>
-          </p:cNvPr>
-          <p:cNvSpPr>
-            <a:spLocks noGrp="1"/>
-          </p:cNvSpPr>
-          <p:nvPr/>
-        </p:nvSpPr>
-        <p:spPr>
-          <a:xfrm>
-            <a:off x="781050" y="3857625"/>
-            <a:ext cx="4762500" cy="285750"/>
-          </a:xfrm>
-          <a:prstGeom prst="rect">
-            <a:avLst/>
-          </a:prstGeom>
-          <a:noFill/>
-          <a:ln w="0">
-            <a:noFill/>
-          </a:ln>
-        </p:spPr>
-        <p:txBody>
-          <a:bodyPr>
-            <a:noAutofit/>
-          </a:bodyPr>
-          <a:lstStyle/>
-          <a:p>
-            <a:pPr>
-              <a:defRPr sz="1575" b="1">
-                <a:solidFill>
-                  <a:srgbClr val="18A7CC"/>
-                </a:solidFill>
-                <a:latin typeface="Trebuchet MS"/>
-                <a:ea typeface="Trebuchet MS"/>
-                <a:cs typeface="Trebuchet MS"/>
               </a:defRPr>
             </a:pPr>
             <a:r>
-              <a:rPr sz="1575" b="1">
-                <a:solidFill>
-                  <a:srgbClr val="18A7CC"/>
-                </a:solidFill>
-                <a:latin typeface="Trebuchet MS"/>
-                <a:ea typeface="Trebuchet MS"/>
-                <a:cs typeface="Trebuchet MS"/>
+              <a:rPr sz="1650" b="1">
+                <a:solidFill>
+                  <a:srgbClr val="333333"/>
+                </a:solidFill>
               </a:rPr>
-              <a:t>ping</a:t>
-            </a:r>
-          </a:p>
-        </p:txBody>
-      </p:sp>
-      <p:sp>
-        <p:nvSpPr>
-          <p:cNvPr id="12" name="Block body 3">
-            <a:extLst>
-              <a:ext uri="{FF2B5EF4-FFF2-40B4-BE49-F238E27FC236}">
-                <a16:creationId xmlns:a16="http://schemas.microsoft.com/office/drawing/2014/main" id="{B97222AA-170A-45DB-8311-5BF958D4B3D9}"/>
-              </a:ext>
-            </a:extLst>
-          </p:cNvPr>
-          <p:cNvSpPr>
-            <a:spLocks noGrp="1"/>
-          </p:cNvSpPr>
-          <p:nvPr/>
-        </p:nvSpPr>
-        <p:spPr>
-          <a:xfrm>
-            <a:off x="781050" y="4171950"/>
-            <a:ext cx="4762500" cy="647700"/>
-          </a:xfrm>
-          <a:prstGeom prst="rect">
-            <a:avLst/>
-          </a:prstGeom>
-          <a:noFill/>
-          <a:ln w="0">
-            <a:noFill/>
-          </a:ln>
-        </p:spPr>
-        <p:txBody>
-          <a:bodyPr>
-            <a:noAutofit/>
-          </a:bodyPr>
-          <a:lstStyle/>
-          <a:p>
-            <a:pPr>
-              <a:defRPr sz="1650" b="0">
+              <a:t>Απλοποιημένο παράδειγμα</a:t>
+            </a:r>
+          </a:p>
+          <a:p>
+            <a:pPr algn="ctr">
+              <a:defRPr sz="1650" b="1">
                 <a:solidFill>
                   <a:srgbClr val="333333"/>
                 </a:solidFill>
-                <a:latin typeface="Trebuchet MS"/>
-                <a:ea typeface="Trebuchet MS"/>
-                <a:cs typeface="Trebuchet MS"/>
               </a:defRPr>
             </a:pPr>
             <a:r>
-              <a:rPr sz="1650" b="0">
+              <a:rPr sz="1650" b="1">
                 <a:solidFill>
                   <a:srgbClr val="333333"/>
                 </a:solidFill>
-                <a:latin typeface="Trebuchet MS"/>
-                <a:ea typeface="Trebuchet MS"/>
-                <a:cs typeface="Trebuchet MS"/>
               </a:rPr>
-              <a:t>Ελέγχει αν ένας προορισμός απαντά μέσω του δικτύου.</a:t>
-            </a:r>
-          </a:p>
-        </p:txBody>
-      </p:sp>
-      <p:sp>
-        <p:nvSpPr>
-          <p:cNvPr id="13" name="Block heading 4">
-            <a:extLst>
-              <a:ext uri="{FF2B5EF4-FFF2-40B4-BE49-F238E27FC236}">
-                <a16:creationId xmlns:a16="http://schemas.microsoft.com/office/drawing/2014/main" id="{9B3DBC8C-A3A1-405D-ACE9-6FA8B6D5955A}"/>
-              </a:ext>
-            </a:extLst>
-          </p:cNvPr>
-          <p:cNvSpPr>
-            <a:spLocks noGrp="1"/>
-          </p:cNvSpPr>
-          <p:nvPr/>
-        </p:nvSpPr>
-        <p:spPr>
-          <a:xfrm>
-            <a:off x="781050" y="4857750"/>
-            <a:ext cx="4762500" cy="285750"/>
-          </a:xfrm>
-          <a:prstGeom prst="rect">
-            <a:avLst/>
-          </a:prstGeom>
-          <a:noFill/>
-          <a:ln w="0">
-            <a:noFill/>
-          </a:ln>
-        </p:spPr>
-        <p:txBody>
-          <a:bodyPr>
-            <a:noAutofit/>
-          </a:bodyPr>
-          <a:lstStyle/>
-          <a:p>
-            <a:pPr>
-              <a:defRPr sz="1575" b="1">
-                <a:solidFill>
-                  <a:srgbClr val="18A7CC"/>
-                </a:solidFill>
-                <a:latin typeface="Trebuchet MS"/>
-                <a:ea typeface="Trebuchet MS"/>
-                <a:cs typeface="Trebuchet MS"/>
-              </a:defRPr>
-            </a:pPr>
-            <a:r>
-              <a:rPr sz="1575" b="1">
-                <a:solidFill>
-                  <a:srgbClr val="18A7CC"/>
-                </a:solidFill>
-                <a:latin typeface="Trebuchet MS"/>
-                <a:ea typeface="Trebuchet MS"/>
-                <a:cs typeface="Trebuchet MS"/>
-              </a:rPr>
-              <a:t>tracert</a:t>
-            </a:r>
-          </a:p>
-        </p:txBody>
-      </p:sp>
-      <p:sp>
-        <p:nvSpPr>
-          <p:cNvPr id="14" name="Block body 4">
-            <a:extLst>
-              <a:ext uri="{FF2B5EF4-FFF2-40B4-BE49-F238E27FC236}">
-                <a16:creationId xmlns:a16="http://schemas.microsoft.com/office/drawing/2014/main" id="{CC22DC93-68B1-49EA-AB54-1E943502D4F4}"/>
-              </a:ext>
-            </a:extLst>
-          </p:cNvPr>
-          <p:cNvSpPr>
-            <a:spLocks noGrp="1"/>
-          </p:cNvSpPr>
-          <p:nvPr/>
-        </p:nvSpPr>
-        <p:spPr>
-          <a:xfrm>
-            <a:off x="781050" y="5172075"/>
-            <a:ext cx="4762500" cy="647700"/>
-          </a:xfrm>
-          <a:prstGeom prst="rect">
-            <a:avLst/>
-          </a:prstGeom>
-          <a:noFill/>
-          <a:ln w="0">
-            <a:noFill/>
-          </a:ln>
-        </p:spPr>
-        <p:txBody>
-          <a:bodyPr>
-            <a:noAutofit/>
-          </a:bodyPr>
-          <a:lstStyle/>
-          <a:p>
-            <a:pPr>
-              <a:defRPr sz="1650" b="0">
-                <a:solidFill>
-                  <a:srgbClr val="333333"/>
-                </a:solidFill>
-                <a:latin typeface="Trebuchet MS"/>
-                <a:ea typeface="Trebuchet MS"/>
-                <a:cs typeface="Trebuchet MS"/>
-              </a:defRPr>
-            </a:pPr>
-            <a:r>
-              <a:rPr sz="1650" b="0">
-                <a:solidFill>
-                  <a:srgbClr val="333333"/>
-                </a:solidFill>
-                <a:latin typeface="Trebuchet MS"/>
-                <a:ea typeface="Trebuchet MS"/>
-                <a:cs typeface="Trebuchet MS"/>
-              </a:rPr>
-              <a:t>Παρουσιάζει τους ενδιάμεσους routers μέχρι τον προορισμό.</a:t>
-            </a:r>
-          </a:p>
-        </p:txBody>
-      </p:sp>
-      <p:pic>
-        <p:nvPicPr>
-          <p:cNvPr id="28" name="Picture 27"/>
-          <p:cNvPicPr>
-            <a:picLocks noChangeAspect="1"/>
-          </p:cNvPicPr>
-          <p:nvPr/>
-        </p:nvPicPr>
-        <p:blipFill>
-          <a:blip r:embed="rId3"/>
-          <a:stretch/>
-        </p:blipFill>
-        <p:spPr>
-          <a:xfrm>
-            <a:off x="5953125" y="2488192"/>
-            <a:ext cx="4905375" cy="2643615"/>
-          </a:xfrm>
-          <a:prstGeom prst="rect">
-            <a:avLst/>
-          </a:prstGeom>
-        </p:spPr>
-      </p:pic>
+              <a:t>Χωρίς DNS, ο χρήστης θα έπρεπε να θυμάται την IP Address κάθε ιστοσελίδας.</a:t>
+            </a:r>
+          </a:p>
+        </p:txBody>
+      </p:sp>
     </p:spTree>
     <p:extLst>
       <p:ext uri="{BB962C8B-B14F-4D97-AF65-F5344CB8AC3E}">
-        <p14:creationId xmlns:p14="http://schemas.microsoft.com/office/powerpoint/2010/main" val="643881412"/>
+        <p14:creationId xmlns:p14="http://schemas.microsoft.com/office/powerpoint/2010/main" val="2191906609"/>
       </p:ext>
     </p:extLst>
   </p:cSld>
@@ -12436,6 +12820,888 @@
           <p:cNvPr id="2" name="Title 1">
             <a:extLst>
               <a:ext uri="{FF2B5EF4-FFF2-40B4-BE49-F238E27FC236}">
+                <a16:creationId xmlns:a16="http://schemas.microsoft.com/office/drawing/2014/main" id="{760CC5F6-A8B2-464D-A77D-97CB05567F67}"/>
+              </a:ext>
+            </a:extLst>
+          </p:cNvPr>
+          <p:cNvSpPr>
+            <a:spLocks noGrp="1"/>
+          </p:cNvSpPr>
+          <p:nvPr>
+            <p:ph type="title"/>
+          </p:nvPr>
+        </p:nvSpPr>
+        <p:spPr>
+          <a:xfrm>
+            <a:off x="677332" y="609600"/>
+            <a:ext cx="5825735" cy="1320800"/>
+          </a:xfrm>
+        </p:spPr>
+        <p:txBody>
+          <a:bodyPr vert="horz" lIns="91440" tIns="45720" rIns="91440" bIns="45720" anchor="t">
+            <a:normAutofit/>
+          </a:bodyPr>
+          <a:lstStyle/>
+          <a:p>
+            <a:r>
+              <a:t>Εντολές ελέγχου</a:t>
+            </a:r>
+          </a:p>
+        </p:txBody>
+      </p:sp>
+      <p:sp>
+        <p:nvSpPr>
+          <p:cNvPr id="4" name="Content Placeholder 2">
+            <a:extLst>
+              <a:ext uri="{FF2B5EF4-FFF2-40B4-BE49-F238E27FC236}">
+                <a16:creationId xmlns:a16="http://schemas.microsoft.com/office/drawing/2014/main" id="{EB3F7303-CEA4-CFC4-5052-5C4AC627408E}"/>
+              </a:ext>
+            </a:extLst>
+          </p:cNvPr>
+          <p:cNvSpPr>
+            <a:spLocks noGrp="1"/>
+          </p:cNvSpPr>
+          <p:nvPr>
+            <p:ph idx="1"/>
+          </p:nvPr>
+        </p:nvSpPr>
+        <p:spPr>
+          <a:xfrm>
+            <a:off x="677333" y="1563757"/>
+            <a:ext cx="5952067" cy="4477604"/>
+          </a:xfrm>
+        </p:spPr>
+        <p:txBody>
+          <a:bodyPr>
+            <a:normAutofit/>
+          </a:bodyPr>
+          <a:lstStyle/>
+          <a:p>
+            <a:endParaRPr sz="2800"/>
+          </a:p>
+        </p:txBody>
+      </p:sp>
+      <p:sp>
+        <p:nvSpPr>
+          <p:cNvPr id="5" name="Clean content area">
+            <a:extLst>
+              <a:ext uri="{FF2B5EF4-FFF2-40B4-BE49-F238E27FC236}">
+                <a16:creationId xmlns:a16="http://schemas.microsoft.com/office/drawing/2014/main" id="{1ADE6AB2-31D4-43F8-8CB3-B978A6B51094}"/>
+              </a:ext>
+            </a:extLst>
+          </p:cNvPr>
+          <p:cNvSpPr>
+            <a:spLocks noGrp="1"/>
+          </p:cNvSpPr>
+          <p:nvPr/>
+        </p:nvSpPr>
+        <p:spPr>
+          <a:xfrm>
+            <a:off x="571500" y="1247775"/>
+            <a:ext cx="11049000" cy="5000625"/>
+          </a:xfrm>
+          <a:prstGeom prst="rect">
+            <a:avLst/>
+          </a:prstGeom>
+          <a:solidFill>
+            <a:srgbClr val="FFFFFF"/>
+          </a:solidFill>
+          <a:ln w="0">
+            <a:noFill/>
+          </a:ln>
+        </p:spPr>
+        <p:txBody>
+          <a:bodyPr/>
+          <a:lstStyle/>
+          <a:p>
+            <a:endParaRPr lang="en-GB" dirty="0"/>
+          </a:p>
+        </p:txBody>
+      </p:sp>
+      <p:sp>
+        <p:nvSpPr>
+          <p:cNvPr id="6" name="Section reference">
+            <a:extLst>
+              <a:ext uri="{FF2B5EF4-FFF2-40B4-BE49-F238E27FC236}">
+                <a16:creationId xmlns:a16="http://schemas.microsoft.com/office/drawing/2014/main" id="{4A6DC372-EF3F-4BD2-A334-2CA08BBFF7D0}"/>
+              </a:ext>
+            </a:extLst>
+          </p:cNvPr>
+          <p:cNvSpPr>
+            <a:spLocks noGrp="1"/>
+          </p:cNvSpPr>
+          <p:nvPr/>
+        </p:nvSpPr>
+        <p:spPr>
+          <a:xfrm>
+            <a:off x="781050" y="1466850"/>
+            <a:ext cx="4953000" cy="266700"/>
+          </a:xfrm>
+          <a:prstGeom prst="rect">
+            <a:avLst/>
+          </a:prstGeom>
+          <a:noFill/>
+          <a:ln w="0">
+            <a:noFill/>
+          </a:ln>
+        </p:spPr>
+        <p:txBody>
+          <a:bodyPr>
+            <a:noAutofit/>
+          </a:bodyPr>
+          <a:lstStyle/>
+          <a:p>
+            <a:pPr>
+              <a:defRPr sz="1275" b="1">
+                <a:solidFill>
+                  <a:srgbClr val="168EAD"/>
+                </a:solidFill>
+                <a:latin typeface="Trebuchet MS"/>
+                <a:ea typeface="Trebuchet MS"/>
+                <a:cs typeface="Trebuchet MS"/>
+              </a:defRPr>
+            </a:pPr>
+            <a:r>
+              <a:rPr sz="1275" b="1">
+                <a:solidFill>
+                  <a:srgbClr val="168EAD"/>
+                </a:solidFill>
+                <a:latin typeface="Trebuchet MS"/>
+                <a:ea typeface="Trebuchet MS"/>
+                <a:cs typeface="Trebuchet MS"/>
+              </a:rPr>
+              <a:t>A.5.M2 | Θεωρία</a:t>
+            </a:r>
+          </a:p>
+        </p:txBody>
+      </p:sp>
+      <p:sp>
+        <p:nvSpPr>
+          <p:cNvPr id="7" name="Block heading 1">
+            <a:extLst>
+              <a:ext uri="{FF2B5EF4-FFF2-40B4-BE49-F238E27FC236}">
+                <a16:creationId xmlns:a16="http://schemas.microsoft.com/office/drawing/2014/main" id="{7C771E72-8C57-4BD4-A907-9EB09DBD5ECD}"/>
+              </a:ext>
+            </a:extLst>
+          </p:cNvPr>
+          <p:cNvSpPr>
+            <a:spLocks noGrp="1"/>
+          </p:cNvSpPr>
+          <p:nvPr/>
+        </p:nvSpPr>
+        <p:spPr>
+          <a:xfrm>
+            <a:off x="781050" y="1857375"/>
+            <a:ext cx="4762500" cy="285750"/>
+          </a:xfrm>
+          <a:prstGeom prst="rect">
+            <a:avLst/>
+          </a:prstGeom>
+          <a:noFill/>
+          <a:ln w="0">
+            <a:noFill/>
+          </a:ln>
+        </p:spPr>
+        <p:txBody>
+          <a:bodyPr>
+            <a:noAutofit/>
+          </a:bodyPr>
+          <a:lstStyle/>
+          <a:p>
+            <a:pPr>
+              <a:defRPr sz="1575" b="1">
+                <a:solidFill>
+                  <a:srgbClr val="18A7CC"/>
+                </a:solidFill>
+                <a:latin typeface="Trebuchet MS"/>
+                <a:ea typeface="Trebuchet MS"/>
+                <a:cs typeface="Trebuchet MS"/>
+              </a:defRPr>
+            </a:pPr>
+            <a:r>
+              <a:rPr sz="1575" b="1">
+                <a:solidFill>
+                  <a:srgbClr val="18A7CC"/>
+                </a:solidFill>
+                <a:latin typeface="Trebuchet MS"/>
+                <a:ea typeface="Trebuchet MS"/>
+                <a:cs typeface="Trebuchet MS"/>
+              </a:rPr>
+              <a:t>ipconfig</a:t>
+            </a:r>
+          </a:p>
+        </p:txBody>
+      </p:sp>
+      <p:sp>
+        <p:nvSpPr>
+          <p:cNvPr id="8" name="Block body 1">
+            <a:extLst>
+              <a:ext uri="{FF2B5EF4-FFF2-40B4-BE49-F238E27FC236}">
+                <a16:creationId xmlns:a16="http://schemas.microsoft.com/office/drawing/2014/main" id="{F6C81DD3-BB36-4F23-87B3-BA04996FEDA9}"/>
+              </a:ext>
+            </a:extLst>
+          </p:cNvPr>
+          <p:cNvSpPr>
+            <a:spLocks noGrp="1"/>
+          </p:cNvSpPr>
+          <p:nvPr/>
+        </p:nvSpPr>
+        <p:spPr>
+          <a:xfrm>
+            <a:off x="781050" y="2171700"/>
+            <a:ext cx="4762500" cy="647700"/>
+          </a:xfrm>
+          <a:prstGeom prst="rect">
+            <a:avLst/>
+          </a:prstGeom>
+          <a:noFill/>
+          <a:ln w="0">
+            <a:noFill/>
+          </a:ln>
+        </p:spPr>
+        <p:txBody>
+          <a:bodyPr>
+            <a:noAutofit/>
+          </a:bodyPr>
+          <a:lstStyle/>
+          <a:p>
+            <a:pPr>
+              <a:defRPr sz="1650" b="0">
+                <a:solidFill>
+                  <a:srgbClr val="333333"/>
+                </a:solidFill>
+                <a:latin typeface="Trebuchet MS"/>
+                <a:ea typeface="Trebuchet MS"/>
+                <a:cs typeface="Trebuchet MS"/>
+              </a:defRPr>
+            </a:pPr>
+            <a:r>
+              <a:rPr sz="1650" b="0" dirty="0" err="1">
+                <a:solidFill>
+                  <a:srgbClr val="333333"/>
+                </a:solidFill>
+                <a:latin typeface="Trebuchet MS"/>
+                <a:ea typeface="Trebuchet MS"/>
+                <a:cs typeface="Trebuchet MS"/>
+              </a:rPr>
+              <a:t>Εμφ</a:t>
+            </a:r>
+            <a:r>
+              <a:rPr sz="1650" b="0" dirty="0">
+                <a:solidFill>
+                  <a:srgbClr val="333333"/>
+                </a:solidFill>
+                <a:latin typeface="Trebuchet MS"/>
+                <a:ea typeface="Trebuchet MS"/>
+                <a:cs typeface="Trebuchet MS"/>
+              </a:rPr>
+              <a:t>ανίζει IP Address, Subnet Mask και Default Gateway.</a:t>
+            </a:r>
+          </a:p>
+        </p:txBody>
+      </p:sp>
+      <p:sp>
+        <p:nvSpPr>
+          <p:cNvPr id="9" name="Block heading 2">
+            <a:extLst>
+              <a:ext uri="{FF2B5EF4-FFF2-40B4-BE49-F238E27FC236}">
+                <a16:creationId xmlns:a16="http://schemas.microsoft.com/office/drawing/2014/main" id="{56CDC298-5F75-4F10-AEA0-2EE2E608B715}"/>
+              </a:ext>
+            </a:extLst>
+          </p:cNvPr>
+          <p:cNvSpPr>
+            <a:spLocks noGrp="1"/>
+          </p:cNvSpPr>
+          <p:nvPr/>
+        </p:nvSpPr>
+        <p:spPr>
+          <a:xfrm>
+            <a:off x="781050" y="2857500"/>
+            <a:ext cx="4762500" cy="285750"/>
+          </a:xfrm>
+          <a:prstGeom prst="rect">
+            <a:avLst/>
+          </a:prstGeom>
+          <a:noFill/>
+          <a:ln w="0">
+            <a:noFill/>
+          </a:ln>
+        </p:spPr>
+        <p:txBody>
+          <a:bodyPr>
+            <a:noAutofit/>
+          </a:bodyPr>
+          <a:lstStyle/>
+          <a:p>
+            <a:pPr>
+              <a:defRPr sz="1575" b="1">
+                <a:solidFill>
+                  <a:srgbClr val="18A7CC"/>
+                </a:solidFill>
+                <a:latin typeface="Trebuchet MS"/>
+                <a:ea typeface="Trebuchet MS"/>
+                <a:cs typeface="Trebuchet MS"/>
+              </a:defRPr>
+            </a:pPr>
+            <a:r>
+              <a:rPr lang="en-US" sz="1575" b="1" dirty="0" err="1">
+                <a:solidFill>
+                  <a:srgbClr val="18A7CC"/>
+                </a:solidFill>
+                <a:latin typeface="Trebuchet MS"/>
+                <a:ea typeface="Trebuchet MS"/>
+                <a:cs typeface="Trebuchet MS"/>
+              </a:rPr>
+              <a:t>nslookup</a:t>
+            </a:r>
+            <a:endParaRPr sz="1575" b="1" dirty="0">
+              <a:solidFill>
+                <a:srgbClr val="18A7CC"/>
+              </a:solidFill>
+              <a:latin typeface="Trebuchet MS"/>
+              <a:ea typeface="Trebuchet MS"/>
+              <a:cs typeface="Trebuchet MS"/>
+            </a:endParaRPr>
+          </a:p>
+        </p:txBody>
+      </p:sp>
+      <p:sp>
+        <p:nvSpPr>
+          <p:cNvPr id="10" name="Block body 2">
+            <a:extLst>
+              <a:ext uri="{FF2B5EF4-FFF2-40B4-BE49-F238E27FC236}">
+                <a16:creationId xmlns:a16="http://schemas.microsoft.com/office/drawing/2014/main" id="{73831D10-FA81-4630-80A2-DF54065724DA}"/>
+              </a:ext>
+            </a:extLst>
+          </p:cNvPr>
+          <p:cNvSpPr>
+            <a:spLocks noGrp="1"/>
+          </p:cNvSpPr>
+          <p:nvPr/>
+        </p:nvSpPr>
+        <p:spPr>
+          <a:xfrm>
+            <a:off x="781050" y="3171825"/>
+            <a:ext cx="4762500" cy="647700"/>
+          </a:xfrm>
+          <a:prstGeom prst="rect">
+            <a:avLst/>
+          </a:prstGeom>
+          <a:noFill/>
+          <a:ln w="0">
+            <a:noFill/>
+          </a:ln>
+        </p:spPr>
+        <p:txBody>
+          <a:bodyPr>
+            <a:noAutofit/>
+          </a:bodyPr>
+          <a:lstStyle/>
+          <a:p>
+            <a:pPr>
+              <a:defRPr sz="1650" b="0">
+                <a:solidFill>
+                  <a:srgbClr val="333333"/>
+                </a:solidFill>
+                <a:latin typeface="Trebuchet MS"/>
+                <a:ea typeface="Trebuchet MS"/>
+                <a:cs typeface="Trebuchet MS"/>
+              </a:defRPr>
+            </a:pPr>
+            <a:r>
+              <a:rPr lang="el-GR" sz="1650" dirty="0">
+                <a:solidFill>
+                  <a:srgbClr val="333333"/>
+                </a:solidFill>
+                <a:latin typeface="Trebuchet MS"/>
+                <a:ea typeface="Trebuchet MS"/>
+                <a:cs typeface="Trebuchet MS"/>
+              </a:rPr>
+              <a:t>Ελέγχει τις ρυθμίσεις</a:t>
+            </a:r>
+            <a:r>
+              <a:rPr sz="1650" b="0" dirty="0">
+                <a:solidFill>
+                  <a:srgbClr val="333333"/>
+                </a:solidFill>
+                <a:latin typeface="Trebuchet MS"/>
+                <a:ea typeface="Trebuchet MS"/>
+                <a:cs typeface="Trebuchet MS"/>
+              </a:rPr>
+              <a:t> DNS </a:t>
+            </a:r>
+            <a:r>
+              <a:rPr lang="el-GR" sz="1650" dirty="0">
+                <a:solidFill>
+                  <a:srgbClr val="333333"/>
+                </a:solidFill>
+                <a:latin typeface="Trebuchet MS"/>
+                <a:ea typeface="Trebuchet MS"/>
+                <a:cs typeface="Trebuchet MS"/>
+              </a:rPr>
+              <a:t>στον υπολογιστή μας</a:t>
+            </a:r>
+            <a:endParaRPr sz="1650" b="0" dirty="0">
+              <a:solidFill>
+                <a:srgbClr val="333333"/>
+              </a:solidFill>
+              <a:latin typeface="Trebuchet MS"/>
+              <a:ea typeface="Trebuchet MS"/>
+              <a:cs typeface="Trebuchet MS"/>
+            </a:endParaRPr>
+          </a:p>
+        </p:txBody>
+      </p:sp>
+      <p:sp>
+        <p:nvSpPr>
+          <p:cNvPr id="11" name="Block heading 3">
+            <a:extLst>
+              <a:ext uri="{FF2B5EF4-FFF2-40B4-BE49-F238E27FC236}">
+                <a16:creationId xmlns:a16="http://schemas.microsoft.com/office/drawing/2014/main" id="{FAD8B63B-9463-4F1E-9E70-0E1A7E576AB6}"/>
+              </a:ext>
+            </a:extLst>
+          </p:cNvPr>
+          <p:cNvSpPr>
+            <a:spLocks noGrp="1"/>
+          </p:cNvSpPr>
+          <p:nvPr/>
+        </p:nvSpPr>
+        <p:spPr>
+          <a:xfrm>
+            <a:off x="781050" y="3748087"/>
+            <a:ext cx="4762500" cy="285750"/>
+          </a:xfrm>
+          <a:prstGeom prst="rect">
+            <a:avLst/>
+          </a:prstGeom>
+          <a:noFill/>
+          <a:ln w="0">
+            <a:noFill/>
+          </a:ln>
+        </p:spPr>
+        <p:txBody>
+          <a:bodyPr>
+            <a:noAutofit/>
+          </a:bodyPr>
+          <a:lstStyle/>
+          <a:p>
+            <a:pPr>
+              <a:defRPr sz="1575" b="1">
+                <a:solidFill>
+                  <a:srgbClr val="18A7CC"/>
+                </a:solidFill>
+                <a:latin typeface="Trebuchet MS"/>
+                <a:ea typeface="Trebuchet MS"/>
+                <a:cs typeface="Trebuchet MS"/>
+              </a:defRPr>
+            </a:pPr>
+            <a:r>
+              <a:rPr sz="1575" b="1" dirty="0">
+                <a:solidFill>
+                  <a:srgbClr val="18A7CC"/>
+                </a:solidFill>
+                <a:latin typeface="Trebuchet MS"/>
+                <a:ea typeface="Trebuchet MS"/>
+                <a:cs typeface="Trebuchet MS"/>
+              </a:rPr>
+              <a:t>ping</a:t>
+            </a:r>
+          </a:p>
+        </p:txBody>
+      </p:sp>
+      <p:sp>
+        <p:nvSpPr>
+          <p:cNvPr id="12" name="Block body 3">
+            <a:extLst>
+              <a:ext uri="{FF2B5EF4-FFF2-40B4-BE49-F238E27FC236}">
+                <a16:creationId xmlns:a16="http://schemas.microsoft.com/office/drawing/2014/main" id="{B97222AA-170A-45DB-8311-5BF958D4B3D9}"/>
+              </a:ext>
+            </a:extLst>
+          </p:cNvPr>
+          <p:cNvSpPr>
+            <a:spLocks noGrp="1"/>
+          </p:cNvSpPr>
+          <p:nvPr/>
+        </p:nvSpPr>
+        <p:spPr>
+          <a:xfrm>
+            <a:off x="781050" y="4071937"/>
+            <a:ext cx="4762500" cy="647700"/>
+          </a:xfrm>
+          <a:prstGeom prst="rect">
+            <a:avLst/>
+          </a:prstGeom>
+          <a:noFill/>
+          <a:ln w="0">
+            <a:noFill/>
+          </a:ln>
+        </p:spPr>
+        <p:txBody>
+          <a:bodyPr>
+            <a:noAutofit/>
+          </a:bodyPr>
+          <a:lstStyle/>
+          <a:p>
+            <a:pPr>
+              <a:defRPr sz="1650" b="0">
+                <a:solidFill>
+                  <a:srgbClr val="333333"/>
+                </a:solidFill>
+                <a:latin typeface="Trebuchet MS"/>
+                <a:ea typeface="Trebuchet MS"/>
+                <a:cs typeface="Trebuchet MS"/>
+              </a:defRPr>
+            </a:pPr>
+            <a:r>
+              <a:rPr sz="1650" b="0" dirty="0" err="1">
+                <a:solidFill>
+                  <a:srgbClr val="333333"/>
+                </a:solidFill>
+                <a:latin typeface="Trebuchet MS"/>
+                <a:ea typeface="Trebuchet MS"/>
+                <a:cs typeface="Trebuchet MS"/>
+              </a:rPr>
+              <a:t>Ελέγχει</a:t>
+            </a:r>
+            <a:r>
+              <a:rPr sz="1650" b="0" dirty="0">
+                <a:solidFill>
+                  <a:srgbClr val="333333"/>
+                </a:solidFill>
+                <a:latin typeface="Trebuchet MS"/>
+                <a:ea typeface="Trebuchet MS"/>
+                <a:cs typeface="Trebuchet MS"/>
+              </a:rPr>
+              <a:t> αν </a:t>
+            </a:r>
+            <a:r>
+              <a:rPr sz="1650" b="0" dirty="0" err="1">
+                <a:solidFill>
+                  <a:srgbClr val="333333"/>
+                </a:solidFill>
+                <a:latin typeface="Trebuchet MS"/>
+                <a:ea typeface="Trebuchet MS"/>
+                <a:cs typeface="Trebuchet MS"/>
+              </a:rPr>
+              <a:t>έν</a:t>
+            </a:r>
+            <a:r>
+              <a:rPr sz="1650" b="0" dirty="0">
+                <a:solidFill>
+                  <a:srgbClr val="333333"/>
+                </a:solidFill>
+                <a:latin typeface="Trebuchet MS"/>
+                <a:ea typeface="Trebuchet MS"/>
+                <a:cs typeface="Trebuchet MS"/>
+              </a:rPr>
+              <a:t>ας προορισμός απαντά μέσω του δικτύου.</a:t>
+            </a:r>
+          </a:p>
+        </p:txBody>
+      </p:sp>
+      <p:sp>
+        <p:nvSpPr>
+          <p:cNvPr id="13" name="Block heading 4">
+            <a:extLst>
+              <a:ext uri="{FF2B5EF4-FFF2-40B4-BE49-F238E27FC236}">
+                <a16:creationId xmlns:a16="http://schemas.microsoft.com/office/drawing/2014/main" id="{9B3DBC8C-A3A1-405D-ACE9-6FA8B6D5955A}"/>
+              </a:ext>
+            </a:extLst>
+          </p:cNvPr>
+          <p:cNvSpPr>
+            <a:spLocks noGrp="1"/>
+          </p:cNvSpPr>
+          <p:nvPr/>
+        </p:nvSpPr>
+        <p:spPr>
+          <a:xfrm>
+            <a:off x="781050" y="4857750"/>
+            <a:ext cx="4762500" cy="285750"/>
+          </a:xfrm>
+          <a:prstGeom prst="rect">
+            <a:avLst/>
+          </a:prstGeom>
+          <a:noFill/>
+          <a:ln w="0">
+            <a:noFill/>
+          </a:ln>
+        </p:spPr>
+        <p:txBody>
+          <a:bodyPr>
+            <a:noAutofit/>
+          </a:bodyPr>
+          <a:lstStyle/>
+          <a:p>
+            <a:pPr>
+              <a:defRPr sz="1575" b="1">
+                <a:solidFill>
+                  <a:srgbClr val="18A7CC"/>
+                </a:solidFill>
+                <a:latin typeface="Trebuchet MS"/>
+                <a:ea typeface="Trebuchet MS"/>
+                <a:cs typeface="Trebuchet MS"/>
+              </a:defRPr>
+            </a:pPr>
+            <a:r>
+              <a:rPr sz="1575" b="1">
+                <a:solidFill>
+                  <a:srgbClr val="18A7CC"/>
+                </a:solidFill>
+                <a:latin typeface="Trebuchet MS"/>
+                <a:ea typeface="Trebuchet MS"/>
+                <a:cs typeface="Trebuchet MS"/>
+              </a:rPr>
+              <a:t>tracert</a:t>
+            </a:r>
+          </a:p>
+        </p:txBody>
+      </p:sp>
+      <p:sp>
+        <p:nvSpPr>
+          <p:cNvPr id="14" name="Block body 4">
+            <a:extLst>
+              <a:ext uri="{FF2B5EF4-FFF2-40B4-BE49-F238E27FC236}">
+                <a16:creationId xmlns:a16="http://schemas.microsoft.com/office/drawing/2014/main" id="{CC22DC93-68B1-49EA-AB54-1E943502D4F4}"/>
+              </a:ext>
+            </a:extLst>
+          </p:cNvPr>
+          <p:cNvSpPr>
+            <a:spLocks noGrp="1"/>
+          </p:cNvSpPr>
+          <p:nvPr/>
+        </p:nvSpPr>
+        <p:spPr>
+          <a:xfrm>
+            <a:off x="781050" y="5172075"/>
+            <a:ext cx="4762500" cy="647700"/>
+          </a:xfrm>
+          <a:prstGeom prst="rect">
+            <a:avLst/>
+          </a:prstGeom>
+          <a:noFill/>
+          <a:ln w="0">
+            <a:noFill/>
+          </a:ln>
+        </p:spPr>
+        <p:txBody>
+          <a:bodyPr>
+            <a:noAutofit/>
+          </a:bodyPr>
+          <a:lstStyle/>
+          <a:p>
+            <a:pPr>
+              <a:defRPr sz="1650" b="0">
+                <a:solidFill>
+                  <a:srgbClr val="333333"/>
+                </a:solidFill>
+                <a:latin typeface="Trebuchet MS"/>
+                <a:ea typeface="Trebuchet MS"/>
+                <a:cs typeface="Trebuchet MS"/>
+              </a:defRPr>
+            </a:pPr>
+            <a:r>
+              <a:rPr sz="1650" b="0" dirty="0">
+                <a:solidFill>
+                  <a:srgbClr val="333333"/>
+                </a:solidFill>
+                <a:latin typeface="Trebuchet MS"/>
+                <a:ea typeface="Trebuchet MS"/>
+                <a:cs typeface="Trebuchet MS"/>
+              </a:rPr>
+              <a:t>Πα</a:t>
+            </a:r>
+            <a:r>
+              <a:rPr sz="1650" b="0" dirty="0" err="1">
+                <a:solidFill>
+                  <a:srgbClr val="333333"/>
+                </a:solidFill>
+                <a:latin typeface="Trebuchet MS"/>
+                <a:ea typeface="Trebuchet MS"/>
+                <a:cs typeface="Trebuchet MS"/>
+              </a:rPr>
+              <a:t>ρουσιάζει</a:t>
+            </a:r>
+            <a:r>
+              <a:rPr sz="1650" b="0" dirty="0">
+                <a:solidFill>
+                  <a:srgbClr val="333333"/>
+                </a:solidFill>
+                <a:latin typeface="Trebuchet MS"/>
+                <a:ea typeface="Trebuchet MS"/>
+                <a:cs typeface="Trebuchet MS"/>
+              </a:rPr>
+              <a:t> </a:t>
+            </a:r>
+            <a:r>
+              <a:rPr sz="1650" b="0" dirty="0" err="1">
+                <a:solidFill>
+                  <a:srgbClr val="333333"/>
+                </a:solidFill>
+                <a:latin typeface="Trebuchet MS"/>
+                <a:ea typeface="Trebuchet MS"/>
+                <a:cs typeface="Trebuchet MS"/>
+              </a:rPr>
+              <a:t>τους</a:t>
+            </a:r>
+            <a:r>
+              <a:rPr sz="1650" b="0" dirty="0">
+                <a:solidFill>
+                  <a:srgbClr val="333333"/>
+                </a:solidFill>
+                <a:latin typeface="Trebuchet MS"/>
+                <a:ea typeface="Trebuchet MS"/>
+                <a:cs typeface="Trebuchet MS"/>
+              </a:rPr>
+              <a:t> </a:t>
+            </a:r>
+            <a:r>
+              <a:rPr sz="1650" b="0" dirty="0" err="1">
+                <a:solidFill>
+                  <a:srgbClr val="333333"/>
+                </a:solidFill>
+                <a:latin typeface="Trebuchet MS"/>
+                <a:ea typeface="Trebuchet MS"/>
+                <a:cs typeface="Trebuchet MS"/>
+              </a:rPr>
+              <a:t>ενδιάμεσους</a:t>
+            </a:r>
+            <a:r>
+              <a:rPr sz="1650" b="0" dirty="0">
+                <a:solidFill>
+                  <a:srgbClr val="333333"/>
+                </a:solidFill>
+                <a:latin typeface="Trebuchet MS"/>
+                <a:ea typeface="Trebuchet MS"/>
+                <a:cs typeface="Trebuchet MS"/>
+              </a:rPr>
+              <a:t> routers </a:t>
+            </a:r>
+            <a:r>
+              <a:rPr sz="1650" b="0" dirty="0" err="1">
+                <a:solidFill>
+                  <a:srgbClr val="333333"/>
+                </a:solidFill>
+                <a:latin typeface="Trebuchet MS"/>
+                <a:ea typeface="Trebuchet MS"/>
+                <a:cs typeface="Trebuchet MS"/>
+              </a:rPr>
+              <a:t>μέχρι</a:t>
+            </a:r>
+            <a:r>
+              <a:rPr sz="1650" b="0" dirty="0">
+                <a:solidFill>
+                  <a:srgbClr val="333333"/>
+                </a:solidFill>
+                <a:latin typeface="Trebuchet MS"/>
+                <a:ea typeface="Trebuchet MS"/>
+                <a:cs typeface="Trebuchet MS"/>
+              </a:rPr>
+              <a:t> </a:t>
+            </a:r>
+            <a:r>
+              <a:rPr sz="1650" b="0" dirty="0" err="1">
+                <a:solidFill>
+                  <a:srgbClr val="333333"/>
+                </a:solidFill>
+                <a:latin typeface="Trebuchet MS"/>
+                <a:ea typeface="Trebuchet MS"/>
+                <a:cs typeface="Trebuchet MS"/>
+              </a:rPr>
+              <a:t>τον</a:t>
+            </a:r>
+            <a:r>
+              <a:rPr sz="1650" b="0" dirty="0">
+                <a:solidFill>
+                  <a:srgbClr val="333333"/>
+                </a:solidFill>
+                <a:latin typeface="Trebuchet MS"/>
+                <a:ea typeface="Trebuchet MS"/>
+                <a:cs typeface="Trebuchet MS"/>
+              </a:rPr>
+              <a:t> π</a:t>
+            </a:r>
+            <a:r>
+              <a:rPr sz="1650" b="0" dirty="0" err="1">
+                <a:solidFill>
+                  <a:srgbClr val="333333"/>
+                </a:solidFill>
+                <a:latin typeface="Trebuchet MS"/>
+                <a:ea typeface="Trebuchet MS"/>
+                <a:cs typeface="Trebuchet MS"/>
+              </a:rPr>
+              <a:t>ροορισμό</a:t>
+            </a:r>
+            <a:r>
+              <a:rPr sz="1650" b="0" dirty="0">
+                <a:solidFill>
+                  <a:srgbClr val="333333"/>
+                </a:solidFill>
+                <a:latin typeface="Trebuchet MS"/>
+                <a:ea typeface="Trebuchet MS"/>
+                <a:cs typeface="Trebuchet MS"/>
+              </a:rPr>
+              <a:t>.</a:t>
+            </a:r>
+          </a:p>
+        </p:txBody>
+      </p:sp>
+      <p:pic>
+        <p:nvPicPr>
+          <p:cNvPr id="28" name="Picture 27"/>
+          <p:cNvPicPr>
+            <a:picLocks noChangeAspect="1"/>
+          </p:cNvPicPr>
+          <p:nvPr/>
+        </p:nvPicPr>
+        <p:blipFill>
+          <a:blip r:embed="rId3"/>
+          <a:stretch/>
+        </p:blipFill>
+        <p:spPr>
+          <a:xfrm>
+            <a:off x="5953125" y="2488192"/>
+            <a:ext cx="4905375" cy="2643615"/>
+          </a:xfrm>
+          <a:prstGeom prst="rect">
+            <a:avLst/>
+          </a:prstGeom>
+        </p:spPr>
+      </p:pic>
+    </p:spTree>
+    <p:extLst>
+      <p:ext uri="{BB962C8B-B14F-4D97-AF65-F5344CB8AC3E}">
+        <p14:creationId xmlns:p14="http://schemas.microsoft.com/office/powerpoint/2010/main" val="643881412"/>
+      </p:ext>
+    </p:extLst>
+  </p:cSld>
+  <p:clrMapOvr>
+    <a:masterClrMapping/>
+  </p:clrMapOvr>
+</p:sld>
+</file>
+
+<file path=ppt/slides/slide6.xml><?xml version="1.0" encoding="utf-8"?>
+<p:sld xmlns:a="http://schemas.openxmlformats.org/drawingml/2006/main" xmlns:r="http://schemas.openxmlformats.org/officeDocument/2006/relationships" xmlns:p="http://schemas.openxmlformats.org/presentationml/2006/main">
+  <p:cSld>
+    <p:spTree>
+      <p:nvGrpSpPr>
+        <p:cNvPr id="1" name=""/>
+        <p:cNvGrpSpPr/>
+        <p:nvPr/>
+      </p:nvGrpSpPr>
+      <p:grpSpPr>
+        <a:xfrm>
+          <a:off x="0" y="0"/>
+          <a:ext cx="0" cy="0"/>
+          <a:chOff x="0" y="0"/>
+          <a:chExt cx="0" cy="0"/>
+        </a:xfrm>
+      </p:grpSpPr>
+      <p:sp>
+        <p:nvSpPr>
+          <p:cNvPr id="2" name="Title 1">
+            <a:extLst>
+              <a:ext uri="{FF2B5EF4-FFF2-40B4-BE49-F238E27FC236}">
                 <a16:creationId xmlns:a16="http://schemas.microsoft.com/office/drawing/2014/main" id="{32C863D9-1989-4443-A424-8213A05F31BB}"/>
               </a:ext>
             </a:extLst>
@@ -12800,7 +14066,7 @@
 </p:sld>
 </file>
 
-<file path=ppt/slides/slide6.xml><?xml version="1.0" encoding="utf-8"?>
+<file path=ppt/slides/slide7.xml><?xml version="1.0" encoding="utf-8"?>
 <p:sld xmlns:a="http://schemas.openxmlformats.org/drawingml/2006/main" xmlns:r="http://schemas.openxmlformats.org/officeDocument/2006/relationships" xmlns:p="http://schemas.openxmlformats.org/presentationml/2006/main">
   <p:cSld>
     <p:spTree>
@@ -13067,7 +14333,7 @@
 </p:sld>
 </file>
 
-<file path=ppt/slides/slide7.xml><?xml version="1.0" encoding="utf-8"?>
+<file path=ppt/slides/slide8.xml><?xml version="1.0" encoding="utf-8"?>
 <p:sld xmlns:a="http://schemas.openxmlformats.org/drawingml/2006/main" xmlns:r="http://schemas.openxmlformats.org/officeDocument/2006/relationships" xmlns:p="http://schemas.openxmlformats.org/presentationml/2006/main">
   <p:cSld>
     <p:spTree>
@@ -14503,6 +15769,97 @@
             </a:defPPr>
           </a:lstStyle>
           <a:p>
+            <a:pPr>
+              <a:defRPr sz="1725" b="0">
+                <a:solidFill>
+                  <a:srgbClr val="333333"/>
+                </a:solidFill>
+              </a:defRPr>
+            </a:pPr>
+            <a:r>
+              <a:rPr sz="1725" b="0" dirty="0" err="1">
+                <a:solidFill>
+                  <a:srgbClr val="333333"/>
+                </a:solidFill>
+              </a:rPr>
+              <a:t>Το</a:t>
+            </a:r>
+            <a:r>
+              <a:rPr sz="1725" b="0" dirty="0">
+                <a:solidFill>
+                  <a:srgbClr val="333333"/>
+                </a:solidFill>
+              </a:rPr>
+              <a:t> ping </a:t>
+            </a:r>
+            <a:r>
+              <a:rPr sz="1725" b="0" dirty="0" err="1">
+                <a:solidFill>
+                  <a:srgbClr val="333333"/>
+                </a:solidFill>
+              </a:rPr>
+              <a:t>στέλνει</a:t>
+            </a:r>
+            <a:r>
+              <a:rPr sz="1725" b="0" dirty="0">
+                <a:solidFill>
+                  <a:srgbClr val="333333"/>
+                </a:solidFill>
+              </a:rPr>
+              <a:t> </a:t>
+            </a:r>
+            <a:r>
+              <a:rPr sz="1725" b="0" dirty="0" err="1">
+                <a:solidFill>
+                  <a:srgbClr val="333333"/>
+                </a:solidFill>
+              </a:rPr>
+              <a:t>μικρά</a:t>
+            </a:r>
+            <a:r>
+              <a:rPr sz="1725" b="0" dirty="0">
+                <a:solidFill>
+                  <a:srgbClr val="333333"/>
+                </a:solidFill>
+              </a:rPr>
+              <a:t> </a:t>
+            </a:r>
+            <a:r>
+              <a:rPr sz="1725" b="0" dirty="0" err="1">
+                <a:solidFill>
+                  <a:srgbClr val="333333"/>
+                </a:solidFill>
+              </a:rPr>
+              <a:t>δοκιμ</a:t>
+            </a:r>
+            <a:r>
+              <a:rPr sz="1725" b="0" dirty="0">
+                <a:solidFill>
+                  <a:srgbClr val="333333"/>
+                </a:solidFill>
+              </a:rPr>
+              <a:t>αστικά πακέτα και περιμένει απάντηση από τον προορισμό.</a:t>
+            </a:r>
+            <a:r>
+              <a:rPr lang="en-US" sz="1725" b="0" dirty="0">
+                <a:solidFill>
+                  <a:srgbClr val="333333"/>
+                </a:solidFill>
+              </a:rPr>
+              <a:t> </a:t>
+            </a:r>
+            <a:r>
+              <a:rPr lang="el-GR" dirty="0">
+                <a:solidFill>
+                  <a:srgbClr val="333333"/>
+                </a:solidFill>
+                <a:ea typeface="Trebuchet MS"/>
+                <a:cs typeface="Trebuchet MS"/>
+              </a:rPr>
+              <a:t>Ελέγχει αν ένας προορισμός απαντά μέσω του δικτύου.</a:t>
+            </a:r>
+          </a:p>
+          <a:p>
             <a:pPr algn="l">
               <a:defRPr sz="1725" b="0">
                 <a:solidFill>
@@ -14510,14 +15867,11 @@
                 </a:solidFill>
               </a:defRPr>
             </a:pPr>
-            <a:r>
-              <a:rPr sz="1725" b="0">
-                <a:solidFill>
-                  <a:srgbClr val="333333"/>
-                </a:solidFill>
-              </a:rPr>
-              <a:t>Το ping στέλνει μικρά δοκιμαστικά πακέτα και περιμένει απάντηση από τον προορισμό.</a:t>
-            </a:r>
+            <a:endParaRPr sz="1725" b="0" dirty="0">
+              <a:solidFill>
+                <a:srgbClr val="333333"/>
+              </a:solidFill>
+            </a:endParaRPr>
           </a:p>
         </p:txBody>
       </p:sp>
@@ -14537,7 +15891,7 @@
         </p:nvSpPr>
         <p:spPr>
           <a:xfrm>
-            <a:off x="799056" y="1885421"/>
+            <a:off x="868958" y="2142067"/>
             <a:ext cx="10096500" cy="1009650"/>
           </a:xfrm>
           <a:prstGeom prst="roundRect">
@@ -14641,8 +15995,8 @@
         </p:blipFill>
         <p:spPr>
           <a:xfrm>
-            <a:off x="1174459" y="3019425"/>
-            <a:ext cx="8443674" cy="3612575"/>
+            <a:off x="1174459" y="3285067"/>
+            <a:ext cx="7822789" cy="3346933"/>
           </a:xfrm>
           <a:prstGeom prst="rect">
             <a:avLst/>
@@ -14653,407 +16007,6 @@
     <p:extLst>
       <p:ext uri="{BB962C8B-B14F-4D97-AF65-F5344CB8AC3E}">
         <p14:creationId xmlns:p14="http://schemas.microsoft.com/office/powerpoint/2010/main" val="3085501264"/>
-      </p:ext>
-    </p:extLst>
-  </p:cSld>
-  <p:clrMapOvr>
-    <a:masterClrMapping/>
-  </p:clrMapOvr>
-</p:sld>
-</file>
-
-<file path=ppt/slides/slide8.xml><?xml version="1.0" encoding="utf-8"?>
-<p:sld xmlns:a="http://schemas.openxmlformats.org/drawingml/2006/main" xmlns:r="http://schemas.openxmlformats.org/officeDocument/2006/relationships" xmlns:p="http://schemas.openxmlformats.org/presentationml/2006/main">
-  <p:cSld>
-    <p:spTree>
-      <p:nvGrpSpPr>
-        <p:cNvPr id="1" name=""/>
-        <p:cNvGrpSpPr/>
-        <p:nvPr/>
-      </p:nvGrpSpPr>
-      <p:grpSpPr>
-        <a:xfrm>
-          <a:off x="0" y="0"/>
-          <a:ext cx="0" cy="0"/>
-          <a:chOff x="0" y="0"/>
-          <a:chExt cx="0" cy="0"/>
-        </a:xfrm>
-      </p:grpSpPr>
-      <p:sp>
-        <p:nvSpPr>
-          <p:cNvPr id="2" name="Title 1">
-            <a:extLst>
-              <a:ext uri="{FF2B5EF4-FFF2-40B4-BE49-F238E27FC236}">
-                <a16:creationId xmlns:a16="http://schemas.microsoft.com/office/drawing/2014/main" id="{B66EAA72-EC7F-4ECD-B4EF-D54E871C6881}"/>
-              </a:ext>
-            </a:extLst>
-          </p:cNvPr>
-          <p:cNvSpPr>
-            <a:spLocks noGrp="1"/>
-          </p:cNvSpPr>
-          <p:nvPr>
-            <p:ph type="title"/>
-          </p:nvPr>
-        </p:nvSpPr>
-        <p:spPr>
-          <a:xfrm>
-            <a:off x="677322" y="609600"/>
-            <a:ext cx="6326727" cy="742950"/>
-          </a:xfrm>
-        </p:spPr>
-        <p:txBody>
-          <a:bodyPr vert="horz" lIns="91440" tIns="45720" rIns="91440" bIns="45720" anchor="t">
-            <a:normAutofit fontScale="90000"/>
-          </a:bodyPr>
-          <a:lstStyle>
-            <a:defPPr>
-              <a:defRPr sz="3450">
-                <a:solidFill>
-                  <a:srgbClr val="5FCBEF"/>
-                </a:solidFill>
-              </a:defRPr>
-            </a:defPPr>
-          </a:lstStyle>
-          <a:p>
-            <a:pPr>
-              <a:defRPr sz="3450">
-                <a:solidFill>
-                  <a:srgbClr val="5FCBEF"/>
-                </a:solidFill>
-              </a:defRPr>
-            </a:pPr>
-            <a:r>
-              <a:rPr sz="3450" dirty="0" err="1">
-                <a:solidFill>
-                  <a:srgbClr val="5FCBEF"/>
-                </a:solidFill>
-              </a:rPr>
-              <a:t>tracert</a:t>
-            </a:r>
-            <a:r>
-              <a:rPr lang="el-GR" sz="3450" dirty="0">
-                <a:solidFill>
-                  <a:srgbClr val="5FCBEF"/>
-                </a:solidFill>
-              </a:rPr>
-              <a:t> (</a:t>
-            </a:r>
-            <a:r>
-              <a:rPr lang="el-GR" sz="3450" dirty="0" err="1">
-                <a:solidFill>
-                  <a:srgbClr val="5FCBEF"/>
-                </a:solidFill>
-              </a:rPr>
-              <a:t>διαγνωσή</a:t>
-            </a:r>
-            <a:r>
-              <a:rPr lang="el-GR" sz="3450" dirty="0">
-                <a:solidFill>
-                  <a:srgbClr val="5FCBEF"/>
-                </a:solidFill>
-              </a:rPr>
-              <a:t> προβλημάτων)</a:t>
-            </a:r>
-            <a:endParaRPr dirty="0"/>
-          </a:p>
-        </p:txBody>
-      </p:sp>
-      <p:sp>
-        <p:nvSpPr>
-          <p:cNvPr id="5" name="Clean content 5">
-            <a:extLst>
-              <a:ext uri="{FF2B5EF4-FFF2-40B4-BE49-F238E27FC236}">
-                <a16:creationId xmlns:a16="http://schemas.microsoft.com/office/drawing/2014/main" id="{EC97C31E-7703-4F76-AF7D-A634EF2410CF}"/>
-              </a:ext>
-            </a:extLst>
-          </p:cNvPr>
-          <p:cNvSpPr>
-            <a:spLocks noGrp="1"/>
-          </p:cNvSpPr>
-          <p:nvPr/>
-        </p:nvSpPr>
-        <p:spPr>
-          <a:xfrm>
-            <a:off x="619125" y="1381125"/>
-            <a:ext cx="11001375" cy="4953000"/>
-          </a:xfrm>
-          <a:prstGeom prst="rect">
-            <a:avLst/>
-          </a:prstGeom>
-          <a:solidFill>
-            <a:srgbClr val="FFFFFF"/>
-          </a:solidFill>
-          <a:ln w="0">
-            <a:noFill/>
-          </a:ln>
-        </p:spPr>
-        <p:txBody>
-          <a:bodyPr/>
-          <a:lstStyle/>
-          <a:p>
-            <a:endParaRPr lang="en-US"/>
-          </a:p>
-        </p:txBody>
-      </p:sp>
-      <p:sp>
-        <p:nvSpPr>
-          <p:cNvPr id="6" name="Rectangle 5">
-            <a:extLst>
-              <a:ext uri="{FF2B5EF4-FFF2-40B4-BE49-F238E27FC236}">
-                <a16:creationId xmlns:a16="http://schemas.microsoft.com/office/drawing/2014/main" id="{CD48E1F3-2B09-4AC2-AD4B-306CA7286834}"/>
-              </a:ext>
-            </a:extLst>
-          </p:cNvPr>
-          <p:cNvSpPr>
-            <a:spLocks noGrp="1"/>
-          </p:cNvSpPr>
-          <p:nvPr/>
-        </p:nvSpPr>
-        <p:spPr>
-          <a:xfrm>
-            <a:off x="781050" y="1243013"/>
-            <a:ext cx="10096500" cy="552450"/>
-          </a:xfrm>
-          <a:prstGeom prst="rect">
-            <a:avLst/>
-          </a:prstGeom>
-          <a:noFill/>
-          <a:ln w="0">
-            <a:noFill/>
-          </a:ln>
-        </p:spPr>
-        <p:txBody>
-          <a:bodyPr/>
-          <a:lstStyle>
-            <a:defPPr algn="l">
-              <a:defRPr sz="1725" b="0">
-                <a:solidFill>
-                  <a:srgbClr val="333333"/>
-                </a:solidFill>
-              </a:defRPr>
-            </a:defPPr>
-          </a:lstStyle>
-          <a:p>
-            <a:pPr algn="l">
-              <a:defRPr sz="1725" b="0">
-                <a:solidFill>
-                  <a:srgbClr val="333333"/>
-                </a:solidFill>
-              </a:defRPr>
-            </a:pPr>
-            <a:r>
-              <a:rPr sz="1725" b="0" dirty="0" err="1">
-                <a:solidFill>
-                  <a:srgbClr val="333333"/>
-                </a:solidFill>
-              </a:rPr>
-              <a:t>Το</a:t>
-            </a:r>
-            <a:r>
-              <a:rPr sz="1725" b="0" dirty="0">
-                <a:solidFill>
-                  <a:srgbClr val="333333"/>
-                </a:solidFill>
-              </a:rPr>
-              <a:t> </a:t>
-            </a:r>
-            <a:r>
-              <a:rPr sz="1725" b="0" dirty="0" err="1">
-                <a:solidFill>
-                  <a:srgbClr val="333333"/>
-                </a:solidFill>
-              </a:rPr>
-              <a:t>tracert</a:t>
-            </a:r>
-            <a:r>
-              <a:rPr sz="1725" b="0" dirty="0">
-                <a:solidFill>
-                  <a:srgbClr val="333333"/>
-                </a:solidFill>
-              </a:rPr>
-              <a:t> </a:t>
-            </a:r>
-            <a:r>
-              <a:rPr sz="1725" b="0" dirty="0" err="1">
-                <a:solidFill>
-                  <a:srgbClr val="333333"/>
-                </a:solidFill>
-              </a:rPr>
-              <a:t>εμφ</a:t>
-            </a:r>
-            <a:r>
-              <a:rPr sz="1725" b="0" dirty="0">
-                <a:solidFill>
-                  <a:srgbClr val="333333"/>
-                </a:solidFill>
-              </a:rPr>
-              <a:t>ανίζει διαδοχικά τους routers, δηλαδή τα hops, που περνά η κίνηση μέχρι τον προορισμό.</a:t>
-            </a:r>
-          </a:p>
-        </p:txBody>
-      </p:sp>
-      <p:sp>
-        <p:nvSpPr>
-          <p:cNvPr id="7" name="Rectangle: Rounded Corners 6">
-            <a:extLst>
-              <a:ext uri="{FF2B5EF4-FFF2-40B4-BE49-F238E27FC236}">
-                <a16:creationId xmlns:a16="http://schemas.microsoft.com/office/drawing/2014/main" id="{58D10C96-8AEC-4960-AB57-7B52199C482B}"/>
-              </a:ext>
-            </a:extLst>
-          </p:cNvPr>
-          <p:cNvSpPr>
-            <a:spLocks noGrp="1"/>
-          </p:cNvSpPr>
-          <p:nvPr/>
-        </p:nvSpPr>
-        <p:spPr>
-          <a:xfrm>
-            <a:off x="781050" y="1986425"/>
-            <a:ext cx="10096500" cy="666750"/>
-          </a:xfrm>
-          <a:prstGeom prst="roundRect">
-            <a:avLst>
-              <a:gd name="adj" fmla="val 11429"/>
-            </a:avLst>
-          </a:prstGeom>
-          <a:solidFill>
-            <a:srgbClr val="163746"/>
-          </a:solidFill>
-          <a:ln w="14288">
-            <a:solidFill>
-              <a:srgbClr val="5FCBEF"/>
-            </a:solidFill>
-            <a:prstDash val="solid"/>
-          </a:ln>
-        </p:spPr>
-        <p:txBody>
-          <a:bodyPr anchor="ctr"/>
-          <a:lstStyle>
-            <a:defPPr algn="l">
-              <a:defRPr sz="1650" b="1">
-                <a:solidFill>
-                  <a:srgbClr val="FFFFFF"/>
-                </a:solidFill>
-              </a:defRPr>
-            </a:defPPr>
-          </a:lstStyle>
-          <a:p>
-            <a:pPr algn="l">
-              <a:defRPr sz="1650" b="1">
-                <a:solidFill>
-                  <a:srgbClr val="FFFFFF"/>
-                </a:solidFill>
-              </a:defRPr>
-            </a:pPr>
-            <a:r>
-              <a:rPr sz="1650" b="1">
-                <a:solidFill>
-                  <a:srgbClr val="FFFFFF"/>
-                </a:solidFill>
-              </a:rPr>
-              <a:t>tracert www.google.com</a:t>
-            </a:r>
-          </a:p>
-        </p:txBody>
-      </p:sp>
-      <p:sp>
-        <p:nvSpPr>
-          <p:cNvPr id="9" name="Rectangle: Rounded Corners 8">
-            <a:extLst>
-              <a:ext uri="{FF2B5EF4-FFF2-40B4-BE49-F238E27FC236}">
-                <a16:creationId xmlns:a16="http://schemas.microsoft.com/office/drawing/2014/main" id="{E2023D39-8FF8-4B86-B353-8C76D724C654}"/>
-              </a:ext>
-            </a:extLst>
-          </p:cNvPr>
-          <p:cNvSpPr>
-            <a:spLocks noGrp="1"/>
-          </p:cNvSpPr>
-          <p:nvPr/>
-        </p:nvSpPr>
-        <p:spPr>
-          <a:xfrm>
-            <a:off x="781050" y="5562600"/>
-            <a:ext cx="10096500" cy="590550"/>
-          </a:xfrm>
-          <a:prstGeom prst="roundRect">
-            <a:avLst>
-              <a:gd name="adj" fmla="val 12903"/>
-            </a:avLst>
-          </a:prstGeom>
-          <a:solidFill>
-            <a:srgbClr val="E8F7FC"/>
-          </a:solidFill>
-          <a:ln w="11906">
-            <a:solidFill>
-              <a:srgbClr val="5FCBEF"/>
-            </a:solidFill>
-            <a:prstDash val="solid"/>
-          </a:ln>
-        </p:spPr>
-        <p:txBody>
-          <a:bodyPr anchor="ctr"/>
-          <a:lstStyle>
-            <a:defPPr algn="ctr">
-              <a:defRPr sz="1500" b="1">
-                <a:solidFill>
-                  <a:srgbClr val="23566A"/>
-                </a:solidFill>
-              </a:defRPr>
-            </a:defPPr>
-          </a:lstStyle>
-          <a:p>
-            <a:pPr algn="ctr">
-              <a:defRPr sz="1500" b="1">
-                <a:solidFill>
-                  <a:srgbClr val="23566A"/>
-                </a:solidFill>
-              </a:defRPr>
-            </a:pPr>
-            <a:r>
-              <a:rPr sz="1500" b="1">
-                <a:solidFill>
-                  <a:srgbClr val="23566A"/>
-                </a:solidFill>
-              </a:rPr>
-              <a:t>Χρήση: όταν το ping αποτυγχάνει ή είναι αργό, ελέγχουμε σε ποιο hop αρχίζει η καθυστέρηση.</a:t>
-            </a:r>
-          </a:p>
-        </p:txBody>
-      </p:sp>
-      <p:pic>
-        <p:nvPicPr>
-          <p:cNvPr id="4" name="Picture 3">
-            <a:extLst>
-              <a:ext uri="{FF2B5EF4-FFF2-40B4-BE49-F238E27FC236}">
-                <a16:creationId xmlns:a16="http://schemas.microsoft.com/office/drawing/2014/main" id="{36287844-4DD7-555C-F453-0F57E9E2B7EE}"/>
-              </a:ext>
-            </a:extLst>
-          </p:cNvPr>
-          <p:cNvPicPr>
-            <a:picLocks noChangeAspect="1"/>
-          </p:cNvPicPr>
-          <p:nvPr/>
-        </p:nvPicPr>
-        <p:blipFill>
-          <a:blip r:embed="rId3"/>
-          <a:stretch>
-            <a:fillRect/>
-          </a:stretch>
-        </p:blipFill>
-        <p:spPr>
-          <a:xfrm>
-            <a:off x="842674" y="2834150"/>
-            <a:ext cx="7907625" cy="2743263"/>
-          </a:xfrm>
-          <a:prstGeom prst="rect">
-            <a:avLst/>
-          </a:prstGeom>
-        </p:spPr>
-      </p:pic>
-    </p:spTree>
-    <p:extLst>
-      <p:ext uri="{BB962C8B-B14F-4D97-AF65-F5344CB8AC3E}">
-        <p14:creationId xmlns:p14="http://schemas.microsoft.com/office/powerpoint/2010/main" val="3703779373"/>
       </p:ext>
     </p:extLst>
   </p:cSld>
@@ -15098,72 +16051,85 @@
         </p:nvSpPr>
         <p:spPr>
           <a:xfrm>
-            <a:off x="677332" y="609600"/>
-            <a:ext cx="5825735" cy="1320800"/>
+            <a:off x="677322" y="609600"/>
+            <a:ext cx="6326727" cy="742950"/>
           </a:xfrm>
         </p:spPr>
         <p:txBody>
           <a:bodyPr vert="horz" lIns="91440" tIns="45720" rIns="91440" bIns="45720" anchor="t">
-            <a:normAutofit/>
+            <a:normAutofit fontScale="90000"/>
           </a:bodyPr>
-          <a:lstStyle/>
-          <a:p>
-            <a:r>
-              <a:t>Έλεγχος προβλημάτων</a:t>
-            </a:r>
-          </a:p>
-        </p:txBody>
-      </p:sp>
-      <p:sp>
-        <p:nvSpPr>
-          <p:cNvPr id="4" name="Content Placeholder 2">
-            <a:extLst>
-              <a:ext uri="{FF2B5EF4-FFF2-40B4-BE49-F238E27FC236}">
-                <a16:creationId xmlns:a16="http://schemas.microsoft.com/office/drawing/2014/main" id="{EB3F7303-CEA4-CFC4-5052-5C4AC627408E}"/>
-              </a:ext>
-            </a:extLst>
-          </p:cNvPr>
-          <p:cNvSpPr>
-            <a:spLocks noGrp="1"/>
-          </p:cNvSpPr>
-          <p:nvPr>
-            <p:ph idx="1"/>
-          </p:nvPr>
+          <a:lstStyle>
+            <a:defPPr>
+              <a:defRPr sz="3450">
+                <a:solidFill>
+                  <a:srgbClr val="5FCBEF"/>
+                </a:solidFill>
+              </a:defRPr>
+            </a:defPPr>
+          </a:lstStyle>
+          <a:p>
+            <a:pPr>
+              <a:defRPr sz="3450">
+                <a:solidFill>
+                  <a:srgbClr val="5FCBEF"/>
+                </a:solidFill>
+              </a:defRPr>
+            </a:pPr>
+            <a:r>
+              <a:rPr sz="3450" dirty="0" err="1">
+                <a:solidFill>
+                  <a:srgbClr val="5FCBEF"/>
+                </a:solidFill>
+              </a:rPr>
+              <a:t>tracert</a:t>
+            </a:r>
+            <a:r>
+              <a:rPr lang="el-GR" sz="3450" dirty="0">
+                <a:solidFill>
+                  <a:srgbClr val="5FCBEF"/>
+                </a:solidFill>
+              </a:rPr>
+              <a:t> (</a:t>
+            </a:r>
+            <a:r>
+              <a:rPr lang="el-GR" sz="3450" dirty="0" err="1">
+                <a:solidFill>
+                  <a:srgbClr val="5FCBEF"/>
+                </a:solidFill>
+              </a:rPr>
+              <a:t>διαγνωσή</a:t>
+            </a:r>
+            <a:r>
+              <a:rPr lang="el-GR" sz="3450" dirty="0">
+                <a:solidFill>
+                  <a:srgbClr val="5FCBEF"/>
+                </a:solidFill>
+              </a:rPr>
+              <a:t> προβλημάτων)</a:t>
+            </a:r>
+            <a:endParaRPr dirty="0"/>
+          </a:p>
+        </p:txBody>
+      </p:sp>
+      <p:sp>
+        <p:nvSpPr>
+          <p:cNvPr id="5" name="Clean content 5">
+            <a:extLst>
+              <a:ext uri="{FF2B5EF4-FFF2-40B4-BE49-F238E27FC236}">
+                <a16:creationId xmlns:a16="http://schemas.microsoft.com/office/drawing/2014/main" id="{EC97C31E-7703-4F76-AF7D-A634EF2410CF}"/>
+              </a:ext>
+            </a:extLst>
+          </p:cNvPr>
+          <p:cNvSpPr>
+            <a:spLocks noGrp="1"/>
+          </p:cNvSpPr>
+          <p:nvPr/>
         </p:nvSpPr>
         <p:spPr>
           <a:xfrm>
-            <a:off x="677333" y="2160589"/>
-            <a:ext cx="6716071" cy="3880772"/>
-          </a:xfrm>
-        </p:spPr>
-        <p:txBody>
-          <a:bodyPr>
-            <a:normAutofit/>
-          </a:bodyPr>
-          <a:lstStyle/>
-          <a:p>
-            <a:endParaRPr/>
-          </a:p>
-        </p:txBody>
-      </p:sp>
-      <p:sp>
-        <p:nvSpPr>
-          <p:cNvPr id="5" name="Clean content area">
-            <a:extLst>
-              <a:ext uri="{FF2B5EF4-FFF2-40B4-BE49-F238E27FC236}">
-                <a16:creationId xmlns:a16="http://schemas.microsoft.com/office/drawing/2014/main" id="{73383F08-623A-462D-A230-968EFDB9DA69}"/>
-              </a:ext>
-            </a:extLst>
-          </p:cNvPr>
-          <p:cNvSpPr>
-            <a:spLocks noGrp="1"/>
-          </p:cNvSpPr>
-          <p:nvPr/>
-        </p:nvSpPr>
-        <p:spPr>
-          <a:xfrm>
-            <a:off x="590550" y="1352550"/>
-            <a:ext cx="11049000" cy="5000625"/>
+            <a:off x="619125" y="1381125"/>
+            <a:ext cx="11001375" cy="4953000"/>
           </a:xfrm>
           <a:prstGeom prst="rect">
             <a:avLst/>
@@ -15179,16 +16145,16 @@
           <a:bodyPr/>
           <a:lstStyle/>
           <a:p>
-            <a:endParaRPr lang="en-GB"/>
-          </a:p>
-        </p:txBody>
-      </p:sp>
-      <p:sp>
-        <p:nvSpPr>
-          <p:cNvPr id="6" name="Section reference">
-            <a:extLst>
-              <a:ext uri="{FF2B5EF4-FFF2-40B4-BE49-F238E27FC236}">
-                <a16:creationId xmlns:a16="http://schemas.microsoft.com/office/drawing/2014/main" id="{97D7BDD8-9508-4066-A397-B979ED88C1FF}"/>
+            <a:endParaRPr lang="en-US"/>
+          </a:p>
+        </p:txBody>
+      </p:sp>
+      <p:sp>
+        <p:nvSpPr>
+          <p:cNvPr id="6" name="Rectangle 5">
+            <a:extLst>
+              <a:ext uri="{FF2B5EF4-FFF2-40B4-BE49-F238E27FC236}">
+                <a16:creationId xmlns:a16="http://schemas.microsoft.com/office/drawing/2014/main" id="{CD48E1F3-2B09-4AC2-AD4B-306CA7286834}"/>
               </a:ext>
             </a:extLst>
           </p:cNvPr>
@@ -15199,8 +16165,8 @@
         </p:nvSpPr>
         <p:spPr>
           <a:xfrm>
-            <a:off x="781050" y="1466850"/>
-            <a:ext cx="4953000" cy="266700"/>
+            <a:off x="781050" y="1243013"/>
+            <a:ext cx="10096500" cy="552450"/>
           </a:xfrm>
           <a:prstGeom prst="rect">
             <a:avLst/>
@@ -15211,41 +16177,81 @@
           </a:ln>
         </p:spPr>
         <p:txBody>
-          <a:bodyPr>
-            <a:noAutofit/>
-          </a:bodyPr>
-          <a:lstStyle/>
-          <a:p>
-            <a:pPr>
-              <a:defRPr sz="1275" b="1">
-                <a:solidFill>
-                  <a:srgbClr val="168EAD"/>
-                </a:solidFill>
-                <a:latin typeface="Trebuchet MS"/>
-                <a:ea typeface="Trebuchet MS"/>
-                <a:cs typeface="Trebuchet MS"/>
+          <a:bodyPr/>
+          <a:lstStyle>
+            <a:defPPr algn="l">
+              <a:defRPr sz="1725" b="0">
+                <a:solidFill>
+                  <a:srgbClr val="333333"/>
+                </a:solidFill>
+              </a:defRPr>
+            </a:defPPr>
+          </a:lstStyle>
+          <a:p>
+            <a:pPr algn="l">
+              <a:defRPr sz="1725" b="0">
+                <a:solidFill>
+                  <a:srgbClr val="333333"/>
+                </a:solidFill>
               </a:defRPr>
             </a:pPr>
             <a:r>
-              <a:rPr sz="1275" b="1">
-                <a:solidFill>
-                  <a:srgbClr val="168EAD"/>
-                </a:solidFill>
-                <a:latin typeface="Trebuchet MS"/>
-                <a:ea typeface="Trebuchet MS"/>
-                <a:cs typeface="Trebuchet MS"/>
+              <a:rPr sz="1725" b="0" dirty="0" err="1">
+                <a:solidFill>
+                  <a:srgbClr val="333333"/>
+                </a:solidFill>
               </a:rPr>
-              <a:t>A.5.M2 | Θεωρία</a:t>
-            </a:r>
-          </a:p>
-        </p:txBody>
-      </p:sp>
-      <p:sp>
-        <p:nvSpPr>
-          <p:cNvPr id="7" name="Block heading 1">
-            <a:extLst>
-              <a:ext uri="{FF2B5EF4-FFF2-40B4-BE49-F238E27FC236}">
-                <a16:creationId xmlns:a16="http://schemas.microsoft.com/office/drawing/2014/main" id="{F1736C36-5F43-4C65-BFB2-FE2C8E1539B0}"/>
+              <a:t>Το</a:t>
+            </a:r>
+            <a:r>
+              <a:rPr sz="1725" b="0" dirty="0">
+                <a:solidFill>
+                  <a:srgbClr val="333333"/>
+                </a:solidFill>
+              </a:rPr>
+              <a:t> </a:t>
+            </a:r>
+            <a:r>
+              <a:rPr sz="1725" b="0" dirty="0" err="1">
+                <a:solidFill>
+                  <a:srgbClr val="333333"/>
+                </a:solidFill>
+              </a:rPr>
+              <a:t>tracert</a:t>
+            </a:r>
+            <a:r>
+              <a:rPr sz="1725" b="0" dirty="0">
+                <a:solidFill>
+                  <a:srgbClr val="333333"/>
+                </a:solidFill>
+              </a:rPr>
+              <a:t> </a:t>
+            </a:r>
+            <a:r>
+              <a:rPr sz="1725" b="0" dirty="0" err="1">
+                <a:solidFill>
+                  <a:srgbClr val="333333"/>
+                </a:solidFill>
+              </a:rPr>
+              <a:t>εμφ</a:t>
+            </a:r>
+            <a:r>
+              <a:rPr sz="1725" b="0" dirty="0">
+                <a:solidFill>
+                  <a:srgbClr val="333333"/>
+                </a:solidFill>
+              </a:rPr>
+              <a:t>ανίζει διαδοχικά τους routers, δηλαδή τα hops, που περνά η κίνηση μέχρι τον προορισμό.</a:t>
+            </a:r>
+          </a:p>
+        </p:txBody>
+      </p:sp>
+      <p:sp>
+        <p:nvSpPr>
+          <p:cNvPr id="7" name="Rectangle: Rounded Corners 6">
+            <a:extLst>
+              <a:ext uri="{FF2B5EF4-FFF2-40B4-BE49-F238E27FC236}">
+                <a16:creationId xmlns:a16="http://schemas.microsoft.com/office/drawing/2014/main" id="{58D10C96-8AEC-4960-AB57-7B52199C482B}"/>
               </a:ext>
             </a:extLst>
           </p:cNvPr>
@@ -15256,53 +16262,60 @@
         </p:nvSpPr>
         <p:spPr>
           <a:xfrm>
-            <a:off x="781050" y="1857375"/>
-            <a:ext cx="4762500" cy="285750"/>
-          </a:xfrm>
-          <a:prstGeom prst="rect">
-            <a:avLst/>
+            <a:off x="781050" y="1986425"/>
+            <a:ext cx="10096500" cy="666750"/>
+          </a:xfrm>
+          <a:prstGeom prst="roundRect">
+            <a:avLst>
+              <a:gd name="adj" fmla="val 11429"/>
+            </a:avLst>
           </a:prstGeom>
-          <a:noFill/>
-          <a:ln w="0">
-            <a:noFill/>
+          <a:solidFill>
+            <a:srgbClr val="163746"/>
+          </a:solidFill>
+          <a:ln w="14288">
+            <a:solidFill>
+              <a:srgbClr val="5FCBEF"/>
+            </a:solidFill>
+            <a:prstDash val="solid"/>
           </a:ln>
         </p:spPr>
         <p:txBody>
-          <a:bodyPr>
-            <a:noAutofit/>
-          </a:bodyPr>
-          <a:lstStyle/>
-          <a:p>
-            <a:pPr>
-              <a:defRPr sz="1575" b="1">
-                <a:solidFill>
-                  <a:srgbClr val="18A7CC"/>
-                </a:solidFill>
-                <a:latin typeface="Trebuchet MS"/>
-                <a:ea typeface="Trebuchet MS"/>
-                <a:cs typeface="Trebuchet MS"/>
+          <a:bodyPr anchor="ctr"/>
+          <a:lstStyle>
+            <a:defPPr algn="l">
+              <a:defRPr sz="1650" b="1">
+                <a:solidFill>
+                  <a:srgbClr val="FFFFFF"/>
+                </a:solidFill>
+              </a:defRPr>
+            </a:defPPr>
+          </a:lstStyle>
+          <a:p>
+            <a:pPr algn="l">
+              <a:defRPr sz="1650" b="1">
+                <a:solidFill>
+                  <a:srgbClr val="FFFFFF"/>
+                </a:solidFill>
               </a:defRPr>
             </a:pPr>
             <a:r>
-              <a:rPr sz="1575" b="1">
-                <a:solidFill>
-                  <a:srgbClr val="18A7CC"/>
-                </a:solidFill>
-                <a:latin typeface="Trebuchet MS"/>
-                <a:ea typeface="Trebuchet MS"/>
-                <a:cs typeface="Trebuchet MS"/>
+              <a:rPr sz="1650" b="1">
+                <a:solidFill>
+                  <a:srgbClr val="FFFFFF"/>
+                </a:solidFill>
               </a:rPr>
-              <a:t>Φυσική σύνδεση</a:t>
-            </a:r>
-          </a:p>
-        </p:txBody>
-      </p:sp>
-      <p:sp>
-        <p:nvSpPr>
-          <p:cNvPr id="8" name="Block body 1">
-            <a:extLst>
-              <a:ext uri="{FF2B5EF4-FFF2-40B4-BE49-F238E27FC236}">
-                <a16:creationId xmlns:a16="http://schemas.microsoft.com/office/drawing/2014/main" id="{0160AFBB-5761-4B19-83D2-D7D792715BDC}"/>
+              <a:t>tracert www.google.com</a:t>
+            </a:r>
+          </a:p>
+        </p:txBody>
+      </p:sp>
+      <p:sp>
+        <p:nvSpPr>
+          <p:cNvPr id="9" name="Rectangle: Rounded Corners 8">
+            <a:extLst>
+              <a:ext uri="{FF2B5EF4-FFF2-40B4-BE49-F238E27FC236}">
+                <a16:creationId xmlns:a16="http://schemas.microsoft.com/office/drawing/2014/main" id="{E2023D39-8FF8-4B86-B353-8C76D724C654}"/>
               </a:ext>
             </a:extLst>
           </p:cNvPr>
@@ -15313,278 +16326,63 @@
         </p:nvSpPr>
         <p:spPr>
           <a:xfrm>
-            <a:off x="781050" y="2171700"/>
-            <a:ext cx="4762500" cy="981075"/>
-          </a:xfrm>
-          <a:prstGeom prst="rect">
-            <a:avLst/>
+            <a:off x="781050" y="5562600"/>
+            <a:ext cx="10096500" cy="590550"/>
+          </a:xfrm>
+          <a:prstGeom prst="roundRect">
+            <a:avLst>
+              <a:gd name="adj" fmla="val 12903"/>
+            </a:avLst>
           </a:prstGeom>
-          <a:noFill/>
-          <a:ln w="0">
-            <a:noFill/>
+          <a:solidFill>
+            <a:srgbClr val="E8F7FC"/>
+          </a:solidFill>
+          <a:ln w="11906">
+            <a:solidFill>
+              <a:srgbClr val="5FCBEF"/>
+            </a:solidFill>
+            <a:prstDash val="solid"/>
           </a:ln>
         </p:spPr>
         <p:txBody>
-          <a:bodyPr>
-            <a:noAutofit/>
-          </a:bodyPr>
-          <a:lstStyle/>
-          <a:p>
-            <a:pPr>
-              <a:defRPr sz="1650" b="0">
-                <a:solidFill>
-                  <a:srgbClr val="333333"/>
-                </a:solidFill>
-                <a:latin typeface="Trebuchet MS"/>
-                <a:ea typeface="Trebuchet MS"/>
-                <a:cs typeface="Trebuchet MS"/>
+          <a:bodyPr anchor="ctr"/>
+          <a:lstStyle>
+            <a:defPPr algn="ctr">
+              <a:defRPr sz="1500" b="1">
+                <a:solidFill>
+                  <a:srgbClr val="23566A"/>
+                </a:solidFill>
+              </a:defRPr>
+            </a:defPPr>
+          </a:lstStyle>
+          <a:p>
+            <a:pPr algn="ctr">
+              <a:defRPr sz="1500" b="1">
+                <a:solidFill>
+                  <a:srgbClr val="23566A"/>
+                </a:solidFill>
               </a:defRPr>
             </a:pPr>
             <a:r>
-              <a:rPr sz="1650" b="0">
-                <a:solidFill>
-                  <a:srgbClr val="333333"/>
-                </a:solidFill>
-                <a:latin typeface="Trebuchet MS"/>
-                <a:ea typeface="Trebuchet MS"/>
-                <a:cs typeface="Trebuchet MS"/>
+              <a:rPr sz="1500" b="1">
+                <a:solidFill>
+                  <a:srgbClr val="23566A"/>
+                </a:solidFill>
               </a:rPr>
-              <a:t>Ελέγχουμε καλώδια, θύρες, φωτεινές ενδείξεις και ασύρματη σύνδεση.</a:t>
-            </a:r>
-          </a:p>
-        </p:txBody>
-      </p:sp>
-      <p:sp>
-        <p:nvSpPr>
-          <p:cNvPr id="9" name="Block heading 2">
-            <a:extLst>
-              <a:ext uri="{FF2B5EF4-FFF2-40B4-BE49-F238E27FC236}">
-                <a16:creationId xmlns:a16="http://schemas.microsoft.com/office/drawing/2014/main" id="{9B4086BE-70E4-4A1F-82CE-DB4DA9B4A135}"/>
-              </a:ext>
-            </a:extLst>
-          </p:cNvPr>
-          <p:cNvSpPr>
-            <a:spLocks noGrp="1"/>
-          </p:cNvSpPr>
-          <p:nvPr/>
-        </p:nvSpPr>
-        <p:spPr>
-          <a:xfrm>
-            <a:off x="781050" y="3190875"/>
-            <a:ext cx="4762500" cy="285750"/>
-          </a:xfrm>
-          <a:prstGeom prst="rect">
-            <a:avLst/>
-          </a:prstGeom>
-          <a:noFill/>
-          <a:ln w="0">
-            <a:noFill/>
-          </a:ln>
-        </p:spPr>
-        <p:txBody>
-          <a:bodyPr>
-            <a:noAutofit/>
-          </a:bodyPr>
-          <a:lstStyle/>
-          <a:p>
-            <a:pPr>
-              <a:defRPr sz="1575" b="1">
-                <a:solidFill>
-                  <a:srgbClr val="18A7CC"/>
-                </a:solidFill>
-                <a:latin typeface="Trebuchet MS"/>
-                <a:ea typeface="Trebuchet MS"/>
-                <a:cs typeface="Trebuchet MS"/>
-              </a:defRPr>
-            </a:pPr>
-            <a:r>
-              <a:rPr sz="1575" b="1">
-                <a:solidFill>
-                  <a:srgbClr val="18A7CC"/>
-                </a:solidFill>
-                <a:latin typeface="Trebuchet MS"/>
-                <a:ea typeface="Trebuchet MS"/>
-                <a:cs typeface="Trebuchet MS"/>
-              </a:rPr>
-              <a:t>Ρυθμίσεις</a:t>
-            </a:r>
-          </a:p>
-        </p:txBody>
-      </p:sp>
-      <p:sp>
-        <p:nvSpPr>
-          <p:cNvPr id="10" name="Block body 2">
-            <a:extLst>
-              <a:ext uri="{FF2B5EF4-FFF2-40B4-BE49-F238E27FC236}">
-                <a16:creationId xmlns:a16="http://schemas.microsoft.com/office/drawing/2014/main" id="{F247D9E9-005F-4FAD-BF67-666F30485EE6}"/>
-              </a:ext>
-            </a:extLst>
-          </p:cNvPr>
-          <p:cNvSpPr>
-            <a:spLocks noGrp="1"/>
-          </p:cNvSpPr>
-          <p:nvPr/>
-        </p:nvSpPr>
-        <p:spPr>
-          <a:xfrm>
-            <a:off x="781050" y="3505200"/>
-            <a:ext cx="4762500" cy="981075"/>
-          </a:xfrm>
-          <a:prstGeom prst="rect">
-            <a:avLst/>
-          </a:prstGeom>
-          <a:noFill/>
-          <a:ln w="0">
-            <a:noFill/>
-          </a:ln>
-        </p:spPr>
-        <p:txBody>
-          <a:bodyPr>
-            <a:noAutofit/>
-          </a:bodyPr>
-          <a:lstStyle/>
-          <a:p>
-            <a:pPr>
-              <a:defRPr sz="1650" b="0">
-                <a:solidFill>
-                  <a:srgbClr val="333333"/>
-                </a:solidFill>
-                <a:latin typeface="Trebuchet MS"/>
-                <a:ea typeface="Trebuchet MS"/>
-                <a:cs typeface="Trebuchet MS"/>
-              </a:defRPr>
-            </a:pPr>
-            <a:r>
-              <a:rPr sz="1650" b="0">
-                <a:solidFill>
-                  <a:srgbClr val="333333"/>
-                </a:solidFill>
-                <a:latin typeface="Trebuchet MS"/>
-                <a:ea typeface="Trebuchet MS"/>
-                <a:cs typeface="Trebuchet MS"/>
-              </a:rPr>
-              <a:t>Ελέγχουμε την IP Address, τη μάσκα και το Default Gateway.</a:t>
-            </a:r>
-          </a:p>
-        </p:txBody>
-      </p:sp>
-      <p:sp>
-        <p:nvSpPr>
-          <p:cNvPr id="11" name="Block heading 3">
-            <a:extLst>
-              <a:ext uri="{FF2B5EF4-FFF2-40B4-BE49-F238E27FC236}">
-                <a16:creationId xmlns:a16="http://schemas.microsoft.com/office/drawing/2014/main" id="{DF305F1F-5AC1-4283-98E0-31602520785C}"/>
-              </a:ext>
-            </a:extLst>
-          </p:cNvPr>
-          <p:cNvSpPr>
-            <a:spLocks noGrp="1"/>
-          </p:cNvSpPr>
-          <p:nvPr/>
-        </p:nvSpPr>
-        <p:spPr>
-          <a:xfrm>
-            <a:off x="781050" y="4524375"/>
-            <a:ext cx="4762500" cy="285750"/>
-          </a:xfrm>
-          <a:prstGeom prst="rect">
-            <a:avLst/>
-          </a:prstGeom>
-          <a:noFill/>
-          <a:ln w="0">
-            <a:noFill/>
-          </a:ln>
-        </p:spPr>
-        <p:txBody>
-          <a:bodyPr>
-            <a:noAutofit/>
-          </a:bodyPr>
-          <a:lstStyle/>
-          <a:p>
-            <a:pPr>
-              <a:defRPr sz="1575" b="1">
-                <a:solidFill>
-                  <a:srgbClr val="18A7CC"/>
-                </a:solidFill>
-                <a:latin typeface="Trebuchet MS"/>
-                <a:ea typeface="Trebuchet MS"/>
-                <a:cs typeface="Trebuchet MS"/>
-              </a:defRPr>
-            </a:pPr>
-            <a:r>
-              <a:rPr sz="1575" b="1">
-                <a:solidFill>
-                  <a:srgbClr val="18A7CC"/>
-                </a:solidFill>
-                <a:latin typeface="Trebuchet MS"/>
-                <a:ea typeface="Trebuchet MS"/>
-                <a:cs typeface="Trebuchet MS"/>
-              </a:rPr>
-              <a:t>Δοκιμές</a:t>
-            </a:r>
-          </a:p>
-        </p:txBody>
-      </p:sp>
-      <p:sp>
-        <p:nvSpPr>
-          <p:cNvPr id="12" name="Block body 3">
-            <a:extLst>
-              <a:ext uri="{FF2B5EF4-FFF2-40B4-BE49-F238E27FC236}">
-                <a16:creationId xmlns:a16="http://schemas.microsoft.com/office/drawing/2014/main" id="{FF732DCC-CCBB-4D4B-9717-9FF19AD766E4}"/>
-              </a:ext>
-            </a:extLst>
-          </p:cNvPr>
-          <p:cNvSpPr>
-            <a:spLocks noGrp="1"/>
-          </p:cNvSpPr>
-          <p:nvPr/>
-        </p:nvSpPr>
-        <p:spPr>
-          <a:xfrm>
-            <a:off x="781050" y="4838700"/>
-            <a:ext cx="4762500" cy="981075"/>
-          </a:xfrm>
-          <a:prstGeom prst="rect">
-            <a:avLst/>
-          </a:prstGeom>
-          <a:noFill/>
-          <a:ln w="0">
-            <a:noFill/>
-          </a:ln>
-        </p:spPr>
-        <p:txBody>
-          <a:bodyPr>
-            <a:noAutofit/>
-          </a:bodyPr>
-          <a:lstStyle/>
-          <a:p>
-            <a:pPr>
-              <a:defRPr sz="1650" b="0">
-                <a:solidFill>
-                  <a:srgbClr val="333333"/>
-                </a:solidFill>
-                <a:latin typeface="Trebuchet MS"/>
-                <a:ea typeface="Trebuchet MS"/>
-                <a:cs typeface="Trebuchet MS"/>
-              </a:defRPr>
-            </a:pPr>
-            <a:r>
-              <a:rPr sz="1650" b="0">
-                <a:solidFill>
-                  <a:srgbClr val="333333"/>
-                </a:solidFill>
-                <a:latin typeface="Trebuchet MS"/>
-                <a:ea typeface="Trebuchet MS"/>
-                <a:cs typeface="Trebuchet MS"/>
-              </a:rPr>
-              <a:t>Δοκιμάζουμε επικοινωνία πρώτα με τον router και έπειτα με απομακρυσμένο προορισμό.</a:t>
+              <a:t>Χρήση: όταν το ping αποτυγχάνει ή είναι αργό, ελέγχουμε σε ποιο hop αρχίζει η καθυστέρηση.</a:t>
             </a:r>
           </a:p>
         </p:txBody>
       </p:sp>
       <p:pic>
         <p:nvPicPr>
-          <p:cNvPr id="24" name="Picture 23"/>
+          <p:cNvPr id="4" name="Picture 3">
+            <a:extLst>
+              <a:ext uri="{FF2B5EF4-FFF2-40B4-BE49-F238E27FC236}">
+                <a16:creationId xmlns:a16="http://schemas.microsoft.com/office/drawing/2014/main" id="{36287844-4DD7-555C-F453-0F57E9E2B7EE}"/>
+              </a:ext>
+            </a:extLst>
+          </p:cNvPr>
           <p:cNvPicPr>
             <a:picLocks noChangeAspect="1"/>
           </p:cNvPicPr>
@@ -15592,12 +16390,14 @@
         </p:nvPicPr>
         <p:blipFill>
           <a:blip r:embed="rId3"/>
-          <a:stretch/>
+          <a:stretch>
+            <a:fillRect/>
+          </a:stretch>
         </p:blipFill>
         <p:spPr>
           <a:xfrm>
-            <a:off x="5953125" y="2553451"/>
-            <a:ext cx="4905375" cy="2513099"/>
+            <a:off x="842674" y="2834150"/>
+            <a:ext cx="7907625" cy="2743263"/>
           </a:xfrm>
           <a:prstGeom prst="rect">
             <a:avLst/>
@@ -15607,7 +16407,7 @@
     </p:spTree>
     <p:extLst>
       <p:ext uri="{BB962C8B-B14F-4D97-AF65-F5344CB8AC3E}">
-        <p14:creationId xmlns:p14="http://schemas.microsoft.com/office/powerpoint/2010/main" val="3786659628"/>
+        <p14:creationId xmlns:p14="http://schemas.microsoft.com/office/powerpoint/2010/main" val="3703779373"/>
       </p:ext>
     </p:extLst>
   </p:cSld>
